--- a/Cópia de Modelo-poster-xxxviii-cic-unesp.pptx
+++ b/Cópia de Modelo-poster-xxxviii-cic-unesp.pptx
@@ -4804,177 +4804,6 @@
           </a:ln>
         </p:spPr>
       </p:pic>
-      <p:sp>
-        <p:nvSpPr>
-          <p:cNvPr id="49" name="Google Shape;85;g37106c98961_0_150"/>
-          <p:cNvSpPr/>
-          <p:nvPr/>
-        </p:nvSpPr>
-        <p:spPr>
-          <a:xfrm>
-            <a:off x="936000" y="8280000"/>
-            <a:ext cx="30491280" cy="2159280"/>
-          </a:xfrm>
-          <a:prstGeom prst="rect">
-            <a:avLst/>
-          </a:prstGeom>
-          <a:noFill/>
-          <a:ln w="0">
-            <a:noFill/>
-          </a:ln>
-        </p:spPr>
-        <p:style>
-          <a:lnRef idx="0"/>
-          <a:fillRef idx="0"/>
-          <a:effectRef idx="0"/>
-          <a:fontRef idx="minor"/>
-        </p:style>
-        <p:txBody>
-          <a:bodyPr lIns="82800" rIns="82800" tIns="41400" bIns="41400" anchor="t">
-            <a:noAutofit/>
-          </a:bodyPr>
-          <a:p>
-            <a:pPr algn="ctr">
-              <a:lnSpc>
-                <a:spcPct val="100000"/>
-              </a:lnSpc>
-              <a:tabLst>
-                <a:tab algn="l" pos="0"/>
-              </a:tabLst>
-            </a:pPr>
-            <a:r>
-              <a:rPr b="0" lang="en-US" sz="6000" spc="-1" strike="noStrike">
-                <a:solidFill>
-                  <a:srgbClr val="404040"/>
-                </a:solidFill>
-                <a:latin typeface="Calibri"/>
-                <a:ea typeface="Calibri"/>
-              </a:rPr>
-              <a:t>Ronaldo Chiavegatti Sampaio Corrêa  |  Rodrigo Capobianco Guido </a:t>
-            </a:r>
-            <a:endParaRPr b="0" lang="pt-BR" sz="6000" spc="-1" strike="noStrike">
-              <a:solidFill>
-                <a:srgbClr val="000000"/>
-              </a:solidFill>
-              <a:latin typeface="Arial"/>
-            </a:endParaRPr>
-          </a:p>
-        </p:txBody>
-      </p:sp>
-      <p:sp>
-        <p:nvSpPr>
-          <p:cNvPr id="50" name="Google Shape;86;g37106c98961_0_150"/>
-          <p:cNvSpPr/>
-          <p:nvPr/>
-        </p:nvSpPr>
-        <p:spPr>
-          <a:xfrm>
-            <a:off x="936000" y="10548000"/>
-            <a:ext cx="30491280" cy="2159280"/>
-          </a:xfrm>
-          <a:prstGeom prst="rect">
-            <a:avLst/>
-          </a:prstGeom>
-          <a:noFill/>
-          <a:ln w="0">
-            <a:noFill/>
-          </a:ln>
-        </p:spPr>
-        <p:style>
-          <a:lnRef idx="0"/>
-          <a:fillRef idx="0"/>
-          <a:effectRef idx="0"/>
-          <a:fontRef idx="minor"/>
-        </p:style>
-        <p:txBody>
-          <a:bodyPr lIns="90000" rIns="90000" tIns="45000" bIns="45000" anchor="t">
-            <a:noAutofit/>
-          </a:bodyPr>
-          <a:p>
-            <a:pPr algn="ctr">
-              <a:lnSpc>
-                <a:spcPct val="100000"/>
-              </a:lnSpc>
-              <a:tabLst>
-                <a:tab algn="l" pos="0"/>
-              </a:tabLst>
-            </a:pPr>
-            <a:r>
-              <a:rPr b="0" lang="en-US" sz="6000" spc="-1" strike="noStrike">
-                <a:solidFill>
-                  <a:srgbClr val="404040"/>
-                </a:solidFill>
-                <a:latin typeface="Calibri"/>
-                <a:ea typeface="Calibri"/>
-              </a:rPr>
-              <a:t>Instituto de Biociências, Letras e Ciências Exatas – IBILCE/Unesp, Câmpus de São José do Rio Preto</a:t>
-            </a:r>
-            <a:endParaRPr b="0" lang="pt-BR" sz="6000" spc="-1" strike="noStrike">
-              <a:solidFill>
-                <a:srgbClr val="000000"/>
-              </a:solidFill>
-              <a:latin typeface="Arial"/>
-            </a:endParaRPr>
-          </a:p>
-        </p:txBody>
-      </p:sp>
-      <p:sp>
-        <p:nvSpPr>
-          <p:cNvPr id="51" name="Google Shape;87;g37106c98961_0_150"/>
-          <p:cNvSpPr/>
-          <p:nvPr/>
-        </p:nvSpPr>
-        <p:spPr>
-          <a:xfrm>
-            <a:off x="871560" y="5867640"/>
-            <a:ext cx="30507840" cy="2451600"/>
-          </a:xfrm>
-          <a:prstGeom prst="rect">
-            <a:avLst/>
-          </a:prstGeom>
-          <a:noFill/>
-          <a:ln w="0">
-            <a:noFill/>
-          </a:ln>
-        </p:spPr>
-        <p:style>
-          <a:lnRef idx="0"/>
-          <a:fillRef idx="0"/>
-          <a:effectRef idx="0"/>
-          <a:fontRef idx="minor"/>
-        </p:style>
-        <p:txBody>
-          <a:bodyPr lIns="82800" rIns="82800" tIns="41400" bIns="41400" anchor="t">
-            <a:noAutofit/>
-          </a:bodyPr>
-          <a:p>
-            <a:pPr algn="ctr">
-              <a:lnSpc>
-                <a:spcPct val="100000"/>
-              </a:lnSpc>
-              <a:tabLst>
-                <a:tab algn="l" pos="0"/>
-              </a:tabLst>
-            </a:pPr>
-            <a:r>
-              <a:rPr b="1" lang="en-US" sz="7000" spc="-1" strike="noStrike">
-                <a:solidFill>
-                  <a:srgbClr val="606060"/>
-                </a:solidFill>
-                <a:latin typeface="Calibri"/>
-                <a:ea typeface="Calibri"/>
-              </a:rPr>
-              <a:t>IDENTIFICAÇÃO COMPUTACIONAL INTELIGENTE DE DISFUNÇÕES NO TRATO VOCAL</a:t>
-            </a:r>
-            <a:endParaRPr b="0" lang="pt-BR" sz="7000" spc="-1" strike="noStrike">
-              <a:solidFill>
-                <a:srgbClr val="000000"/>
-              </a:solidFill>
-              <a:latin typeface="Arial"/>
-            </a:endParaRPr>
-          </a:p>
-        </p:txBody>
-      </p:sp>
       <p:pic>
         <p:nvPicPr>
           <p:cNvPr id="52" name="Google Shape;89;g37106c98961_0_150" descr=""/>
@@ -4998,123 +4827,6 @@
           </a:ln>
         </p:spPr>
       </p:pic>
-      <p:sp>
-        <p:nvSpPr>
-          <p:cNvPr id="53" name="Google Shape;90;g37106c98961_0_150"/>
-          <p:cNvSpPr/>
-          <p:nvPr/>
-        </p:nvSpPr>
-        <p:spPr>
-          <a:xfrm>
-            <a:off x="21061080" y="36294120"/>
-            <a:ext cx="8787960" cy="3923640"/>
-          </a:xfrm>
-          <a:prstGeom prst="wedgeEllipseCallout">
-            <a:avLst>
-              <a:gd name="adj1" fmla="val 17142"/>
-              <a:gd name="adj2" fmla="val 28075"/>
-            </a:avLst>
-          </a:prstGeom>
-          <a:solidFill>
-            <a:schemeClr val="accent1"/>
-          </a:solidFill>
-          <a:ln w="9525">
-            <a:solidFill>
-              <a:srgbClr val="000000"/>
-            </a:solidFill>
-            <a:round/>
-          </a:ln>
-        </p:spPr>
-        <p:style>
-          <a:lnRef idx="0"/>
-          <a:fillRef idx="0"/>
-          <a:effectRef idx="0"/>
-          <a:fontRef idx="minor"/>
-        </p:style>
-        <p:txBody>
-          <a:bodyPr lIns="90000" rIns="90000" tIns="45000" bIns="45000" anchor="t">
-            <a:normAutofit/>
-          </a:bodyPr>
-          <a:p>
-            <a:pPr algn="ctr">
-              <a:lnSpc>
-                <a:spcPct val="100000"/>
-              </a:lnSpc>
-              <a:tabLst>
-                <a:tab algn="l" pos="0"/>
-              </a:tabLst>
-            </a:pPr>
-            <a:r>
-              <a:rPr b="1" lang="en-US" sz="3000" spc="-1" strike="noStrike">
-                <a:solidFill>
-                  <a:srgbClr val="404040"/>
-                </a:solidFill>
-                <a:latin typeface="Calibri"/>
-                <a:ea typeface="Calibri"/>
-              </a:rPr>
-              <a:t>Iniciação Científica Voluntária</a:t>
-            </a:r>
-            <a:endParaRPr b="0" lang="pt-BR" sz="3000" spc="-1" strike="noStrike">
-              <a:solidFill>
-                <a:srgbClr val="000000"/>
-              </a:solidFill>
-              <a:latin typeface="Arial"/>
-            </a:endParaRPr>
-          </a:p>
-          <a:p>
-            <a:pPr algn="ctr">
-              <a:lnSpc>
-                <a:spcPct val="100000"/>
-              </a:lnSpc>
-              <a:tabLst>
-                <a:tab algn="l" pos="0"/>
-              </a:tabLst>
-            </a:pPr>
-            <a:r>
-              <a:rPr b="1" lang="en-US" sz="2600" spc="-1" strike="noStrike">
-                <a:solidFill>
-                  <a:srgbClr val="404040"/>
-                </a:solidFill>
-                <a:latin typeface="Calibri"/>
-                <a:ea typeface="Calibri"/>
-              </a:rPr>
-              <a:t>PIBIC/Unesp</a:t>
-            </a:r>
-            <a:r>
-              <a:rPr b="0" lang="en-US" sz="2600" spc="-1" strike="noStrike">
-                <a:solidFill>
-                  <a:srgbClr val="404040"/>
-                </a:solidFill>
-                <a:latin typeface="Calibri"/>
-                <a:ea typeface="Calibri"/>
-              </a:rPr>
-              <a:t> — sem bolsa</a:t>
-            </a:r>
-            <a:endParaRPr b="0" lang="pt-BR" sz="2600" spc="-1" strike="noStrike">
-              <a:solidFill>
-                <a:srgbClr val="000000"/>
-              </a:solidFill>
-              <a:latin typeface="Arial"/>
-            </a:endParaRPr>
-          </a:p>
-          <a:p>
-            <a:pPr>
-              <a:lnSpc>
-                <a:spcPct val="100000"/>
-              </a:lnSpc>
-              <a:tabLst>
-                <a:tab algn="l" pos="0"/>
-              </a:tabLst>
-            </a:pPr>
-            <a:endParaRPr b="0" lang="pt-BR" sz="4000" spc="-1" strike="noStrike">
-              <a:solidFill>
-                <a:srgbClr val="000000"/>
-              </a:solidFill>
-              <a:latin typeface="Arial"/>
-            </a:endParaRPr>
-          </a:p>
-        </p:txBody>
-      </p:sp>
       <p:pic>
         <p:nvPicPr>
           <p:cNvPr id="54" name="Google Shape;94;g37106c98961_0_150" descr=""/>
@@ -5184,1871 +4896,6 @@
           </a:ln>
         </p:spPr>
       </p:pic>
-      <p:sp>
-        <p:nvSpPr>
-          <p:cNvPr id="57" name="TextBox 96"/>
-          <p:cNvSpPr/>
-          <p:nvPr/>
-        </p:nvSpPr>
-        <p:spPr>
-          <a:xfrm>
-            <a:off x="936000" y="12960000"/>
-            <a:ext cx="14399280" cy="914040"/>
-          </a:xfrm>
-          <a:prstGeom prst="rect">
-            <a:avLst/>
-          </a:prstGeom>
-          <a:noFill/>
-          <a:ln w="0">
-            <a:noFill/>
-          </a:ln>
-        </p:spPr>
-        <p:style>
-          <a:lnRef idx="0"/>
-          <a:fillRef idx="0"/>
-          <a:effectRef idx="0"/>
-          <a:fontRef idx="minor"/>
-        </p:style>
-        <p:txBody>
-          <a:bodyPr lIns="90000" rIns="90000" tIns="0" bIns="0" anchor="t">
-            <a:spAutoFit/>
-          </a:bodyPr>
-          <a:p>
-            <a:pPr>
-              <a:lnSpc>
-                <a:spcPct val="100000"/>
-              </a:lnSpc>
-            </a:pPr>
-            <a:r>
-              <a:rPr b="1" lang="pt-BR" sz="6000" spc="-1" strike="noStrike">
-                <a:solidFill>
-                  <a:srgbClr val="1f3b57"/>
-                </a:solidFill>
-                <a:latin typeface="Calibri"/>
-                <a:ea typeface="Arial"/>
-              </a:rPr>
-              <a:t>INTRODUÇÃO</a:t>
-            </a:r>
-            <a:endParaRPr b="0" lang="pt-BR" sz="6000" spc="-1" strike="noStrike">
-              <a:solidFill>
-                <a:srgbClr val="000000"/>
-              </a:solidFill>
-              <a:latin typeface="Arial"/>
-            </a:endParaRPr>
-          </a:p>
-        </p:txBody>
-      </p:sp>
-      <p:sp>
-        <p:nvSpPr>
-          <p:cNvPr id="58" name="TextBox 97"/>
-          <p:cNvSpPr/>
-          <p:nvPr/>
-        </p:nvSpPr>
-        <p:spPr>
-          <a:xfrm>
-            <a:off x="16344000" y="12960000"/>
-            <a:ext cx="14399280" cy="914040"/>
-          </a:xfrm>
-          <a:prstGeom prst="rect">
-            <a:avLst/>
-          </a:prstGeom>
-          <a:noFill/>
-          <a:ln w="0">
-            <a:noFill/>
-          </a:ln>
-        </p:spPr>
-        <p:style>
-          <a:lnRef idx="0"/>
-          <a:fillRef idx="0"/>
-          <a:effectRef idx="0"/>
-          <a:fontRef idx="minor"/>
-        </p:style>
-        <p:txBody>
-          <a:bodyPr lIns="90000" rIns="90000" tIns="0" bIns="0" anchor="t">
-            <a:spAutoFit/>
-          </a:bodyPr>
-          <a:p>
-            <a:pPr>
-              <a:lnSpc>
-                <a:spcPct val="100000"/>
-              </a:lnSpc>
-            </a:pPr>
-            <a:r>
-              <a:rPr b="1" lang="pt-BR" sz="6000" spc="-1" strike="noStrike">
-                <a:solidFill>
-                  <a:srgbClr val="1f3b57"/>
-                </a:solidFill>
-                <a:latin typeface="Calibri"/>
-                <a:ea typeface="Arial"/>
-              </a:rPr>
-              <a:t>OBJETIVOS</a:t>
-            </a:r>
-            <a:endParaRPr b="0" lang="pt-BR" sz="6000" spc="-1" strike="noStrike">
-              <a:solidFill>
-                <a:srgbClr val="000000"/>
-              </a:solidFill>
-              <a:latin typeface="Arial"/>
-            </a:endParaRPr>
-          </a:p>
-        </p:txBody>
-      </p:sp>
-      <p:sp>
-        <p:nvSpPr>
-          <p:cNvPr id="59" name="Rounded Rectangle 98"/>
-          <p:cNvSpPr/>
-          <p:nvPr/>
-        </p:nvSpPr>
-        <p:spPr>
-          <a:xfrm>
-            <a:off x="936000" y="13878000"/>
-            <a:ext cx="5939280" cy="1151280"/>
-          </a:xfrm>
-          <a:prstGeom prst="roundRect">
-            <a:avLst>
-              <a:gd name="adj" fmla="val 22000"/>
-            </a:avLst>
-          </a:prstGeom>
-          <a:solidFill>
-            <a:srgbClr val="ecebe7"/>
-          </a:solidFill>
-          <a:ln w="20320">
-            <a:solidFill>
-              <a:srgbClr val="606060"/>
-            </a:solidFill>
-            <a:round/>
-          </a:ln>
-          <a:effectLst>
-            <a:outerShdw blurRad="39960" dir="5400000" dist="23040" rotWithShape="0">
-              <a:srgbClr val="000000">
-                <a:alpha val="35000"/>
-              </a:srgbClr>
-            </a:outerShdw>
-          </a:effectLst>
-        </p:spPr>
-        <p:style>
-          <a:lnRef idx="1">
-            <a:schemeClr val="accent1"/>
-          </a:lnRef>
-          <a:fillRef idx="3">
-            <a:schemeClr val="accent1"/>
-          </a:fillRef>
-          <a:effectRef idx="2">
-            <a:schemeClr val="accent1"/>
-          </a:effectRef>
-          <a:fontRef idx="minor"/>
-        </p:style>
-        <p:txBody>
-          <a:bodyPr lIns="126000" rIns="126000" tIns="36000" bIns="36000" anchor="ctr">
-            <a:noAutofit/>
-          </a:bodyPr>
-          <a:p>
-            <a:pPr>
-              <a:lnSpc>
-                <a:spcPct val="100000"/>
-              </a:lnSpc>
-            </a:pPr>
-            <a:r>
-              <a:rPr b="1" lang="pt-BR" sz="1900" spc="-1" strike="noStrike">
-                <a:solidFill>
-                  <a:srgbClr val="606060"/>
-                </a:solidFill>
-                <a:latin typeface="Calibri"/>
-                <a:ea typeface="Arial"/>
-              </a:rPr>
-              <a:t>Diagnóstico diferencial exige</a:t>
-            </a:r>
-            <a:endParaRPr b="0" lang="pt-BR" sz="1900" spc="-1" strike="noStrike">
-              <a:solidFill>
-                <a:srgbClr val="000000"/>
-              </a:solidFill>
-              <a:latin typeface="Arial"/>
-            </a:endParaRPr>
-          </a:p>
-          <a:p>
-            <a:pPr algn="ctr">
-              <a:lnSpc>
-                <a:spcPct val="100000"/>
-              </a:lnSpc>
-            </a:pPr>
-            <a:r>
-              <a:rPr b="1" lang="pt-BR" sz="1900" spc="-1" strike="noStrike">
-                <a:solidFill>
-                  <a:srgbClr val="606060"/>
-                </a:solidFill>
-                <a:latin typeface="Calibri"/>
-                <a:ea typeface="Arial"/>
-              </a:rPr>
-              <a:t>exames invasivos</a:t>
-            </a:r>
-            <a:endParaRPr b="0" lang="pt-BR" sz="1900" spc="-1" strike="noStrike">
-              <a:solidFill>
-                <a:srgbClr val="000000"/>
-              </a:solidFill>
-              <a:latin typeface="Arial"/>
-            </a:endParaRPr>
-          </a:p>
-        </p:txBody>
-      </p:sp>
-      <p:sp>
-        <p:nvSpPr>
-          <p:cNvPr id="60" name="TextBox 99"/>
-          <p:cNvSpPr/>
-          <p:nvPr/>
-        </p:nvSpPr>
-        <p:spPr>
-          <a:xfrm>
-            <a:off x="7093800" y="13950000"/>
-            <a:ext cx="499320" cy="546840"/>
-          </a:xfrm>
-          <a:prstGeom prst="rect">
-            <a:avLst/>
-          </a:prstGeom>
-          <a:noFill/>
-          <a:ln w="0">
-            <a:noFill/>
-          </a:ln>
-        </p:spPr>
-        <p:style>
-          <a:lnRef idx="0"/>
-          <a:fillRef idx="0"/>
-          <a:effectRef idx="0"/>
-          <a:fontRef idx="minor"/>
-        </p:style>
-        <p:txBody>
-          <a:bodyPr wrap="none" lIns="90000" rIns="90000" tIns="45000" bIns="45000" anchor="t">
-            <a:spAutoFit/>
-          </a:bodyPr>
-          <a:p>
-            <a:pPr algn="ctr">
-              <a:lnSpc>
-                <a:spcPct val="100000"/>
-              </a:lnSpc>
-            </a:pPr>
-            <a:r>
-              <a:rPr b="1" lang="pt-BR" sz="3000" spc="-1" strike="noStrike">
-                <a:solidFill>
-                  <a:srgbClr val="606060"/>
-                </a:solidFill>
-                <a:latin typeface="Calibri"/>
-                <a:ea typeface="Arial"/>
-              </a:rPr>
-              <a:t>→</a:t>
-            </a:r>
-            <a:endParaRPr b="0" lang="pt-BR" sz="3000" spc="-1" strike="noStrike">
-              <a:solidFill>
-                <a:srgbClr val="000000"/>
-              </a:solidFill>
-              <a:latin typeface="Arial"/>
-            </a:endParaRPr>
-          </a:p>
-        </p:txBody>
-      </p:sp>
-      <p:sp>
-        <p:nvSpPr>
-          <p:cNvPr id="61" name="Rounded Rectangle 100"/>
-          <p:cNvSpPr/>
-          <p:nvPr/>
-        </p:nvSpPr>
-        <p:spPr>
-          <a:xfrm>
-            <a:off x="7812000" y="13878000"/>
-            <a:ext cx="6839280" cy="1151280"/>
-          </a:xfrm>
-          <a:prstGeom prst="roundRect">
-            <a:avLst>
-              <a:gd name="adj" fmla="val 22000"/>
-            </a:avLst>
-          </a:prstGeom>
-          <a:solidFill>
-            <a:srgbClr val="dceafa"/>
-          </a:solidFill>
-          <a:ln w="20320">
-            <a:solidFill>
-              <a:srgbClr val="2a78d6"/>
-            </a:solidFill>
-            <a:round/>
-          </a:ln>
-          <a:effectLst>
-            <a:outerShdw blurRad="39960" dir="5400000" dist="23040" rotWithShape="0">
-              <a:srgbClr val="000000">
-                <a:alpha val="35000"/>
-              </a:srgbClr>
-            </a:outerShdw>
-          </a:effectLst>
-        </p:spPr>
-        <p:style>
-          <a:lnRef idx="1">
-            <a:schemeClr val="accent1"/>
-          </a:lnRef>
-          <a:fillRef idx="3">
-            <a:schemeClr val="accent1"/>
-          </a:fillRef>
-          <a:effectRef idx="2">
-            <a:schemeClr val="accent1"/>
-          </a:effectRef>
-          <a:fontRef idx="minor"/>
-        </p:style>
-        <p:txBody>
-          <a:bodyPr lIns="126000" rIns="126000" tIns="36000" bIns="36000" anchor="ctr">
-            <a:noAutofit/>
-          </a:bodyPr>
-          <a:p>
-            <a:pPr>
-              <a:lnSpc>
-                <a:spcPct val="100000"/>
-              </a:lnSpc>
-            </a:pPr>
-            <a:r>
-              <a:rPr b="1" lang="pt-BR" sz="1900" spc="-1" strike="noStrike">
-                <a:solidFill>
-                  <a:srgbClr val="2a78d6"/>
-                </a:solidFill>
-                <a:latin typeface="Calibri"/>
-                <a:ea typeface="Arial"/>
-              </a:rPr>
-              <a:t>Análise acústica computacional</a:t>
-            </a:r>
-            <a:endParaRPr b="0" lang="pt-BR" sz="1900" spc="-1" strike="noStrike">
-              <a:solidFill>
-                <a:srgbClr val="000000"/>
-              </a:solidFill>
-              <a:latin typeface="Arial"/>
-            </a:endParaRPr>
-          </a:p>
-          <a:p>
-            <a:pPr algn="ctr">
-              <a:lnSpc>
-                <a:spcPct val="100000"/>
-              </a:lnSpc>
-            </a:pPr>
-            <a:r>
-              <a:rPr b="1" lang="pt-BR" sz="1900" spc="-1" strike="noStrike">
-                <a:solidFill>
-                  <a:srgbClr val="2a78d6"/>
-                </a:solidFill>
-                <a:latin typeface="Calibri"/>
-                <a:ea typeface="Arial"/>
-              </a:rPr>
-              <a:t>não invasiva, a partir da voz</a:t>
-            </a:r>
-            <a:endParaRPr b="0" lang="pt-BR" sz="1900" spc="-1" strike="noStrike">
-              <a:solidFill>
-                <a:srgbClr val="000000"/>
-              </a:solidFill>
-              <a:latin typeface="Arial"/>
-            </a:endParaRPr>
-          </a:p>
-        </p:txBody>
-      </p:sp>
-      <p:sp>
-        <p:nvSpPr>
-          <p:cNvPr id="62" name="Rounded Rectangle 101"/>
-          <p:cNvSpPr/>
-          <p:nvPr/>
-        </p:nvSpPr>
-        <p:spPr>
-          <a:xfrm>
-            <a:off x="16344000" y="13878000"/>
-            <a:ext cx="5543280" cy="1151280"/>
-          </a:xfrm>
-          <a:prstGeom prst="roundRect">
-            <a:avLst>
-              <a:gd name="adj" fmla="val 22000"/>
-            </a:avLst>
-          </a:prstGeom>
-          <a:solidFill>
-            <a:srgbClr val="fbe2d6"/>
-          </a:solidFill>
-          <a:ln w="20320">
-            <a:solidFill>
-              <a:srgbClr val="eb6834"/>
-            </a:solidFill>
-            <a:round/>
-          </a:ln>
-          <a:effectLst>
-            <a:outerShdw blurRad="39960" dir="5400000" dist="23040" rotWithShape="0">
-              <a:srgbClr val="000000">
-                <a:alpha val="35000"/>
-              </a:srgbClr>
-            </a:outerShdw>
-          </a:effectLst>
-        </p:spPr>
-        <p:style>
-          <a:lnRef idx="1">
-            <a:schemeClr val="accent1"/>
-          </a:lnRef>
-          <a:fillRef idx="3">
-            <a:schemeClr val="accent1"/>
-          </a:fillRef>
-          <a:effectRef idx="2">
-            <a:schemeClr val="accent1"/>
-          </a:effectRef>
-          <a:fontRef idx="minor"/>
-        </p:style>
-        <p:txBody>
-          <a:bodyPr lIns="126000" rIns="126000" tIns="36000" bIns="36000" anchor="ctr">
-            <a:noAutofit/>
-          </a:bodyPr>
-          <a:p>
-            <a:pPr>
-              <a:lnSpc>
-                <a:spcPct val="100000"/>
-              </a:lnSpc>
-            </a:pPr>
-            <a:r>
-              <a:rPr b="1" lang="pt-BR" sz="1800" spc="-1" strike="noStrike">
-                <a:solidFill>
-                  <a:srgbClr val="eb6834"/>
-                </a:solidFill>
-                <a:latin typeface="Calibri"/>
-                <a:ea typeface="Arial"/>
-              </a:rPr>
-              <a:t>5 condições vocais</a:t>
-            </a:r>
-            <a:endParaRPr b="0" lang="pt-BR" sz="1800" spc="-1" strike="noStrike">
-              <a:solidFill>
-                <a:srgbClr val="000000"/>
-              </a:solidFill>
-              <a:latin typeface="Arial"/>
-            </a:endParaRPr>
-          </a:p>
-          <a:p>
-            <a:pPr algn="ctr">
-              <a:lnSpc>
-                <a:spcPct val="100000"/>
-              </a:lnSpc>
-            </a:pPr>
-            <a:r>
-              <a:rPr b="1" lang="pt-BR" sz="1800" spc="-1" strike="noStrike">
-                <a:solidFill>
-                  <a:srgbClr val="eb6834"/>
-                </a:solidFill>
-                <a:latin typeface="Calibri"/>
-                <a:ea typeface="Arial"/>
-              </a:rPr>
-              <a:t>a partir da voz</a:t>
-            </a:r>
-            <a:endParaRPr b="0" lang="pt-BR" sz="1800" spc="-1" strike="noStrike">
-              <a:solidFill>
-                <a:srgbClr val="000000"/>
-              </a:solidFill>
-              <a:latin typeface="Arial"/>
-            </a:endParaRPr>
-          </a:p>
-        </p:txBody>
-      </p:sp>
-      <p:sp>
-        <p:nvSpPr>
-          <p:cNvPr id="63" name="Rounded Rectangle 102"/>
-          <p:cNvSpPr/>
-          <p:nvPr/>
-        </p:nvSpPr>
-        <p:spPr>
-          <a:xfrm>
-            <a:off x="22140000" y="13878000"/>
-            <a:ext cx="5543280" cy="1151280"/>
-          </a:xfrm>
-          <a:prstGeom prst="roundRect">
-            <a:avLst>
-              <a:gd name="adj" fmla="val 22000"/>
-            </a:avLst>
-          </a:prstGeom>
-          <a:solidFill>
-            <a:srgbClr val="fbe2d6"/>
-          </a:solidFill>
-          <a:ln w="20320">
-            <a:solidFill>
-              <a:srgbClr val="eb6834"/>
-            </a:solidFill>
-            <a:round/>
-          </a:ln>
-          <a:effectLst>
-            <a:outerShdw blurRad="39960" dir="5400000" dist="23040" rotWithShape="0">
-              <a:srgbClr val="000000">
-                <a:alpha val="35000"/>
-              </a:srgbClr>
-            </a:outerShdw>
-          </a:effectLst>
-        </p:spPr>
-        <p:style>
-          <a:lnRef idx="1">
-            <a:schemeClr val="accent1"/>
-          </a:lnRef>
-          <a:fillRef idx="3">
-            <a:schemeClr val="accent1"/>
-          </a:fillRef>
-          <a:effectRef idx="2">
-            <a:schemeClr val="accent1"/>
-          </a:effectRef>
-          <a:fontRef idx="minor"/>
-        </p:style>
-        <p:txBody>
-          <a:bodyPr lIns="126000" rIns="126000" tIns="36000" bIns="36000" anchor="ctr">
-            <a:noAutofit/>
-          </a:bodyPr>
-          <a:p>
-            <a:pPr>
-              <a:lnSpc>
-                <a:spcPct val="100000"/>
-              </a:lnSpc>
-            </a:pPr>
-            <a:r>
-              <a:rPr b="1" lang="pt-BR" sz="1800" spc="-1" strike="noStrike">
-                <a:solidFill>
-                  <a:srgbClr val="eb6834"/>
-                </a:solidFill>
-                <a:latin typeface="Calibri"/>
-                <a:ea typeface="Arial"/>
-              </a:rPr>
-              <a:t>Arquitetura hierárquica</a:t>
-            </a:r>
-            <a:endParaRPr b="0" lang="pt-BR" sz="1800" spc="-1" strike="noStrike">
-              <a:solidFill>
-                <a:srgbClr val="000000"/>
-              </a:solidFill>
-              <a:latin typeface="Arial"/>
-            </a:endParaRPr>
-          </a:p>
-          <a:p>
-            <a:pPr algn="ctr">
-              <a:lnSpc>
-                <a:spcPct val="100000"/>
-              </a:lnSpc>
-            </a:pPr>
-            <a:r>
-              <a:rPr b="1" lang="pt-BR" sz="1800" spc="-1" strike="noStrike">
-                <a:solidFill>
-                  <a:srgbClr val="eb6834"/>
-                </a:solidFill>
-                <a:latin typeface="Calibri"/>
-                <a:ea typeface="Arial"/>
-              </a:rPr>
-              <a:t>multi-vogal</a:t>
-            </a:r>
-            <a:endParaRPr b="0" lang="pt-BR" sz="1800" spc="-1" strike="noStrike">
-              <a:solidFill>
-                <a:srgbClr val="000000"/>
-              </a:solidFill>
-              <a:latin typeface="Arial"/>
-            </a:endParaRPr>
-          </a:p>
-        </p:txBody>
-      </p:sp>
-      <p:sp>
-        <p:nvSpPr>
-          <p:cNvPr id="64" name="Rounded Rectangle 103"/>
-          <p:cNvSpPr/>
-          <p:nvPr/>
-        </p:nvSpPr>
-        <p:spPr>
-          <a:xfrm>
-            <a:off x="27936000" y="13878000"/>
-            <a:ext cx="5543280" cy="1151280"/>
-          </a:xfrm>
-          <a:prstGeom prst="roundRect">
-            <a:avLst>
-              <a:gd name="adj" fmla="val 22000"/>
-            </a:avLst>
-          </a:prstGeom>
-          <a:solidFill>
-            <a:srgbClr val="fbe2d6"/>
-          </a:solidFill>
-          <a:ln w="20320">
-            <a:solidFill>
-              <a:srgbClr val="eb6834"/>
-            </a:solidFill>
-            <a:round/>
-          </a:ln>
-          <a:effectLst>
-            <a:outerShdw blurRad="39960" dir="5400000" dist="23040" rotWithShape="0">
-              <a:srgbClr val="000000">
-                <a:alpha val="35000"/>
-              </a:srgbClr>
-            </a:outerShdw>
-          </a:effectLst>
-        </p:spPr>
-        <p:style>
-          <a:lnRef idx="1">
-            <a:schemeClr val="accent1"/>
-          </a:lnRef>
-          <a:fillRef idx="3">
-            <a:schemeClr val="accent1"/>
-          </a:fillRef>
-          <a:effectRef idx="2">
-            <a:schemeClr val="accent1"/>
-          </a:effectRef>
-          <a:fontRef idx="minor"/>
-        </p:style>
-        <p:txBody>
-          <a:bodyPr lIns="126000" rIns="126000" tIns="36000" bIns="36000" anchor="ctr">
-            <a:noAutofit/>
-          </a:bodyPr>
-          <a:p>
-            <a:pPr>
-              <a:lnSpc>
-                <a:spcPct val="100000"/>
-              </a:lnSpc>
-            </a:pPr>
-            <a:r>
-              <a:rPr b="1" lang="pt-BR" sz="1800" spc="-1" strike="noStrike">
-                <a:solidFill>
-                  <a:srgbClr val="eb6834"/>
-                </a:solidFill>
-                <a:latin typeface="Calibri"/>
-                <a:ea typeface="Arial"/>
-              </a:rPr>
-              <a:t>Validação rigorosa</a:t>
-            </a:r>
-            <a:endParaRPr b="0" lang="pt-BR" sz="1800" spc="-1" strike="noStrike">
-              <a:solidFill>
-                <a:srgbClr val="000000"/>
-              </a:solidFill>
-              <a:latin typeface="Arial"/>
-            </a:endParaRPr>
-          </a:p>
-          <a:p>
-            <a:pPr algn="ctr">
-              <a:lnSpc>
-                <a:spcPct val="100000"/>
-              </a:lnSpc>
-            </a:pPr>
-            <a:r>
-              <a:rPr b="1" lang="pt-BR" sz="1800" spc="-1" strike="noStrike">
-                <a:solidFill>
-                  <a:srgbClr val="eb6834"/>
-                </a:solidFill>
-                <a:latin typeface="Calibri"/>
-                <a:ea typeface="Arial"/>
-              </a:rPr>
-              <a:t>vs. baselines</a:t>
-            </a:r>
-            <a:endParaRPr b="0" lang="pt-BR" sz="1800" spc="-1" strike="noStrike">
-              <a:solidFill>
-                <a:srgbClr val="000000"/>
-              </a:solidFill>
-              <a:latin typeface="Arial"/>
-            </a:endParaRPr>
-          </a:p>
-        </p:txBody>
-      </p:sp>
-      <p:sp>
-        <p:nvSpPr>
-          <p:cNvPr id="65" name="TextBox 104"/>
-          <p:cNvSpPr/>
-          <p:nvPr/>
-        </p:nvSpPr>
-        <p:spPr>
-          <a:xfrm>
-            <a:off x="936000" y="15120000"/>
-            <a:ext cx="21599280" cy="914040"/>
-          </a:xfrm>
-          <a:prstGeom prst="rect">
-            <a:avLst/>
-          </a:prstGeom>
-          <a:noFill/>
-          <a:ln w="0">
-            <a:noFill/>
-          </a:ln>
-        </p:spPr>
-        <p:style>
-          <a:lnRef idx="0"/>
-          <a:fillRef idx="0"/>
-          <a:effectRef idx="0"/>
-          <a:fontRef idx="minor"/>
-        </p:style>
-        <p:txBody>
-          <a:bodyPr lIns="90000" rIns="90000" tIns="0" bIns="0" anchor="t">
-            <a:spAutoFit/>
-          </a:bodyPr>
-          <a:p>
-            <a:pPr>
-              <a:lnSpc>
-                <a:spcPct val="100000"/>
-              </a:lnSpc>
-            </a:pPr>
-            <a:r>
-              <a:rPr b="1" lang="pt-BR" sz="6000" spc="-1" strike="noStrike">
-                <a:solidFill>
-                  <a:srgbClr val="1f3b57"/>
-                </a:solidFill>
-                <a:latin typeface="Calibri"/>
-                <a:ea typeface="Arial"/>
-              </a:rPr>
-              <a:t>MATERIAL E MÉTODOS</a:t>
-            </a:r>
-            <a:endParaRPr b="0" lang="pt-BR" sz="6000" spc="-1" strike="noStrike">
-              <a:solidFill>
-                <a:srgbClr val="000000"/>
-              </a:solidFill>
-              <a:latin typeface="Arial"/>
-            </a:endParaRPr>
-          </a:p>
-        </p:txBody>
-      </p:sp>
-      <p:pic>
-        <p:nvPicPr>
-          <p:cNvPr id="66" name="Picture 105" descr="pipeline_diagram_v3.png"/>
-          <p:cNvPicPr/>
-          <p:nvPr/>
-        </p:nvPicPr>
-        <p:blipFill>
-          <a:blip r:embed="rId6"/>
-          <a:stretch/>
-        </p:blipFill>
-        <p:spPr>
-          <a:xfrm>
-            <a:off x="1362960" y="16038000"/>
-            <a:ext cx="31937040" cy="9702000"/>
-          </a:xfrm>
-          <a:prstGeom prst="rect">
-            <a:avLst/>
-          </a:prstGeom>
-          <a:ln w="0">
-            <a:noFill/>
-          </a:ln>
-        </p:spPr>
-      </p:pic>
-      <p:sp>
-        <p:nvSpPr>
-          <p:cNvPr id="67" name="TextBox 106"/>
-          <p:cNvSpPr/>
-          <p:nvPr/>
-        </p:nvSpPr>
-        <p:spPr>
-          <a:xfrm>
-            <a:off x="936000" y="24127560"/>
-            <a:ext cx="14399280" cy="914040"/>
-          </a:xfrm>
-          <a:prstGeom prst="rect">
-            <a:avLst/>
-          </a:prstGeom>
-          <a:noFill/>
-          <a:ln w="0">
-            <a:noFill/>
-          </a:ln>
-        </p:spPr>
-        <p:style>
-          <a:lnRef idx="0"/>
-          <a:fillRef idx="0"/>
-          <a:effectRef idx="0"/>
-          <a:fontRef idx="minor"/>
-        </p:style>
-        <p:txBody>
-          <a:bodyPr lIns="90000" rIns="90000" tIns="0" bIns="0" anchor="t">
-            <a:spAutoFit/>
-          </a:bodyPr>
-          <a:p>
-            <a:pPr>
-              <a:lnSpc>
-                <a:spcPct val="100000"/>
-              </a:lnSpc>
-            </a:pPr>
-            <a:r>
-              <a:rPr b="1" lang="pt-BR" sz="6000" spc="-1" strike="noStrike">
-                <a:solidFill>
-                  <a:srgbClr val="1f3b57"/>
-                </a:solidFill>
-                <a:latin typeface="Calibri"/>
-                <a:ea typeface="Arial"/>
-              </a:rPr>
-              <a:t>RESULTADOS</a:t>
-            </a:r>
-            <a:endParaRPr b="0" lang="pt-BR" sz="6000" spc="-1" strike="noStrike">
-              <a:solidFill>
-                <a:srgbClr val="000000"/>
-              </a:solidFill>
-              <a:latin typeface="Arial"/>
-            </a:endParaRPr>
-          </a:p>
-        </p:txBody>
-      </p:sp>
-      <p:sp>
-        <p:nvSpPr>
-          <p:cNvPr id="68" name="Rounded Rectangle 107"/>
-          <p:cNvSpPr/>
-          <p:nvPr/>
-        </p:nvSpPr>
-        <p:spPr>
-          <a:xfrm>
-            <a:off x="936000" y="25045560"/>
-            <a:ext cx="7163280" cy="1403280"/>
-          </a:xfrm>
-          <a:prstGeom prst="roundRect">
-            <a:avLst>
-              <a:gd name="adj" fmla="val 12000"/>
-            </a:avLst>
-          </a:prstGeom>
-          <a:solidFill>
-            <a:srgbClr val="fceccc"/>
-          </a:solidFill>
-          <a:ln w="22860">
-            <a:solidFill>
-              <a:srgbClr val="eda100"/>
-            </a:solidFill>
-            <a:round/>
-          </a:ln>
-          <a:effectLst>
-            <a:outerShdw blurRad="39960" dir="5400000" dist="23040" rotWithShape="0">
-              <a:srgbClr val="000000">
-                <a:alpha val="35000"/>
-              </a:srgbClr>
-            </a:outerShdw>
-          </a:effectLst>
-        </p:spPr>
-        <p:style>
-          <a:lnRef idx="1">
-            <a:schemeClr val="accent1"/>
-          </a:lnRef>
-          <a:fillRef idx="3">
-            <a:schemeClr val="accent1"/>
-          </a:fillRef>
-          <a:effectRef idx="2">
-            <a:schemeClr val="accent1"/>
-          </a:effectRef>
-          <a:fontRef idx="minor"/>
-        </p:style>
-        <p:txBody>
-          <a:bodyPr lIns="90000" rIns="90000" tIns="0" bIns="0" anchor="ctr">
-            <a:noAutofit/>
-          </a:bodyPr>
-          <a:p>
-            <a:pPr algn="ctr">
-              <a:lnSpc>
-                <a:spcPct val="100000"/>
-              </a:lnSpc>
-            </a:pPr>
-            <a:r>
-              <a:rPr b="1" lang="pt-BR" sz="3600" spc="-1" strike="noStrike">
-                <a:solidFill>
-                  <a:srgbClr val="eda100"/>
-                </a:solidFill>
-                <a:latin typeface="Calibri"/>
-                <a:ea typeface="Arial"/>
-              </a:rPr>
-              <a:t>69,4%</a:t>
-            </a:r>
-            <a:endParaRPr b="0" lang="pt-BR" sz="3600" spc="-1" strike="noStrike">
-              <a:solidFill>
-                <a:srgbClr val="000000"/>
-              </a:solidFill>
-              <a:latin typeface="Arial"/>
-            </a:endParaRPr>
-          </a:p>
-          <a:p>
-            <a:pPr algn="ctr">
-              <a:lnSpc>
-                <a:spcPct val="100000"/>
-              </a:lnSpc>
-            </a:pPr>
-            <a:r>
-              <a:rPr b="0" lang="pt-BR" sz="1500" spc="-1" strike="noStrike">
-                <a:solidFill>
-                  <a:srgbClr val="222222"/>
-                </a:solidFill>
-                <a:latin typeface="Calibri"/>
-                <a:ea typeface="Arial"/>
-              </a:rPr>
-              <a:t>Acurácia global (5-fold CV)</a:t>
-            </a:r>
-            <a:endParaRPr b="0" lang="pt-BR" sz="1500" spc="-1" strike="noStrike">
-              <a:solidFill>
-                <a:srgbClr val="000000"/>
-              </a:solidFill>
-              <a:latin typeface="Arial"/>
-            </a:endParaRPr>
-          </a:p>
-        </p:txBody>
-      </p:sp>
-      <p:sp>
-        <p:nvSpPr>
-          <p:cNvPr id="69" name="Rounded Rectangle 108"/>
-          <p:cNvSpPr/>
-          <p:nvPr/>
-        </p:nvSpPr>
-        <p:spPr>
-          <a:xfrm>
-            <a:off x="8460000" y="25045560"/>
-            <a:ext cx="7163280" cy="1403280"/>
-          </a:xfrm>
-          <a:prstGeom prst="roundRect">
-            <a:avLst>
-              <a:gd name="adj" fmla="val 12000"/>
-            </a:avLst>
-          </a:prstGeom>
-          <a:solidFill>
-            <a:srgbClr val="fae1ec"/>
-          </a:solidFill>
-          <a:ln w="22860">
-            <a:solidFill>
-              <a:srgbClr val="e87ba4"/>
-            </a:solidFill>
-            <a:round/>
-          </a:ln>
-          <a:effectLst>
-            <a:outerShdw blurRad="39960" dir="5400000" dist="23040" rotWithShape="0">
-              <a:srgbClr val="000000">
-                <a:alpha val="35000"/>
-              </a:srgbClr>
-            </a:outerShdw>
-          </a:effectLst>
-        </p:spPr>
-        <p:style>
-          <a:lnRef idx="1">
-            <a:schemeClr val="accent1"/>
-          </a:lnRef>
-          <a:fillRef idx="3">
-            <a:schemeClr val="accent1"/>
-          </a:fillRef>
-          <a:effectRef idx="2">
-            <a:schemeClr val="accent1"/>
-          </a:effectRef>
-          <a:fontRef idx="minor"/>
-        </p:style>
-        <p:txBody>
-          <a:bodyPr lIns="90000" rIns="90000" tIns="0" bIns="0" anchor="ctr">
-            <a:noAutofit/>
-          </a:bodyPr>
-          <a:p>
-            <a:pPr algn="ctr">
-              <a:lnSpc>
-                <a:spcPct val="100000"/>
-              </a:lnSpc>
-            </a:pPr>
-            <a:r>
-              <a:rPr b="1" lang="pt-BR" sz="3600" spc="-1" strike="noStrike">
-                <a:solidFill>
-                  <a:srgbClr val="e87ba4"/>
-                </a:solidFill>
-                <a:latin typeface="Calibri"/>
-                <a:ea typeface="Arial"/>
-              </a:rPr>
-              <a:t>0,4435</a:t>
-            </a:r>
-            <a:endParaRPr b="0" lang="pt-BR" sz="3600" spc="-1" strike="noStrike">
-              <a:solidFill>
-                <a:srgbClr val="000000"/>
-              </a:solidFill>
-              <a:latin typeface="Arial"/>
-            </a:endParaRPr>
-          </a:p>
-          <a:p>
-            <a:pPr algn="ctr">
-              <a:lnSpc>
-                <a:spcPct val="100000"/>
-              </a:lnSpc>
-            </a:pPr>
-            <a:r>
-              <a:rPr b="0" lang="pt-BR" sz="1500" spc="-1" strike="noStrike">
-                <a:solidFill>
-                  <a:srgbClr val="222222"/>
-                </a:solidFill>
-                <a:latin typeface="Calibri"/>
-                <a:ea typeface="Arial"/>
-              </a:rPr>
-              <a:t>Macro F1-Score</a:t>
-            </a:r>
-            <a:endParaRPr b="0" lang="pt-BR" sz="1500" spc="-1" strike="noStrike">
-              <a:solidFill>
-                <a:srgbClr val="000000"/>
-              </a:solidFill>
-              <a:latin typeface="Arial"/>
-            </a:endParaRPr>
-          </a:p>
-        </p:txBody>
-      </p:sp>
-      <p:sp>
-        <p:nvSpPr>
-          <p:cNvPr id="70" name="Rounded Rectangle 109"/>
-          <p:cNvSpPr/>
-          <p:nvPr/>
-        </p:nvSpPr>
-        <p:spPr>
-          <a:xfrm>
-            <a:off x="15984000" y="25045560"/>
-            <a:ext cx="7163280" cy="1403280"/>
-          </a:xfrm>
-          <a:prstGeom prst="roundRect">
-            <a:avLst>
-              <a:gd name="adj" fmla="val 12000"/>
-            </a:avLst>
-          </a:prstGeom>
-          <a:solidFill>
-            <a:srgbClr val="dceafa"/>
-          </a:solidFill>
-          <a:ln w="22860">
-            <a:solidFill>
-              <a:srgbClr val="2a78d6"/>
-            </a:solidFill>
-            <a:round/>
-          </a:ln>
-          <a:effectLst>
-            <a:outerShdw blurRad="39960" dir="5400000" dist="23040" rotWithShape="0">
-              <a:srgbClr val="000000">
-                <a:alpha val="35000"/>
-              </a:srgbClr>
-            </a:outerShdw>
-          </a:effectLst>
-        </p:spPr>
-        <p:style>
-          <a:lnRef idx="1">
-            <a:schemeClr val="accent1"/>
-          </a:lnRef>
-          <a:fillRef idx="3">
-            <a:schemeClr val="accent1"/>
-          </a:fillRef>
-          <a:effectRef idx="2">
-            <a:schemeClr val="accent1"/>
-          </a:effectRef>
-          <a:fontRef idx="minor"/>
-        </p:style>
-        <p:txBody>
-          <a:bodyPr lIns="90000" rIns="90000" tIns="0" bIns="0" anchor="ctr">
-            <a:noAutofit/>
-          </a:bodyPr>
-          <a:p>
-            <a:pPr algn="ctr">
-              <a:lnSpc>
-                <a:spcPct val="100000"/>
-              </a:lnSpc>
-            </a:pPr>
-            <a:r>
-              <a:rPr b="1" lang="pt-BR" sz="3600" spc="-1" strike="noStrike">
-                <a:solidFill>
-                  <a:srgbClr val="2a78d6"/>
-                </a:solidFill>
-                <a:latin typeface="Calibri"/>
-                <a:ea typeface="Arial"/>
-              </a:rPr>
-              <a:t>+5,2 p.p.</a:t>
-            </a:r>
-            <a:endParaRPr b="0" lang="pt-BR" sz="3600" spc="-1" strike="noStrike">
-              <a:solidFill>
-                <a:srgbClr val="000000"/>
-              </a:solidFill>
-              <a:latin typeface="Arial"/>
-            </a:endParaRPr>
-          </a:p>
-          <a:p>
-            <a:pPr algn="ctr">
-              <a:lnSpc>
-                <a:spcPct val="100000"/>
-              </a:lnSpc>
-            </a:pPr>
-            <a:r>
-              <a:rPr b="0" lang="pt-BR" sz="1500" spc="-1" strike="noStrike">
-                <a:solidFill>
-                  <a:srgbClr val="222222"/>
-                </a:solidFill>
-                <a:latin typeface="Calibri"/>
-                <a:ea typeface="Arial"/>
-              </a:rPr>
-              <a:t>vs. arquitetura de camada única</a:t>
-            </a:r>
-            <a:endParaRPr b="0" lang="pt-BR" sz="1500" spc="-1" strike="noStrike">
-              <a:solidFill>
-                <a:srgbClr val="000000"/>
-              </a:solidFill>
-              <a:latin typeface="Arial"/>
-            </a:endParaRPr>
-          </a:p>
-        </p:txBody>
-      </p:sp>
-      <p:sp>
-        <p:nvSpPr>
-          <p:cNvPr id="71" name="Rounded Rectangle 110"/>
-          <p:cNvSpPr/>
-          <p:nvPr/>
-        </p:nvSpPr>
-        <p:spPr>
-          <a:xfrm>
-            <a:off x="23508000" y="25045560"/>
-            <a:ext cx="7163280" cy="1403280"/>
-          </a:xfrm>
-          <a:prstGeom prst="roundRect">
-            <a:avLst>
-              <a:gd name="adj" fmla="val 12000"/>
-            </a:avLst>
-          </a:prstGeom>
-          <a:solidFill>
-            <a:srgbClr val="d5f1e7"/>
-          </a:solidFill>
-          <a:ln w="22860">
-            <a:solidFill>
-              <a:srgbClr val="1baf7a"/>
-            </a:solidFill>
-            <a:round/>
-          </a:ln>
-          <a:effectLst>
-            <a:outerShdw blurRad="39960" dir="5400000" dist="23040" rotWithShape="0">
-              <a:srgbClr val="000000">
-                <a:alpha val="35000"/>
-              </a:srgbClr>
-            </a:outerShdw>
-          </a:effectLst>
-        </p:spPr>
-        <p:style>
-          <a:lnRef idx="1">
-            <a:schemeClr val="accent1"/>
-          </a:lnRef>
-          <a:fillRef idx="3">
-            <a:schemeClr val="accent1"/>
-          </a:fillRef>
-          <a:effectRef idx="2">
-            <a:schemeClr val="accent1"/>
-          </a:effectRef>
-          <a:fontRef idx="minor"/>
-        </p:style>
-        <p:txBody>
-          <a:bodyPr lIns="90000" rIns="90000" tIns="0" bIns="0" anchor="ctr">
-            <a:noAutofit/>
-          </a:bodyPr>
-          <a:p>
-            <a:pPr algn="ctr">
-              <a:lnSpc>
-                <a:spcPct val="100000"/>
-              </a:lnSpc>
-            </a:pPr>
-            <a:r>
-              <a:rPr b="1" lang="pt-BR" sz="3600" spc="-1" strike="noStrike">
-                <a:solidFill>
-                  <a:srgbClr val="1baf7a"/>
-                </a:solidFill>
-                <a:latin typeface="Calibri"/>
-                <a:ea typeface="Arial"/>
-              </a:rPr>
-              <a:t>0,871</a:t>
-            </a:r>
-            <a:endParaRPr b="0" lang="pt-BR" sz="3600" spc="-1" strike="noStrike">
-              <a:solidFill>
-                <a:srgbClr val="000000"/>
-              </a:solidFill>
-              <a:latin typeface="Arial"/>
-            </a:endParaRPr>
-          </a:p>
-          <a:p>
-            <a:pPr algn="ctr">
-              <a:lnSpc>
-                <a:spcPct val="100000"/>
-              </a:lnSpc>
-            </a:pPr>
-            <a:r>
-              <a:rPr b="0" lang="pt-BR" sz="1500" spc="-1" strike="noStrike">
-                <a:solidFill>
-                  <a:srgbClr val="222222"/>
-                </a:solidFill>
-                <a:latin typeface="Calibri"/>
-                <a:ea typeface="Arial"/>
-              </a:rPr>
-              <a:t>F1-Score da classe Normal</a:t>
-            </a:r>
-            <a:endParaRPr b="0" lang="pt-BR" sz="1500" spc="-1" strike="noStrike">
-              <a:solidFill>
-                <a:srgbClr val="000000"/>
-              </a:solidFill>
-              <a:latin typeface="Arial"/>
-            </a:endParaRPr>
-          </a:p>
-        </p:txBody>
-      </p:sp>
-      <p:pic>
-        <p:nvPicPr>
-          <p:cNvPr id="72" name="Picture 111" descr="confusion_matrix_poster.png"/>
-          <p:cNvPicPr/>
-          <p:nvPr/>
-        </p:nvPicPr>
-        <p:blipFill>
-          <a:blip r:embed="rId7"/>
-          <a:stretch/>
-        </p:blipFill>
-        <p:spPr>
-          <a:xfrm>
-            <a:off x="936000" y="26539560"/>
-            <a:ext cx="7199280" cy="5860440"/>
-          </a:xfrm>
-          <a:prstGeom prst="rect">
-            <a:avLst/>
-          </a:prstGeom>
-          <a:ln w="0">
-            <a:noFill/>
-          </a:ln>
-        </p:spPr>
-      </p:pic>
-      <p:sp>
-        <p:nvSpPr>
-          <p:cNvPr id="73" name="TextBox 112"/>
-          <p:cNvSpPr/>
-          <p:nvPr/>
-        </p:nvSpPr>
-        <p:spPr>
-          <a:xfrm>
-            <a:off x="936000" y="32418360"/>
-            <a:ext cx="7199280" cy="683280"/>
-          </a:xfrm>
-          <a:prstGeom prst="rect">
-            <a:avLst/>
-          </a:prstGeom>
-          <a:noFill/>
-          <a:ln w="0">
-            <a:noFill/>
-          </a:ln>
-        </p:spPr>
-        <p:style>
-          <a:lnRef idx="0"/>
-          <a:fillRef idx="0"/>
-          <a:effectRef idx="0"/>
-          <a:fontRef idx="minor"/>
-        </p:style>
-        <p:txBody>
-          <a:bodyPr lIns="90000" rIns="90000" tIns="0" bIns="45000" anchor="t">
-            <a:noAutofit/>
-          </a:bodyPr>
-          <a:p>
-            <a:pPr algn="ctr">
-              <a:lnSpc>
-                <a:spcPct val="100000"/>
-              </a:lnSpc>
-            </a:pPr>
-            <a:r>
-              <a:rPr b="0" i="1" lang="pt-BR" sz="2000" spc="-1" strike="noStrike">
-                <a:solidFill>
-                  <a:srgbClr val="606060"/>
-                </a:solidFill>
-                <a:latin typeface="Calibri"/>
-                <a:ea typeface="Arial"/>
-              </a:rPr>
-              <a:t>Matriz de confusão — maior confusão entre</a:t>
-            </a:r>
-            <a:endParaRPr b="0" lang="pt-BR" sz="2000" spc="-1" strike="noStrike">
-              <a:solidFill>
-                <a:srgbClr val="000000"/>
-              </a:solidFill>
-              <a:latin typeface="Arial"/>
-            </a:endParaRPr>
-          </a:p>
-          <a:p>
-            <a:pPr algn="ctr">
-              <a:lnSpc>
-                <a:spcPct val="100000"/>
-              </a:lnSpc>
-            </a:pPr>
-            <a:r>
-              <a:rPr b="0" i="1" lang="pt-BR" sz="2000" spc="-1" strike="noStrike">
-                <a:solidFill>
-                  <a:srgbClr val="606060"/>
-                </a:solidFill>
-                <a:latin typeface="Calibri"/>
-                <a:ea typeface="Arial"/>
-              </a:rPr>
-              <a:t>disfonias psicogênica e funcional</a:t>
-            </a:r>
-            <a:endParaRPr b="0" lang="pt-BR" sz="2000" spc="-1" strike="noStrike">
-              <a:solidFill>
-                <a:srgbClr val="000000"/>
-              </a:solidFill>
-              <a:latin typeface="Arial"/>
-            </a:endParaRPr>
-          </a:p>
-        </p:txBody>
-      </p:sp>
-      <p:pic>
-        <p:nvPicPr>
-          <p:cNvPr id="74" name="Picture 113" descr="f1_bar_poster.png"/>
-          <p:cNvPicPr/>
-          <p:nvPr/>
-        </p:nvPicPr>
-        <p:blipFill>
-          <a:blip r:embed="rId8"/>
-          <a:stretch/>
-        </p:blipFill>
-        <p:spPr>
-          <a:xfrm>
-            <a:off x="10116000" y="26539560"/>
-            <a:ext cx="7199280" cy="4515480"/>
-          </a:xfrm>
-          <a:prstGeom prst="rect">
-            <a:avLst/>
-          </a:prstGeom>
-          <a:ln w="0">
-            <a:noFill/>
-          </a:ln>
-        </p:spPr>
-      </p:pic>
-      <p:sp>
-        <p:nvSpPr>
-          <p:cNvPr id="75" name="TextBox 114"/>
-          <p:cNvSpPr/>
-          <p:nvPr/>
-        </p:nvSpPr>
-        <p:spPr>
-          <a:xfrm>
-            <a:off x="10116000" y="31073760"/>
-            <a:ext cx="7199280" cy="683280"/>
-          </a:xfrm>
-          <a:prstGeom prst="rect">
-            <a:avLst/>
-          </a:prstGeom>
-          <a:noFill/>
-          <a:ln w="0">
-            <a:noFill/>
-          </a:ln>
-        </p:spPr>
-        <p:style>
-          <a:lnRef idx="0"/>
-          <a:fillRef idx="0"/>
-          <a:effectRef idx="0"/>
-          <a:fontRef idx="minor"/>
-        </p:style>
-        <p:txBody>
-          <a:bodyPr lIns="90000" rIns="90000" tIns="0" bIns="45000" anchor="t">
-            <a:noAutofit/>
-          </a:bodyPr>
-          <a:p>
-            <a:pPr algn="ctr">
-              <a:lnSpc>
-                <a:spcPct val="100000"/>
-              </a:lnSpc>
-            </a:pPr>
-            <a:r>
-              <a:rPr b="0" i="1" lang="pt-BR" sz="2000" spc="-1" strike="noStrike">
-                <a:solidFill>
-                  <a:srgbClr val="606060"/>
-                </a:solidFill>
-                <a:latin typeface="Calibri"/>
-                <a:ea typeface="Arial"/>
-              </a:rPr>
-              <a:t>F1-Score por classe — Normal e Reinke</a:t>
-            </a:r>
-            <a:endParaRPr b="0" lang="pt-BR" sz="2000" spc="-1" strike="noStrike">
-              <a:solidFill>
-                <a:srgbClr val="000000"/>
-              </a:solidFill>
-              <a:latin typeface="Arial"/>
-            </a:endParaRPr>
-          </a:p>
-          <a:p>
-            <a:pPr algn="ctr">
-              <a:lnSpc>
-                <a:spcPct val="100000"/>
-              </a:lnSpc>
-            </a:pPr>
-            <a:r>
-              <a:rPr b="0" i="1" lang="pt-BR" sz="2000" spc="-1" strike="noStrike">
-                <a:solidFill>
-                  <a:srgbClr val="606060"/>
-                </a:solidFill>
-                <a:latin typeface="Calibri"/>
-                <a:ea typeface="Arial"/>
-              </a:rPr>
-              <a:t>se destacam dos demais</a:t>
-            </a:r>
-            <a:endParaRPr b="0" lang="pt-BR" sz="2000" spc="-1" strike="noStrike">
-              <a:solidFill>
-                <a:srgbClr val="000000"/>
-              </a:solidFill>
-              <a:latin typeface="Arial"/>
-            </a:endParaRPr>
-          </a:p>
-        </p:txBody>
-      </p:sp>
-      <p:pic>
-        <p:nvPicPr>
-          <p:cNvPr id="76" name="Picture 115" descr="evolution_poster.png"/>
-          <p:cNvPicPr/>
-          <p:nvPr/>
-        </p:nvPicPr>
-        <p:blipFill>
-          <a:blip r:embed="rId9"/>
-          <a:stretch/>
-        </p:blipFill>
-        <p:spPr>
-          <a:xfrm>
-            <a:off x="19296000" y="26539560"/>
-            <a:ext cx="7199280" cy="4362840"/>
-          </a:xfrm>
-          <a:prstGeom prst="rect">
-            <a:avLst/>
-          </a:prstGeom>
-          <a:ln w="0">
-            <a:noFill/>
-          </a:ln>
-        </p:spPr>
-      </p:pic>
-      <p:sp>
-        <p:nvSpPr>
-          <p:cNvPr id="77" name="TextBox 116"/>
-          <p:cNvSpPr/>
-          <p:nvPr/>
-        </p:nvSpPr>
-        <p:spPr>
-          <a:xfrm>
-            <a:off x="19296000" y="30920760"/>
-            <a:ext cx="7199280" cy="683280"/>
-          </a:xfrm>
-          <a:prstGeom prst="rect">
-            <a:avLst/>
-          </a:prstGeom>
-          <a:noFill/>
-          <a:ln w="0">
-            <a:noFill/>
-          </a:ln>
-        </p:spPr>
-        <p:style>
-          <a:lnRef idx="0"/>
-          <a:fillRef idx="0"/>
-          <a:effectRef idx="0"/>
-          <a:fontRef idx="minor"/>
-        </p:style>
-        <p:txBody>
-          <a:bodyPr lIns="90000" rIns="90000" tIns="0" bIns="45000" anchor="t">
-            <a:noAutofit/>
-          </a:bodyPr>
-          <a:p>
-            <a:pPr algn="ctr">
-              <a:lnSpc>
-                <a:spcPct val="100000"/>
-              </a:lnSpc>
-            </a:pPr>
-            <a:r>
-              <a:rPr b="0" i="1" lang="pt-BR" sz="2000" spc="-1" strike="noStrike">
-                <a:solidFill>
-                  <a:srgbClr val="606060"/>
-                </a:solidFill>
-                <a:latin typeface="Calibri"/>
-                <a:ea typeface="Arial"/>
-              </a:rPr>
-              <a:t>Evolução da arquitetura — fusão hierárquica</a:t>
-            </a:r>
-            <a:endParaRPr b="0" lang="pt-BR" sz="2000" spc="-1" strike="noStrike">
-              <a:solidFill>
-                <a:srgbClr val="000000"/>
-              </a:solidFill>
-              <a:latin typeface="Arial"/>
-            </a:endParaRPr>
-          </a:p>
-          <a:p>
-            <a:pPr algn="ctr">
-              <a:lnSpc>
-                <a:spcPct val="100000"/>
-              </a:lnSpc>
-            </a:pPr>
-            <a:r>
-              <a:rPr b="0" i="1" lang="pt-BR" sz="2000" spc="-1" strike="noStrike">
-                <a:solidFill>
-                  <a:srgbClr val="606060"/>
-                </a:solidFill>
-                <a:latin typeface="Calibri"/>
-                <a:ea typeface="Arial"/>
-              </a:rPr>
-              <a:t>supera versões anteriores</a:t>
-            </a:r>
-            <a:endParaRPr b="0" lang="pt-BR" sz="2000" spc="-1" strike="noStrike">
-              <a:solidFill>
-                <a:srgbClr val="000000"/>
-              </a:solidFill>
-              <a:latin typeface="Arial"/>
-            </a:endParaRPr>
-          </a:p>
-        </p:txBody>
-      </p:sp>
-      <p:sp>
-        <p:nvSpPr>
-          <p:cNvPr id="78" name="TextBox 117"/>
-          <p:cNvSpPr/>
-          <p:nvPr/>
-        </p:nvSpPr>
-        <p:spPr>
-          <a:xfrm>
-            <a:off x="936000" y="33246360"/>
-            <a:ext cx="14399280" cy="914040"/>
-          </a:xfrm>
-          <a:prstGeom prst="rect">
-            <a:avLst/>
-          </a:prstGeom>
-          <a:noFill/>
-          <a:ln w="0">
-            <a:noFill/>
-          </a:ln>
-        </p:spPr>
-        <p:style>
-          <a:lnRef idx="0"/>
-          <a:fillRef idx="0"/>
-          <a:effectRef idx="0"/>
-          <a:fontRef idx="minor"/>
-        </p:style>
-        <p:txBody>
-          <a:bodyPr lIns="90000" rIns="90000" tIns="0" bIns="0" anchor="t">
-            <a:spAutoFit/>
-          </a:bodyPr>
-          <a:p>
-            <a:pPr>
-              <a:lnSpc>
-                <a:spcPct val="100000"/>
-              </a:lnSpc>
-            </a:pPr>
-            <a:r>
-              <a:rPr b="1" lang="pt-BR" sz="6000" spc="-1" strike="noStrike">
-                <a:solidFill>
-                  <a:srgbClr val="1f3b57"/>
-                </a:solidFill>
-                <a:latin typeface="Calibri"/>
-                <a:ea typeface="Arial"/>
-              </a:rPr>
-              <a:t>CONCLUSÃO</a:t>
-            </a:r>
-            <a:endParaRPr b="0" lang="pt-BR" sz="6000" spc="-1" strike="noStrike">
-              <a:solidFill>
-                <a:srgbClr val="000000"/>
-              </a:solidFill>
-              <a:latin typeface="Arial"/>
-            </a:endParaRPr>
-          </a:p>
-        </p:txBody>
-      </p:sp>
-      <p:sp>
-        <p:nvSpPr>
-          <p:cNvPr id="79" name="TextBox 118"/>
-          <p:cNvSpPr/>
-          <p:nvPr/>
-        </p:nvSpPr>
-        <p:spPr>
-          <a:xfrm>
-            <a:off x="18720000" y="33246360"/>
-            <a:ext cx="12599280" cy="914040"/>
-          </a:xfrm>
-          <a:prstGeom prst="rect">
-            <a:avLst/>
-          </a:prstGeom>
-          <a:noFill/>
-          <a:ln w="0">
-            <a:noFill/>
-          </a:ln>
-        </p:spPr>
-        <p:style>
-          <a:lnRef idx="0"/>
-          <a:fillRef idx="0"/>
-          <a:effectRef idx="0"/>
-          <a:fontRef idx="minor"/>
-        </p:style>
-        <p:txBody>
-          <a:bodyPr lIns="90000" rIns="90000" tIns="0" bIns="0" anchor="t">
-            <a:spAutoFit/>
-          </a:bodyPr>
-          <a:p>
-            <a:pPr>
-              <a:lnSpc>
-                <a:spcPct val="100000"/>
-              </a:lnSpc>
-            </a:pPr>
-            <a:r>
-              <a:rPr b="1" lang="pt-BR" sz="6000" spc="-1" strike="noStrike">
-                <a:solidFill>
-                  <a:srgbClr val="1f3b57"/>
-                </a:solidFill>
-                <a:latin typeface="Calibri"/>
-                <a:ea typeface="Arial"/>
-              </a:rPr>
-              <a:t>REFERÊNCIAS</a:t>
-            </a:r>
-            <a:endParaRPr b="0" lang="pt-BR" sz="6000" spc="-1" strike="noStrike">
-              <a:solidFill>
-                <a:srgbClr val="000000"/>
-              </a:solidFill>
-              <a:latin typeface="Arial"/>
-            </a:endParaRPr>
-          </a:p>
-        </p:txBody>
-      </p:sp>
-      <p:sp>
-        <p:nvSpPr>
-          <p:cNvPr id="80" name="Rounded Rectangle 119"/>
-          <p:cNvSpPr/>
-          <p:nvPr/>
-        </p:nvSpPr>
-        <p:spPr>
-          <a:xfrm>
-            <a:off x="936000" y="34164360"/>
-            <a:ext cx="5399280" cy="1295280"/>
-          </a:xfrm>
-          <a:prstGeom prst="roundRect">
-            <a:avLst>
-              <a:gd name="adj" fmla="val 22000"/>
-            </a:avLst>
-          </a:prstGeom>
-          <a:solidFill>
-            <a:srgbClr val="daf2da"/>
-          </a:solidFill>
-          <a:ln w="20320">
-            <a:solidFill>
-              <a:srgbClr val="0ca30c"/>
-            </a:solidFill>
-            <a:round/>
-          </a:ln>
-          <a:effectLst>
-            <a:outerShdw blurRad="39960" dir="5400000" dist="23040" rotWithShape="0">
-              <a:srgbClr val="000000">
-                <a:alpha val="35000"/>
-              </a:srgbClr>
-            </a:outerShdw>
-          </a:effectLst>
-        </p:spPr>
-        <p:style>
-          <a:lnRef idx="1">
-            <a:schemeClr val="accent1"/>
-          </a:lnRef>
-          <a:fillRef idx="3">
-            <a:schemeClr val="accent1"/>
-          </a:fillRef>
-          <a:effectRef idx="2">
-            <a:schemeClr val="accent1"/>
-          </a:effectRef>
-          <a:fontRef idx="minor"/>
-        </p:style>
-        <p:txBody>
-          <a:bodyPr lIns="126000" rIns="126000" tIns="36000" bIns="36000" anchor="ctr">
-            <a:noAutofit/>
-          </a:bodyPr>
-          <a:p>
-            <a:pPr>
-              <a:lnSpc>
-                <a:spcPct val="100000"/>
-              </a:lnSpc>
-            </a:pPr>
-            <a:r>
-              <a:rPr b="1" lang="pt-BR" sz="1800" spc="-1" strike="noStrike">
-                <a:solidFill>
-                  <a:srgbClr val="0ca30c"/>
-                </a:solidFill>
-                <a:latin typeface="Calibri"/>
-                <a:ea typeface="Arial"/>
-              </a:rPr>
-              <a:t>Normal e Reinke:</a:t>
-            </a:r>
-            <a:endParaRPr b="0" lang="pt-BR" sz="1800" spc="-1" strike="noStrike">
-              <a:solidFill>
-                <a:srgbClr val="000000"/>
-              </a:solidFill>
-              <a:latin typeface="Arial"/>
-            </a:endParaRPr>
-          </a:p>
-          <a:p>
-            <a:pPr algn="ctr">
-              <a:lnSpc>
-                <a:spcPct val="100000"/>
-              </a:lnSpc>
-            </a:pPr>
-            <a:r>
-              <a:rPr b="1" lang="pt-BR" sz="1800" spc="-1" strike="noStrike">
-                <a:solidFill>
-                  <a:srgbClr val="0ca30c"/>
-                </a:solidFill>
-                <a:latin typeface="Calibri"/>
-                <a:ea typeface="Arial"/>
-              </a:rPr>
-              <a:t>bem discriminados</a:t>
-            </a:r>
-            <a:endParaRPr b="0" lang="pt-BR" sz="1800" spc="-1" strike="noStrike">
-              <a:solidFill>
-                <a:srgbClr val="000000"/>
-              </a:solidFill>
-              <a:latin typeface="Arial"/>
-            </a:endParaRPr>
-          </a:p>
-        </p:txBody>
-      </p:sp>
-      <p:sp>
-        <p:nvSpPr>
-          <p:cNvPr id="81" name="Rounded Rectangle 120"/>
-          <p:cNvSpPr/>
-          <p:nvPr/>
-        </p:nvSpPr>
-        <p:spPr>
-          <a:xfrm>
-            <a:off x="6624000" y="34164360"/>
-            <a:ext cx="5399280" cy="1295280"/>
-          </a:xfrm>
-          <a:prstGeom prst="roundRect">
-            <a:avLst>
-              <a:gd name="adj" fmla="val 22000"/>
-            </a:avLst>
-          </a:prstGeom>
-          <a:solidFill>
-            <a:srgbClr val="fcefd2"/>
-          </a:solidFill>
-          <a:ln w="20320">
-            <a:solidFill>
-              <a:srgbClr val="c98b00"/>
-            </a:solidFill>
-            <a:round/>
-          </a:ln>
-          <a:effectLst>
-            <a:outerShdw blurRad="39960" dir="5400000" dist="23040" rotWithShape="0">
-              <a:srgbClr val="000000">
-                <a:alpha val="35000"/>
-              </a:srgbClr>
-            </a:outerShdw>
-          </a:effectLst>
-        </p:spPr>
-        <p:style>
-          <a:lnRef idx="1">
-            <a:schemeClr val="accent1"/>
-          </a:lnRef>
-          <a:fillRef idx="3">
-            <a:schemeClr val="accent1"/>
-          </a:fillRef>
-          <a:effectRef idx="2">
-            <a:schemeClr val="accent1"/>
-          </a:effectRef>
-          <a:fontRef idx="minor"/>
-        </p:style>
-        <p:txBody>
-          <a:bodyPr lIns="126000" rIns="126000" tIns="36000" bIns="36000" anchor="ctr">
-            <a:noAutofit/>
-          </a:bodyPr>
-          <a:p>
-            <a:pPr>
-              <a:lnSpc>
-                <a:spcPct val="100000"/>
-              </a:lnSpc>
-            </a:pPr>
-            <a:r>
-              <a:rPr b="1" lang="pt-BR" sz="1700" spc="-1" strike="noStrike">
-                <a:solidFill>
-                  <a:srgbClr val="c98b00"/>
-                </a:solidFill>
-                <a:latin typeface="Calibri"/>
-                <a:ea typeface="Arial"/>
-              </a:rPr>
-              <a:t>Psicogênica × Funcional:</a:t>
-            </a:r>
-            <a:endParaRPr b="0" lang="pt-BR" sz="1700" spc="-1" strike="noStrike">
-              <a:solidFill>
-                <a:srgbClr val="000000"/>
-              </a:solidFill>
-              <a:latin typeface="Arial"/>
-            </a:endParaRPr>
-          </a:p>
-          <a:p>
-            <a:pPr algn="ctr">
-              <a:lnSpc>
-                <a:spcPct val="100000"/>
-              </a:lnSpc>
-            </a:pPr>
-            <a:r>
-              <a:rPr b="1" lang="pt-BR" sz="1700" spc="-1" strike="noStrike">
-                <a:solidFill>
-                  <a:srgbClr val="c98b00"/>
-                </a:solidFill>
-                <a:latin typeface="Calibri"/>
-                <a:ea typeface="Arial"/>
-              </a:rPr>
-              <a:t>teto de separabilidade</a:t>
-            </a:r>
-            <a:endParaRPr b="0" lang="pt-BR" sz="1700" spc="-1" strike="noStrike">
-              <a:solidFill>
-                <a:srgbClr val="000000"/>
-              </a:solidFill>
-              <a:latin typeface="Arial"/>
-            </a:endParaRPr>
-          </a:p>
-        </p:txBody>
-      </p:sp>
-      <p:sp>
-        <p:nvSpPr>
-          <p:cNvPr id="82" name="Rounded Rectangle 121"/>
-          <p:cNvSpPr/>
-          <p:nvPr/>
-        </p:nvSpPr>
-        <p:spPr>
-          <a:xfrm>
-            <a:off x="12312000" y="34164360"/>
-            <a:ext cx="4679280" cy="1295280"/>
-          </a:xfrm>
-          <a:prstGeom prst="roundRect">
-            <a:avLst>
-              <a:gd name="adj" fmla="val 22000"/>
-            </a:avLst>
-          </a:prstGeom>
-          <a:solidFill>
-            <a:srgbClr val="dceafa"/>
-          </a:solidFill>
-          <a:ln w="20320">
-            <a:solidFill>
-              <a:srgbClr val="2a78d6"/>
-            </a:solidFill>
-            <a:round/>
-          </a:ln>
-          <a:effectLst>
-            <a:outerShdw blurRad="39960" dir="5400000" dist="23040" rotWithShape="0">
-              <a:srgbClr val="000000">
-                <a:alpha val="35000"/>
-              </a:srgbClr>
-            </a:outerShdw>
-          </a:effectLst>
-        </p:spPr>
-        <p:style>
-          <a:lnRef idx="1">
-            <a:schemeClr val="accent1"/>
-          </a:lnRef>
-          <a:fillRef idx="3">
-            <a:schemeClr val="accent1"/>
-          </a:fillRef>
-          <a:effectRef idx="2">
-            <a:schemeClr val="accent1"/>
-          </a:effectRef>
-          <a:fontRef idx="minor"/>
-        </p:style>
-        <p:txBody>
-          <a:bodyPr lIns="126000" rIns="126000" tIns="36000" bIns="36000" anchor="ctr">
-            <a:noAutofit/>
-          </a:bodyPr>
-          <a:p>
-            <a:pPr>
-              <a:lnSpc>
-                <a:spcPct val="100000"/>
-              </a:lnSpc>
-            </a:pPr>
-            <a:r>
-              <a:rPr b="1" lang="pt-BR" sz="1800" spc="-1" strike="noStrike">
-                <a:solidFill>
-                  <a:srgbClr val="2a78d6"/>
-                </a:solidFill>
-                <a:latin typeface="Calibri"/>
-                <a:ea typeface="Arial"/>
-              </a:rPr>
-              <a:t>+5,2 p.p. de</a:t>
-            </a:r>
-            <a:endParaRPr b="0" lang="pt-BR" sz="1800" spc="-1" strike="noStrike">
-              <a:solidFill>
-                <a:srgbClr val="000000"/>
-              </a:solidFill>
-              <a:latin typeface="Arial"/>
-            </a:endParaRPr>
-          </a:p>
-          <a:p>
-            <a:pPr algn="ctr">
-              <a:lnSpc>
-                <a:spcPct val="100000"/>
-              </a:lnSpc>
-            </a:pPr>
-            <a:r>
-              <a:rPr b="1" lang="pt-BR" sz="1800" spc="-1" strike="noStrike">
-                <a:solidFill>
-                  <a:srgbClr val="2a78d6"/>
-                </a:solidFill>
-                <a:latin typeface="Calibri"/>
-                <a:ea typeface="Arial"/>
-              </a:rPr>
-              <a:t>acurácia</a:t>
-            </a:r>
-            <a:endParaRPr b="0" lang="pt-BR" sz="1800" spc="-1" strike="noStrike">
-              <a:solidFill>
-                <a:srgbClr val="000000"/>
-              </a:solidFill>
-              <a:latin typeface="Arial"/>
-            </a:endParaRPr>
-          </a:p>
-        </p:txBody>
-      </p:sp>
       <p:pic>
         <p:nvPicPr>
           <p:cNvPr id="83" name="Picture 122" descr="qr_github.png"/>
@@ -7061,8 +4908,8 @@
         </p:blipFill>
         <p:spPr>
           <a:xfrm>
-            <a:off x="18720000" y="34164360"/>
-            <a:ext cx="1655280" cy="1655280"/>
+            <a:off x="29556000" y="38448000"/>
+            <a:ext cx="1800000" cy="1800000"/>
           </a:xfrm>
           <a:prstGeom prst="rect">
             <a:avLst/>
@@ -7074,78 +4921,6200 @@
       </p:pic>
       <p:sp>
         <p:nvSpPr>
-          <p:cNvPr id="84" name="TextBox 123"/>
+          <p:cNvPr id="84" name="TextBox 83"/>
+          <p:cNvSpPr txBox="1"/>
+          <p:nvPr/>
+        </p:nvSpPr>
+        <p:spPr>
+          <a:xfrm>
+            <a:off x="936000" y="6263999"/>
+            <a:ext cx="30528000" cy="2268000"/>
+          </a:xfrm>
+          <a:prstGeom prst="rect">
+            <a:avLst/>
+          </a:prstGeom>
+          <a:noFill/>
+        </p:spPr>
+        <p:txBody>
+          <a:bodyPr wrap="square" anchor="ctr" lIns="0" rIns="0" tIns="0" bIns="0">
+            <a:spAutoFit/>
+          </a:bodyPr>
+          <a:lstStyle/>
+          <a:p>
+            <a:pPr algn="ctr">
+              <a:lnSpc>
+                <a:spcPct val="94000"/>
+              </a:lnSpc>
+            </a:pPr>
+            <a:r>
+              <a:rPr sz="7200" b="1">
+                <a:solidFill>
+                  <a:srgbClr val="1F3B57"/>
+                </a:solidFill>
+                <a:latin typeface="Arial"/>
+              </a:rPr>
+              <a:t>IDENTIFICAÇÃO COMPUTACIONAL INTELIGENTE</a:t>
+            </a:r>
+          </a:p>
+          <a:p>
+            <a:pPr algn="ctr">
+              <a:lnSpc>
+                <a:spcPct val="94000"/>
+              </a:lnSpc>
+            </a:pPr>
+            <a:r>
+              <a:rPr sz="7200" b="1">
+                <a:solidFill>
+                  <a:srgbClr val="1F3B57"/>
+                </a:solidFill>
+                <a:latin typeface="Arial"/>
+              </a:rPr>
+              <a:t>DE DISFUNÇÕES NO TRATO VOCAL</a:t>
+            </a:r>
+          </a:p>
+        </p:txBody>
+      </p:sp>
+      <p:sp>
+        <p:nvSpPr>
+          <p:cNvPr id="85" name="TextBox 84"/>
+          <p:cNvSpPr txBox="1"/>
+          <p:nvPr/>
+        </p:nvSpPr>
+        <p:spPr>
+          <a:xfrm>
+            <a:off x="936000" y="8604000"/>
+            <a:ext cx="30528000" cy="648000"/>
+          </a:xfrm>
+          <a:prstGeom prst="rect">
+            <a:avLst/>
+          </a:prstGeom>
+          <a:noFill/>
+        </p:spPr>
+        <p:txBody>
+          <a:bodyPr wrap="square" anchor="ctr" lIns="0" rIns="0" tIns="0" bIns="0">
+            <a:spAutoFit/>
+          </a:bodyPr>
+          <a:lstStyle/>
+          <a:p>
+            <a:pPr algn="ctr">
+              <a:lnSpc>
+                <a:spcPct val="92000"/>
+              </a:lnSpc>
+            </a:pPr>
+            <a:r>
+              <a:rPr sz="3300" b="1">
+                <a:solidFill>
+                  <a:srgbClr val="1E1E1E"/>
+                </a:solidFill>
+                <a:latin typeface="Arial"/>
+              </a:rPr>
+              <a:t>Ronaldo Chiavegatti Sampaio Corrêa</a:t>
+            </a:r>
+            <a:r>
+              <a:rPr sz="3300" b="0">
+                <a:solidFill>
+                  <a:srgbClr val="777777"/>
+                </a:solidFill>
+                <a:latin typeface="Arial"/>
+              </a:rPr>
+              <a:t>     |     </a:t>
+            </a:r>
+            <a:r>
+              <a:rPr sz="3300" b="0">
+                <a:solidFill>
+                  <a:srgbClr val="1E1E1E"/>
+                </a:solidFill>
+                <a:latin typeface="Arial"/>
+              </a:rPr>
+              <a:t>Rodrigo Capobianco Guido</a:t>
+            </a:r>
+            <a:r>
+              <a:rPr sz="2800" b="0">
+                <a:solidFill>
+                  <a:srgbClr val="777777"/>
+                </a:solidFill>
+                <a:latin typeface="Arial"/>
+              </a:rPr>
+              <a:t>  (Orientador)</a:t>
+            </a:r>
+          </a:p>
+        </p:txBody>
+      </p:sp>
+      <p:sp>
+        <p:nvSpPr>
+          <p:cNvPr id="86" name="TextBox 85"/>
+          <p:cNvSpPr txBox="1"/>
+          <p:nvPr/>
+        </p:nvSpPr>
+        <p:spPr>
+          <a:xfrm>
+            <a:off x="936000" y="9252000"/>
+            <a:ext cx="30528000" cy="503999"/>
+          </a:xfrm>
+          <a:prstGeom prst="rect">
+            <a:avLst/>
+          </a:prstGeom>
+          <a:noFill/>
+        </p:spPr>
+        <p:txBody>
+          <a:bodyPr wrap="square" anchor="ctr" lIns="0" rIns="0" tIns="0" bIns="0">
+            <a:spAutoFit/>
+          </a:bodyPr>
+          <a:lstStyle/>
+          <a:p>
+            <a:pPr algn="ctr">
+              <a:lnSpc>
+                <a:spcPct val="92000"/>
+              </a:lnSpc>
+            </a:pPr>
+            <a:r>
+              <a:rPr sz="2500" b="0">
+                <a:solidFill>
+                  <a:srgbClr val="4E4E4E"/>
+                </a:solidFill>
+                <a:latin typeface="Arial"/>
+              </a:rPr>
+              <a:t>Instituto de Biociências, Letras e Ciências Exatas — IBILCE/Unesp · Câmpus de São José do Rio Preto</a:t>
+            </a:r>
+          </a:p>
+        </p:txBody>
+      </p:sp>
+      <p:sp>
+        <p:nvSpPr>
+          <p:cNvPr id="87" name="Rounded Rectangle 86"/>
           <p:cNvSpPr/>
           <p:nvPr/>
         </p:nvSpPr>
         <p:spPr>
           <a:xfrm>
-            <a:off x="20592000" y="34344360"/>
-            <a:ext cx="7199280" cy="683280"/>
+            <a:off x="8640000" y="9864000"/>
+            <a:ext cx="15120000" cy="684000"/>
+          </a:xfrm>
+          <a:prstGeom prst="roundRect">
+            <a:avLst>
+              <a:gd name="adj" fmla="val 50000"/>
+            </a:avLst>
+          </a:prstGeom>
+          <a:solidFill>
+            <a:srgbClr val="F2F4F7"/>
+          </a:solidFill>
+          <a:ln w="15240">
+            <a:solidFill>
+              <a:srgbClr val="D8DDE4"/>
+            </a:solidFill>
+          </a:ln>
+          <a:effectLst/>
+        </p:spPr>
+        <p:style>
+          <a:lnRef idx="1">
+            <a:schemeClr val="accent1"/>
+          </a:lnRef>
+          <a:fillRef idx="3">
+            <a:schemeClr val="accent1"/>
+          </a:fillRef>
+          <a:effectRef idx="2">
+            <a:schemeClr val="accent1"/>
+          </a:effectRef>
+          <a:fontRef idx="minor">
+            <a:schemeClr val="lt1"/>
+          </a:fontRef>
+        </p:style>
+        <p:txBody>
+          <a:bodyPr rtlCol="0" anchor="ctr" wrap="square" lIns="108000" rIns="108000" tIns="36000" bIns="36000"/>
+          <a:lstStyle/>
+          <a:p>
+            <a:pPr algn="ctr">
+              <a:lnSpc>
+                <a:spcPct val="92000"/>
+              </a:lnSpc>
+            </a:pPr>
+            <a:r>
+              <a:rPr sz="2000" b="0">
+                <a:solidFill>
+                  <a:srgbClr val="4E4E4E"/>
+                </a:solidFill>
+                <a:latin typeface="Arial"/>
+              </a:rPr>
+              <a:t>Iniciação Científica Voluntária — PIBIC/Unesp, sem bolsa     ·     </a:t>
+            </a:r>
+            <a:r>
+              <a:rPr sz="2000" b="1">
+                <a:solidFill>
+                  <a:srgbClr val="1E1E1E"/>
+                </a:solidFill>
+                <a:latin typeface="Arial"/>
+              </a:rPr>
+              <a:t>pipeline em C99, sem frameworks de ML</a:t>
+            </a:r>
+          </a:p>
+        </p:txBody>
+      </p:sp>
+      <p:sp>
+        <p:nvSpPr>
+          <p:cNvPr id="88" name="Rounded Rectangle 87"/>
+          <p:cNvSpPr/>
+          <p:nvPr/>
+        </p:nvSpPr>
+        <p:spPr>
+          <a:xfrm>
+            <a:off x="936000" y="10926000"/>
+            <a:ext cx="180000" cy="648000"/>
+          </a:xfrm>
+          <a:prstGeom prst="roundRect">
+            <a:avLst>
+              <a:gd name="adj" fmla="val 50000"/>
+            </a:avLst>
+          </a:prstGeom>
+          <a:solidFill>
+            <a:srgbClr val="2A78D6"/>
+          </a:solidFill>
+          <a:ln>
+            <a:noFill/>
+          </a:ln>
+          <a:effectLst/>
+        </p:spPr>
+        <p:style>
+          <a:lnRef idx="1">
+            <a:schemeClr val="accent1"/>
+          </a:lnRef>
+          <a:fillRef idx="3">
+            <a:schemeClr val="accent1"/>
+          </a:fillRef>
+          <a:effectRef idx="2">
+            <a:schemeClr val="accent1"/>
+          </a:effectRef>
+          <a:fontRef idx="minor">
+            <a:schemeClr val="lt1"/>
+          </a:fontRef>
+        </p:style>
+        <p:txBody>
+          <a:bodyPr rtlCol="0" anchor="ctr" wrap="square"/>
+          <a:lstStyle/>
+          <a:p>
+            <a:pPr algn="ctr"/>
+          </a:p>
+        </p:txBody>
+      </p:sp>
+      <p:sp>
+        <p:nvSpPr>
+          <p:cNvPr id="89" name="TextBox 88"/>
+          <p:cNvSpPr txBox="1"/>
+          <p:nvPr/>
+        </p:nvSpPr>
+        <p:spPr>
+          <a:xfrm>
+            <a:off x="1314000" y="10872000"/>
+            <a:ext cx="14454000" cy="792000"/>
           </a:xfrm>
           <a:prstGeom prst="rect">
             <a:avLst/>
           </a:prstGeom>
           <a:noFill/>
-          <a:ln w="0">
+        </p:spPr>
+        <p:txBody>
+          <a:bodyPr wrap="square" anchor="ctr" lIns="0" rIns="0" tIns="0" bIns="0">
+            <a:spAutoFit/>
+          </a:bodyPr>
+          <a:lstStyle/>
+          <a:p>
+            <a:pPr algn="l">
+              <a:lnSpc>
+                <a:spcPct val="92000"/>
+              </a:lnSpc>
+            </a:pPr>
+            <a:r>
+              <a:rPr sz="5000" b="1">
+                <a:solidFill>
+                  <a:srgbClr val="1F3B57"/>
+                </a:solidFill>
+                <a:latin typeface="Arial"/>
+              </a:rPr>
+              <a:t>O PROBLEMA</a:t>
+            </a:r>
+          </a:p>
+        </p:txBody>
+      </p:sp>
+      <p:sp>
+        <p:nvSpPr>
+          <p:cNvPr id="90" name="Rounded Rectangle 89"/>
+          <p:cNvSpPr/>
+          <p:nvPr/>
+        </p:nvSpPr>
+        <p:spPr>
+          <a:xfrm>
+            <a:off x="16632000" y="10926000"/>
+            <a:ext cx="180000" cy="648000"/>
+          </a:xfrm>
+          <a:prstGeom prst="roundRect">
+            <a:avLst>
+              <a:gd name="adj" fmla="val 50000"/>
+            </a:avLst>
+          </a:prstGeom>
+          <a:solidFill>
+            <a:srgbClr val="EB6834"/>
+          </a:solidFill>
+          <a:ln>
             <a:noFill/>
           </a:ln>
+          <a:effectLst/>
         </p:spPr>
         <p:style>
-          <a:lnRef idx="0"/>
-          <a:fillRef idx="0"/>
-          <a:effectRef idx="0"/>
-          <a:fontRef idx="minor"/>
+          <a:lnRef idx="1">
+            <a:schemeClr val="accent1"/>
+          </a:lnRef>
+          <a:fillRef idx="3">
+            <a:schemeClr val="accent1"/>
+          </a:fillRef>
+          <a:effectRef idx="2">
+            <a:schemeClr val="accent1"/>
+          </a:effectRef>
+          <a:fontRef idx="minor">
+            <a:schemeClr val="lt1"/>
+          </a:fontRef>
         </p:style>
         <p:txBody>
-          <a:bodyPr lIns="90000" rIns="90000" tIns="0" bIns="45000" anchor="t">
-            <a:noAutofit/>
+          <a:bodyPr rtlCol="0" anchor="ctr" wrap="square"/>
+          <a:lstStyle/>
+          <a:p>
+            <a:pPr algn="ctr"/>
+          </a:p>
+        </p:txBody>
+      </p:sp>
+      <p:sp>
+        <p:nvSpPr>
+          <p:cNvPr id="91" name="TextBox 90"/>
+          <p:cNvSpPr txBox="1"/>
+          <p:nvPr/>
+        </p:nvSpPr>
+        <p:spPr>
+          <a:xfrm>
+            <a:off x="17010000" y="10872000"/>
+            <a:ext cx="14454000" cy="792000"/>
+          </a:xfrm>
+          <a:prstGeom prst="rect">
+            <a:avLst/>
+          </a:prstGeom>
+          <a:noFill/>
+        </p:spPr>
+        <p:txBody>
+          <a:bodyPr wrap="square" anchor="ctr" lIns="0" rIns="0" tIns="0" bIns="0">
+            <a:spAutoFit/>
           </a:bodyPr>
-          <a:p>
-            <a:pPr>
-              <a:lnSpc>
-                <a:spcPct val="100000"/>
-              </a:lnSpc>
-            </a:pPr>
-            <a:r>
-              <a:rPr b="0" i="1" lang="pt-BR" sz="2000" spc="-1" strike="noStrike">
-                <a:solidFill>
-                  <a:srgbClr val="606060"/>
-                </a:solidFill>
-                <a:latin typeface="Calibri"/>
-                <a:ea typeface="Arial"/>
-              </a:rPr>
-              <a:t>Código-fonte e</a:t>
-            </a:r>
-            <a:endParaRPr b="0" lang="pt-BR" sz="2000" spc="-1" strike="noStrike">
-              <a:solidFill>
-                <a:srgbClr val="000000"/>
-              </a:solidFill>
-              <a:latin typeface="Arial"/>
-            </a:endParaRPr>
-          </a:p>
-          <a:p>
-            <a:pPr>
-              <a:lnSpc>
-                <a:spcPct val="100000"/>
-              </a:lnSpc>
-            </a:pPr>
-            <a:r>
-              <a:rPr b="0" i="1" lang="pt-BR" sz="2000" spc="-1" strike="noStrike">
-                <a:solidFill>
-                  <a:srgbClr val="606060"/>
-                </a:solidFill>
-                <a:latin typeface="Calibri"/>
-                <a:ea typeface="Arial"/>
-              </a:rPr>
-              <a:t>referências completas</a:t>
-            </a:r>
-            <a:endParaRPr b="0" lang="pt-BR" sz="2000" spc="-1" strike="noStrike">
-              <a:solidFill>
-                <a:srgbClr val="000000"/>
-              </a:solidFill>
-              <a:latin typeface="Arial"/>
-            </a:endParaRPr>
+          <a:lstStyle/>
+          <a:p>
+            <a:pPr algn="l">
+              <a:lnSpc>
+                <a:spcPct val="92000"/>
+              </a:lnSpc>
+            </a:pPr>
+            <a:r>
+              <a:rPr sz="5000" b="1">
+                <a:solidFill>
+                  <a:srgbClr val="1F3B57"/>
+                </a:solidFill>
+                <a:latin typeface="Arial"/>
+              </a:rPr>
+              <a:t>OBJETIVOS</a:t>
+            </a:r>
+          </a:p>
+        </p:txBody>
+      </p:sp>
+      <p:sp>
+        <p:nvSpPr>
+          <p:cNvPr id="92" name="Rounded Rectangle 91"/>
+          <p:cNvSpPr/>
+          <p:nvPr/>
+        </p:nvSpPr>
+        <p:spPr>
+          <a:xfrm>
+            <a:off x="936000" y="11844000"/>
+            <a:ext cx="6336000" cy="1872000"/>
+          </a:xfrm>
+          <a:prstGeom prst="roundRect">
+            <a:avLst>
+              <a:gd name="adj" fmla="val 16000"/>
+            </a:avLst>
+          </a:prstGeom>
+          <a:solidFill>
+            <a:srgbClr val="FFFFFF"/>
+          </a:solidFill>
+          <a:ln w="20320">
+            <a:solidFill>
+              <a:srgbClr val="2A78D6"/>
+            </a:solidFill>
+          </a:ln>
+          <a:effectLst/>
+        </p:spPr>
+        <p:style>
+          <a:lnRef idx="1">
+            <a:schemeClr val="accent1"/>
+          </a:lnRef>
+          <a:fillRef idx="3">
+            <a:schemeClr val="accent1"/>
+          </a:fillRef>
+          <a:effectRef idx="2">
+            <a:schemeClr val="accent1"/>
+          </a:effectRef>
+          <a:fontRef idx="minor">
+            <a:schemeClr val="lt1"/>
+          </a:fontRef>
+        </p:style>
+        <p:txBody>
+          <a:bodyPr rtlCol="0" anchor="ctr" wrap="square" lIns="108000" rIns="108000" tIns="36000" bIns="36000"/>
+          <a:lstStyle/>
+          <a:p>
+            <a:pPr algn="ctr">
+              <a:lnSpc>
+                <a:spcPct val="92000"/>
+              </a:lnSpc>
+            </a:pPr>
+            <a:r>
+              <a:rPr sz="1800" b="0">
+                <a:solidFill>
+                  <a:srgbClr val="777777"/>
+                </a:solidFill>
+                <a:latin typeface="Arial"/>
+              </a:rPr>
+              <a:t>hoje</a:t>
+            </a:r>
+          </a:p>
+          <a:p>
+            <a:pPr algn="ctr">
+              <a:lnSpc>
+                <a:spcPct val="92000"/>
+              </a:lnSpc>
+            </a:pPr>
+            <a:r>
+              <a:rPr sz="2100" b="0">
+                <a:solidFill>
+                  <a:srgbClr val="1E1E1E"/>
+                </a:solidFill>
+                <a:latin typeface="Arial"/>
+              </a:rPr>
+              <a:t>diagnóstico diferencial exige</a:t>
+            </a:r>
+          </a:p>
+          <a:p>
+            <a:pPr algn="ctr">
+              <a:lnSpc>
+                <a:spcPct val="92000"/>
+              </a:lnSpc>
+            </a:pPr>
+            <a:r>
+              <a:rPr sz="2700" b="1">
+                <a:solidFill>
+                  <a:srgbClr val="2A78D6"/>
+                </a:solidFill>
+                <a:latin typeface="Arial"/>
+              </a:rPr>
+              <a:t>exame invasivo</a:t>
+            </a:r>
+          </a:p>
+        </p:txBody>
+      </p:sp>
+      <p:sp>
+        <p:nvSpPr>
+          <p:cNvPr id="93" name="Right Arrow 92"/>
+          <p:cNvSpPr/>
+          <p:nvPr/>
+        </p:nvSpPr>
+        <p:spPr>
+          <a:xfrm>
+            <a:off x="7416000" y="12564000"/>
+            <a:ext cx="792000" cy="468000"/>
+          </a:xfrm>
+          <a:prstGeom prst="rightArrow">
+            <a:avLst>
+              <a:gd name="adj1" fmla="val 50000"/>
+              <a:gd name="adj2" fmla="val 45000"/>
+            </a:avLst>
+          </a:prstGeom>
+          <a:solidFill>
+            <a:srgbClr val="9AA3AE"/>
+          </a:solidFill>
+          <a:ln>
+            <a:noFill/>
+          </a:ln>
+          <a:effectLst/>
+        </p:spPr>
+        <p:style>
+          <a:lnRef idx="1">
+            <a:schemeClr val="accent1"/>
+          </a:lnRef>
+          <a:fillRef idx="3">
+            <a:schemeClr val="accent1"/>
+          </a:fillRef>
+          <a:effectRef idx="2">
+            <a:schemeClr val="accent1"/>
+          </a:effectRef>
+          <a:fontRef idx="minor">
+            <a:schemeClr val="lt1"/>
+          </a:fontRef>
+        </p:style>
+        <p:txBody>
+          <a:bodyPr rtlCol="0" anchor="ctr"/>
+          <a:lstStyle/>
+          <a:p>
+            <a:pPr algn="ctr"/>
+          </a:p>
+        </p:txBody>
+      </p:sp>
+      <p:sp>
+        <p:nvSpPr>
+          <p:cNvPr id="94" name="Rounded Rectangle 93"/>
+          <p:cNvSpPr/>
+          <p:nvPr/>
+        </p:nvSpPr>
+        <p:spPr>
+          <a:xfrm>
+            <a:off x="8352000" y="11844000"/>
+            <a:ext cx="7416000" cy="1872000"/>
+          </a:xfrm>
+          <a:prstGeom prst="roundRect">
+            <a:avLst>
+              <a:gd name="adj" fmla="val 16000"/>
+            </a:avLst>
+          </a:prstGeom>
+          <a:solidFill>
+            <a:srgbClr val="E8F1FC"/>
+          </a:solidFill>
+          <a:ln w="20320">
+            <a:solidFill>
+              <a:srgbClr val="2A78D6"/>
+            </a:solidFill>
+          </a:ln>
+          <a:effectLst/>
+        </p:spPr>
+        <p:style>
+          <a:lnRef idx="1">
+            <a:schemeClr val="accent1"/>
+          </a:lnRef>
+          <a:fillRef idx="3">
+            <a:schemeClr val="accent1"/>
+          </a:fillRef>
+          <a:effectRef idx="2">
+            <a:schemeClr val="accent1"/>
+          </a:effectRef>
+          <a:fontRef idx="minor">
+            <a:schemeClr val="lt1"/>
+          </a:fontRef>
+        </p:style>
+        <p:txBody>
+          <a:bodyPr rtlCol="0" anchor="ctr" wrap="square" lIns="108000" rIns="108000" tIns="36000" bIns="36000"/>
+          <a:lstStyle/>
+          <a:p>
+            <a:pPr algn="ctr">
+              <a:lnSpc>
+                <a:spcPct val="92000"/>
+              </a:lnSpc>
+            </a:pPr>
+            <a:r>
+              <a:rPr sz="1800" b="0">
+                <a:solidFill>
+                  <a:srgbClr val="777777"/>
+                </a:solidFill>
+                <a:latin typeface="Arial"/>
+              </a:rPr>
+              <a:t>proposta</a:t>
+            </a:r>
+          </a:p>
+          <a:p>
+            <a:pPr algn="ctr">
+              <a:lnSpc>
+                <a:spcPct val="92000"/>
+              </a:lnSpc>
+            </a:pPr>
+            <a:r>
+              <a:rPr sz="2100" b="0">
+                <a:solidFill>
+                  <a:srgbClr val="1E1E1E"/>
+                </a:solidFill>
+                <a:latin typeface="Arial"/>
+              </a:rPr>
+              <a:t>triagem </a:t>
+            </a:r>
+            <a:r>
+              <a:rPr sz="2700" b="1">
+                <a:solidFill>
+                  <a:srgbClr val="2A78D6"/>
+                </a:solidFill>
+                <a:latin typeface="Arial"/>
+              </a:rPr>
+              <a:t>não invasiva</a:t>
+            </a:r>
+          </a:p>
+          <a:p>
+            <a:pPr algn="ctr">
+              <a:lnSpc>
+                <a:spcPct val="92000"/>
+              </a:lnSpc>
+            </a:pPr>
+            <a:r>
+              <a:rPr sz="2100" b="0">
+                <a:solidFill>
+                  <a:srgbClr val="1E1E1E"/>
+                </a:solidFill>
+                <a:latin typeface="Arial"/>
+              </a:rPr>
+              <a:t>e de baixo custo, só pela voz</a:t>
+            </a:r>
+          </a:p>
+        </p:txBody>
+      </p:sp>
+      <p:sp>
+        <p:nvSpPr>
+          <p:cNvPr id="95" name="Rounded Rectangle 94"/>
+          <p:cNvSpPr/>
+          <p:nvPr/>
+        </p:nvSpPr>
+        <p:spPr>
+          <a:xfrm>
+            <a:off x="16632000" y="11844000"/>
+            <a:ext cx="4704000" cy="1872000"/>
+          </a:xfrm>
+          <a:prstGeom prst="roundRect">
+            <a:avLst>
+              <a:gd name="adj" fmla="val 16000"/>
+            </a:avLst>
+          </a:prstGeom>
+          <a:solidFill>
+            <a:srgbClr val="FDF0E9"/>
+          </a:solidFill>
+          <a:ln w="20320">
+            <a:solidFill>
+              <a:srgbClr val="EB6834"/>
+            </a:solidFill>
+          </a:ln>
+          <a:effectLst/>
+        </p:spPr>
+        <p:style>
+          <a:lnRef idx="1">
+            <a:schemeClr val="accent1"/>
+          </a:lnRef>
+          <a:fillRef idx="3">
+            <a:schemeClr val="accent1"/>
+          </a:fillRef>
+          <a:effectRef idx="2">
+            <a:schemeClr val="accent1"/>
+          </a:effectRef>
+          <a:fontRef idx="minor">
+            <a:schemeClr val="lt1"/>
+          </a:fontRef>
+        </p:style>
+        <p:txBody>
+          <a:bodyPr rtlCol="0" anchor="ctr" wrap="square" lIns="108000" rIns="108000" tIns="36000" bIns="36000"/>
+          <a:lstStyle/>
+          <a:p>
+            <a:pPr algn="ctr">
+              <a:lnSpc>
+                <a:spcPct val="90000"/>
+              </a:lnSpc>
+            </a:pPr>
+            <a:r>
+              <a:rPr sz="4000" b="1">
+                <a:solidFill>
+                  <a:srgbClr val="EB6834"/>
+                </a:solidFill>
+                <a:latin typeface="Arial"/>
+              </a:rPr>
+              <a:t>5</a:t>
+            </a:r>
+          </a:p>
+          <a:p>
+            <a:pPr algn="ctr">
+              <a:lnSpc>
+                <a:spcPct val="90000"/>
+              </a:lnSpc>
+            </a:pPr>
+            <a:r>
+              <a:rPr sz="1900" b="0">
+                <a:solidFill>
+                  <a:srgbClr val="1E1E1E"/>
+                </a:solidFill>
+                <a:latin typeface="Arial"/>
+              </a:rPr>
+              <a:t>condições vocais</a:t>
+            </a:r>
+          </a:p>
+          <a:p>
+            <a:pPr algn="ctr">
+              <a:lnSpc>
+                <a:spcPct val="90000"/>
+              </a:lnSpc>
+            </a:pPr>
+            <a:r>
+              <a:rPr sz="1900" b="0">
+                <a:solidFill>
+                  <a:srgbClr val="1E1E1E"/>
+                </a:solidFill>
+                <a:latin typeface="Arial"/>
+              </a:rPr>
+              <a:t>distinguidas pela voz</a:t>
+            </a:r>
+          </a:p>
+        </p:txBody>
+      </p:sp>
+      <p:sp>
+        <p:nvSpPr>
+          <p:cNvPr id="96" name="Rounded Rectangle 95"/>
+          <p:cNvSpPr/>
+          <p:nvPr/>
+        </p:nvSpPr>
+        <p:spPr>
+          <a:xfrm>
+            <a:off x="21696000" y="11844000"/>
+            <a:ext cx="4704000" cy="1872000"/>
+          </a:xfrm>
+          <a:prstGeom prst="roundRect">
+            <a:avLst>
+              <a:gd name="adj" fmla="val 16000"/>
+            </a:avLst>
+          </a:prstGeom>
+          <a:solidFill>
+            <a:srgbClr val="FDF0E9"/>
+          </a:solidFill>
+          <a:ln w="20320">
+            <a:solidFill>
+              <a:srgbClr val="EB6834"/>
+            </a:solidFill>
+          </a:ln>
+          <a:effectLst/>
+        </p:spPr>
+        <p:style>
+          <a:lnRef idx="1">
+            <a:schemeClr val="accent1"/>
+          </a:lnRef>
+          <a:fillRef idx="3">
+            <a:schemeClr val="accent1"/>
+          </a:fillRef>
+          <a:effectRef idx="2">
+            <a:schemeClr val="accent1"/>
+          </a:effectRef>
+          <a:fontRef idx="minor">
+            <a:schemeClr val="lt1"/>
+          </a:fontRef>
+        </p:style>
+        <p:txBody>
+          <a:bodyPr rtlCol="0" anchor="ctr" wrap="square" lIns="108000" rIns="108000" tIns="36000" bIns="36000"/>
+          <a:lstStyle/>
+          <a:p>
+            <a:pPr algn="ctr">
+              <a:lnSpc>
+                <a:spcPct val="90000"/>
+              </a:lnSpc>
+            </a:pPr>
+            <a:r>
+              <a:rPr sz="4000" b="1">
+                <a:solidFill>
+                  <a:srgbClr val="EB6834"/>
+                </a:solidFill>
+                <a:latin typeface="Arial"/>
+              </a:rPr>
+              <a:t>6</a:t>
+            </a:r>
+          </a:p>
+          <a:p>
+            <a:pPr algn="ctr">
+              <a:lnSpc>
+                <a:spcPct val="90000"/>
+              </a:lnSpc>
+            </a:pPr>
+            <a:r>
+              <a:rPr sz="1900" b="0">
+                <a:solidFill>
+                  <a:srgbClr val="1E1E1E"/>
+                </a:solidFill>
+                <a:latin typeface="Arial"/>
+              </a:rPr>
+              <a:t>redes por dobra: 2 por</a:t>
+            </a:r>
+          </a:p>
+          <a:p>
+            <a:pPr algn="ctr">
+              <a:lnSpc>
+                <a:spcPct val="90000"/>
+              </a:lnSpc>
+            </a:pPr>
+            <a:r>
+              <a:rPr sz="1900" b="0">
+                <a:solidFill>
+                  <a:srgbClr val="1E1E1E"/>
+                </a:solidFill>
+                <a:latin typeface="Arial"/>
+              </a:rPr>
+              <a:t>vogal, fundidas ao final</a:t>
+            </a:r>
+          </a:p>
+        </p:txBody>
+      </p:sp>
+      <p:sp>
+        <p:nvSpPr>
+          <p:cNvPr id="97" name="Rounded Rectangle 96"/>
+          <p:cNvSpPr/>
+          <p:nvPr/>
+        </p:nvSpPr>
+        <p:spPr>
+          <a:xfrm>
+            <a:off x="26760000" y="11844000"/>
+            <a:ext cx="4704000" cy="1872000"/>
+          </a:xfrm>
+          <a:prstGeom prst="roundRect">
+            <a:avLst>
+              <a:gd name="adj" fmla="val 16000"/>
+            </a:avLst>
+          </a:prstGeom>
+          <a:solidFill>
+            <a:srgbClr val="FDF0E9"/>
+          </a:solidFill>
+          <a:ln w="20320">
+            <a:solidFill>
+              <a:srgbClr val="EB6834"/>
+            </a:solidFill>
+          </a:ln>
+          <a:effectLst/>
+        </p:spPr>
+        <p:style>
+          <a:lnRef idx="1">
+            <a:schemeClr val="accent1"/>
+          </a:lnRef>
+          <a:fillRef idx="3">
+            <a:schemeClr val="accent1"/>
+          </a:fillRef>
+          <a:effectRef idx="2">
+            <a:schemeClr val="accent1"/>
+          </a:effectRef>
+          <a:fontRef idx="minor">
+            <a:schemeClr val="lt1"/>
+          </a:fontRef>
+        </p:style>
+        <p:txBody>
+          <a:bodyPr rtlCol="0" anchor="ctr" wrap="square" lIns="108000" rIns="108000" tIns="36000" bIns="36000"/>
+          <a:lstStyle/>
+          <a:p>
+            <a:pPr algn="ctr">
+              <a:lnSpc>
+                <a:spcPct val="90000"/>
+              </a:lnSpc>
+            </a:pPr>
+            <a:r>
+              <a:rPr sz="4000" b="1">
+                <a:solidFill>
+                  <a:srgbClr val="EB6834"/>
+                </a:solidFill>
+                <a:latin typeface="Arial"/>
+              </a:rPr>
+              <a:t>3</a:t>
+            </a:r>
+          </a:p>
+          <a:p>
+            <a:pPr algn="ctr">
+              <a:lnSpc>
+                <a:spcPct val="90000"/>
+              </a:lnSpc>
+            </a:pPr>
+            <a:r>
+              <a:rPr sz="1900" b="0">
+                <a:solidFill>
+                  <a:srgbClr val="1E1E1E"/>
+                </a:solidFill>
+                <a:latin typeface="Arial"/>
+              </a:rPr>
+              <a:t>lacunas metodológicas</a:t>
+            </a:r>
+          </a:p>
+          <a:p>
+            <a:pPr algn="ctr">
+              <a:lnSpc>
+                <a:spcPct val="90000"/>
+              </a:lnSpc>
+            </a:pPr>
+            <a:r>
+              <a:rPr sz="1900" b="0">
+                <a:solidFill>
+                  <a:srgbClr val="1E1E1E"/>
+                </a:solidFill>
+                <a:latin typeface="Arial"/>
+              </a:rPr>
+              <a:t>fechadas com A/B</a:t>
+            </a:r>
+          </a:p>
+        </p:txBody>
+      </p:sp>
+      <p:sp>
+        <p:nvSpPr>
+          <p:cNvPr id="98" name="Rounded Rectangle 97"/>
+          <p:cNvSpPr/>
+          <p:nvPr/>
+        </p:nvSpPr>
+        <p:spPr>
+          <a:xfrm>
+            <a:off x="936000" y="14057999"/>
+            <a:ext cx="180000" cy="648000"/>
+          </a:xfrm>
+          <a:prstGeom prst="roundRect">
+            <a:avLst>
+              <a:gd name="adj" fmla="val 50000"/>
+            </a:avLst>
+          </a:prstGeom>
+          <a:solidFill>
+            <a:srgbClr val="179669"/>
+          </a:solidFill>
+          <a:ln>
+            <a:noFill/>
+          </a:ln>
+          <a:effectLst/>
+        </p:spPr>
+        <p:style>
+          <a:lnRef idx="1">
+            <a:schemeClr val="accent1"/>
+          </a:lnRef>
+          <a:fillRef idx="3">
+            <a:schemeClr val="accent1"/>
+          </a:fillRef>
+          <a:effectRef idx="2">
+            <a:schemeClr val="accent1"/>
+          </a:effectRef>
+          <a:fontRef idx="minor">
+            <a:schemeClr val="lt1"/>
+          </a:fontRef>
+        </p:style>
+        <p:txBody>
+          <a:bodyPr rtlCol="0" anchor="ctr" wrap="square"/>
+          <a:lstStyle/>
+          <a:p>
+            <a:pPr algn="ctr"/>
+          </a:p>
+        </p:txBody>
+      </p:sp>
+      <p:sp>
+        <p:nvSpPr>
+          <p:cNvPr id="99" name="TextBox 98"/>
+          <p:cNvSpPr txBox="1"/>
+          <p:nvPr/>
+        </p:nvSpPr>
+        <p:spPr>
+          <a:xfrm>
+            <a:off x="1314000" y="14004000"/>
+            <a:ext cx="30150000" cy="792000"/>
+          </a:xfrm>
+          <a:prstGeom prst="rect">
+            <a:avLst/>
+          </a:prstGeom>
+          <a:noFill/>
+        </p:spPr>
+        <p:txBody>
+          <a:bodyPr wrap="square" anchor="ctr" lIns="0" rIns="0" tIns="0" bIns="0">
+            <a:spAutoFit/>
+          </a:bodyPr>
+          <a:lstStyle/>
+          <a:p>
+            <a:pPr algn="l">
+              <a:lnSpc>
+                <a:spcPct val="92000"/>
+              </a:lnSpc>
+            </a:pPr>
+            <a:r>
+              <a:rPr sz="5000" b="1">
+                <a:solidFill>
+                  <a:srgbClr val="1F3B57"/>
+                </a:solidFill>
+                <a:latin typeface="Arial"/>
+              </a:rPr>
+              <a:t>MATERIAL E MÉTODOS</a:t>
+            </a:r>
+          </a:p>
+        </p:txBody>
+      </p:sp>
+      <p:sp>
+        <p:nvSpPr>
+          <p:cNvPr id="100" name="TextBox 99"/>
+          <p:cNvSpPr txBox="1"/>
+          <p:nvPr/>
+        </p:nvSpPr>
+        <p:spPr>
+          <a:xfrm>
+            <a:off x="1314000" y="14741999"/>
+            <a:ext cx="30150000" cy="432000"/>
+          </a:xfrm>
+          <a:prstGeom prst="rect">
+            <a:avLst/>
+          </a:prstGeom>
+          <a:noFill/>
+        </p:spPr>
+        <p:txBody>
+          <a:bodyPr wrap="square" anchor="t" lIns="0" rIns="0" tIns="0" bIns="0">
+            <a:spAutoFit/>
+          </a:bodyPr>
+          <a:lstStyle/>
+          <a:p>
+            <a:pPr algn="l">
+              <a:lnSpc>
+                <a:spcPct val="92000"/>
+              </a:lnSpc>
+            </a:pPr>
+            <a:r>
+              <a:rPr sz="2300" b="0">
+                <a:solidFill>
+                  <a:srgbClr val="777777"/>
+                </a:solidFill>
+                <a:latin typeface="Arial"/>
+              </a:rPr>
+              <a:t>validação cruzada estratificada de 5 dobras · seed fixa (42) · z-score e balanceamento ajustados dentro de cada dobra</a:t>
+            </a:r>
+          </a:p>
+        </p:txBody>
+      </p:sp>
+      <p:sp>
+        <p:nvSpPr>
+          <p:cNvPr id="101" name="Rounded Rectangle 100"/>
+          <p:cNvSpPr/>
+          <p:nvPr/>
+        </p:nvSpPr>
+        <p:spPr>
+          <a:xfrm>
+            <a:off x="936000" y="15300000"/>
+            <a:ext cx="4824000" cy="6480000"/>
+          </a:xfrm>
+          <a:prstGeom prst="roundRect">
+            <a:avLst>
+              <a:gd name="adj" fmla="val 16000"/>
+            </a:avLst>
+          </a:prstGeom>
+          <a:solidFill>
+            <a:srgbClr val="E8F1FC"/>
+          </a:solidFill>
+          <a:ln w="25400">
+            <a:solidFill>
+              <a:srgbClr val="2A78D6"/>
+            </a:solidFill>
+          </a:ln>
+          <a:effectLst/>
+        </p:spPr>
+        <p:style>
+          <a:lnRef idx="1">
+            <a:schemeClr val="accent1"/>
+          </a:lnRef>
+          <a:fillRef idx="3">
+            <a:schemeClr val="accent1"/>
+          </a:fillRef>
+          <a:effectRef idx="2">
+            <a:schemeClr val="accent1"/>
+          </a:effectRef>
+          <a:fontRef idx="minor">
+            <a:schemeClr val="lt1"/>
+          </a:fontRef>
+        </p:style>
+        <p:txBody>
+          <a:bodyPr rtlCol="0" anchor="ctr" wrap="square"/>
+          <a:lstStyle/>
+          <a:p>
+            <a:pPr algn="ctr"/>
+          </a:p>
+        </p:txBody>
+      </p:sp>
+      <p:sp>
+        <p:nvSpPr>
+          <p:cNvPr id="102" name="TextBox 101"/>
+          <p:cNvSpPr txBox="1"/>
+          <p:nvPr/>
+        </p:nvSpPr>
+        <p:spPr>
+          <a:xfrm>
+            <a:off x="936000" y="15516000"/>
+            <a:ext cx="4824000" cy="576000"/>
+          </a:xfrm>
+          <a:prstGeom prst="rect">
+            <a:avLst/>
+          </a:prstGeom>
+          <a:noFill/>
+        </p:spPr>
+        <p:txBody>
+          <a:bodyPr wrap="square" anchor="ctr" lIns="0" rIns="0" tIns="0" bIns="0">
+            <a:spAutoFit/>
+          </a:bodyPr>
+          <a:lstStyle/>
+          <a:p>
+            <a:pPr algn="ctr">
+              <a:lnSpc>
+                <a:spcPct val="92000"/>
+              </a:lnSpc>
+            </a:pPr>
+            <a:r>
+              <a:rPr sz="2900" b="1">
+                <a:solidFill>
+                  <a:srgbClr val="2A78D6"/>
+                </a:solidFill>
+                <a:latin typeface="Arial"/>
+              </a:rPr>
+              <a:t>SINAL DE VOZ</a:t>
+            </a:r>
+          </a:p>
+        </p:txBody>
+      </p:sp>
+      <p:sp>
+        <p:nvSpPr>
+          <p:cNvPr id="103" name="TextBox 102"/>
+          <p:cNvSpPr txBox="1"/>
+          <p:nvPr/>
+        </p:nvSpPr>
+        <p:spPr>
+          <a:xfrm>
+            <a:off x="936000" y="16056000"/>
+            <a:ext cx="4824000" cy="432000"/>
+          </a:xfrm>
+          <a:prstGeom prst="rect">
+            <a:avLst/>
+          </a:prstGeom>
+          <a:noFill/>
+        </p:spPr>
+        <p:txBody>
+          <a:bodyPr wrap="square" anchor="ctr" lIns="0" rIns="0" tIns="0" bIns="0">
+            <a:spAutoFit/>
+          </a:bodyPr>
+          <a:lstStyle/>
+          <a:p>
+            <a:pPr algn="ctr">
+              <a:lnSpc>
+                <a:spcPct val="92000"/>
+              </a:lnSpc>
+            </a:pPr>
+            <a:r>
+              <a:rPr sz="1800" b="0">
+                <a:solidFill>
+                  <a:srgbClr val="4E4E4E"/>
+                </a:solidFill>
+                <a:latin typeface="Arial"/>
+              </a:rPr>
+              <a:t>Saarbrücken Voice Database</a:t>
+            </a:r>
+          </a:p>
+        </p:txBody>
+      </p:sp>
+      <p:sp>
+        <p:nvSpPr>
+          <p:cNvPr id="104" name="Rounded Rectangle 103"/>
+          <p:cNvSpPr/>
+          <p:nvPr/>
+        </p:nvSpPr>
+        <p:spPr>
+          <a:xfrm>
+            <a:off x="1440000" y="16560000"/>
+            <a:ext cx="3816000" cy="864000"/>
+          </a:xfrm>
+          <a:prstGeom prst="roundRect">
+            <a:avLst>
+              <a:gd name="adj" fmla="val 12000"/>
+            </a:avLst>
+          </a:prstGeom>
+          <a:solidFill>
+            <a:srgbClr val="FFFFFF"/>
+          </a:solidFill>
+          <a:ln w="15240">
+            <a:solidFill>
+              <a:srgbClr val="2A78D6"/>
+            </a:solidFill>
+          </a:ln>
+          <a:effectLst/>
+        </p:spPr>
+        <p:style>
+          <a:lnRef idx="1">
+            <a:schemeClr val="accent1"/>
+          </a:lnRef>
+          <a:fillRef idx="3">
+            <a:schemeClr val="accent1"/>
+          </a:fillRef>
+          <a:effectRef idx="2">
+            <a:schemeClr val="accent1"/>
+          </a:effectRef>
+          <a:fontRef idx="minor">
+            <a:schemeClr val="lt1"/>
+          </a:fontRef>
+        </p:style>
+        <p:txBody>
+          <a:bodyPr rtlCol="0" anchor="ctr" wrap="square" lIns="108000" rIns="108000" tIns="36000" bIns="36000"/>
+          <a:lstStyle/>
+          <a:p>
+            <a:pPr algn="ctr">
+              <a:lnSpc>
+                <a:spcPct val="92000"/>
+              </a:lnSpc>
+            </a:pPr>
+            <a:r>
+              <a:rPr sz="4000" b="1">
+                <a:solidFill>
+                  <a:srgbClr val="2A78D6"/>
+                </a:solidFill>
+                <a:latin typeface="Arial"/>
+              </a:rPr>
+              <a:t>∿∿∿∿</a:t>
+            </a:r>
+          </a:p>
+        </p:txBody>
+      </p:sp>
+      <p:sp>
+        <p:nvSpPr>
+          <p:cNvPr id="105" name="TextBox 104"/>
+          <p:cNvSpPr txBox="1"/>
+          <p:nvPr/>
+        </p:nvSpPr>
+        <p:spPr>
+          <a:xfrm>
+            <a:off x="936000" y="17604000"/>
+            <a:ext cx="4824000" cy="1152000"/>
+          </a:xfrm>
+          <a:prstGeom prst="rect">
+            <a:avLst/>
+          </a:prstGeom>
+          <a:noFill/>
+        </p:spPr>
+        <p:txBody>
+          <a:bodyPr wrap="square" anchor="ctr" lIns="0" rIns="0" tIns="0" bIns="0">
+            <a:spAutoFit/>
+          </a:bodyPr>
+          <a:lstStyle/>
+          <a:p>
+            <a:pPr algn="ctr">
+              <a:lnSpc>
+                <a:spcPct val="92000"/>
+              </a:lnSpc>
+            </a:pPr>
+            <a:r>
+              <a:rPr sz="4400" b="1">
+                <a:solidFill>
+                  <a:srgbClr val="1E1E1E"/>
+                </a:solidFill>
+                <a:latin typeface="Arial"/>
+              </a:rPr>
+              <a:t>1.098</a:t>
+            </a:r>
+          </a:p>
+          <a:p>
+            <a:pPr algn="ctr">
+              <a:lnSpc>
+                <a:spcPct val="92000"/>
+              </a:lnSpc>
+            </a:pPr>
+            <a:r>
+              <a:rPr sz="2100" b="0">
+                <a:solidFill>
+                  <a:srgbClr val="4E4E4E"/>
+                </a:solidFill>
+                <a:latin typeface="Arial"/>
+              </a:rPr>
+              <a:t>pacientes</a:t>
+            </a:r>
+          </a:p>
+        </p:txBody>
+      </p:sp>
+      <p:sp>
+        <p:nvSpPr>
+          <p:cNvPr id="106" name="TextBox 105"/>
+          <p:cNvSpPr txBox="1"/>
+          <p:nvPr/>
+        </p:nvSpPr>
+        <p:spPr>
+          <a:xfrm>
+            <a:off x="936000" y="18828000"/>
+            <a:ext cx="4824000" cy="1007999"/>
+          </a:xfrm>
+          <a:prstGeom prst="rect">
+            <a:avLst/>
+          </a:prstGeom>
+          <a:noFill/>
+        </p:spPr>
+        <p:txBody>
+          <a:bodyPr wrap="square" anchor="ctr" lIns="0" rIns="0" tIns="0" bIns="0">
+            <a:spAutoFit/>
+          </a:bodyPr>
+          <a:lstStyle/>
+          <a:p>
+            <a:pPr algn="ctr">
+              <a:lnSpc>
+                <a:spcPct val="92000"/>
+              </a:lnSpc>
+            </a:pPr>
+            <a:r>
+              <a:rPr sz="1900" b="0">
+                <a:solidFill>
+                  <a:srgbClr val="4E4E4E"/>
+                </a:solidFill>
+                <a:latin typeface="Arial"/>
+              </a:rPr>
+              <a:t>vogais sustentadas</a:t>
+            </a:r>
+          </a:p>
+          <a:p>
+            <a:pPr algn="ctr">
+              <a:lnSpc>
+                <a:spcPct val="92000"/>
+              </a:lnSpc>
+            </a:pPr>
+            <a:r>
+              <a:rPr sz="2900" b="1">
+                <a:solidFill>
+                  <a:srgbClr val="2A78D6"/>
+                </a:solidFill>
+                <a:latin typeface="Arial"/>
+              </a:rPr>
+              <a:t>/a/    /i/    /u/</a:t>
+            </a:r>
+          </a:p>
+        </p:txBody>
+      </p:sp>
+      <p:sp>
+        <p:nvSpPr>
+          <p:cNvPr id="107" name="Rounded Rectangle 106"/>
+          <p:cNvSpPr/>
+          <p:nvPr/>
+        </p:nvSpPr>
+        <p:spPr>
+          <a:xfrm>
+            <a:off x="1368000" y="19944000"/>
+            <a:ext cx="3960000" cy="1548000"/>
+          </a:xfrm>
+          <a:prstGeom prst="roundRect">
+            <a:avLst>
+              <a:gd name="adj" fmla="val 12000"/>
+            </a:avLst>
+          </a:prstGeom>
+          <a:solidFill>
+            <a:srgbClr val="FFFFFF"/>
+          </a:solidFill>
+          <a:ln w="15240">
+            <a:solidFill>
+              <a:srgbClr val="C9DEF6"/>
+            </a:solidFill>
+          </a:ln>
+          <a:effectLst/>
+        </p:spPr>
+        <p:style>
+          <a:lnRef idx="1">
+            <a:schemeClr val="accent1"/>
+          </a:lnRef>
+          <a:fillRef idx="3">
+            <a:schemeClr val="accent1"/>
+          </a:fillRef>
+          <a:effectRef idx="2">
+            <a:schemeClr val="accent1"/>
+          </a:effectRef>
+          <a:fontRef idx="minor">
+            <a:schemeClr val="lt1"/>
+          </a:fontRef>
+        </p:style>
+        <p:txBody>
+          <a:bodyPr rtlCol="0" anchor="ctr" wrap="square"/>
+          <a:lstStyle/>
+          <a:p>
+            <a:pPr algn="ctr"/>
+          </a:p>
+        </p:txBody>
+      </p:sp>
+      <p:sp>
+        <p:nvSpPr>
+          <p:cNvPr id="108" name="TextBox 107"/>
+          <p:cNvSpPr txBox="1"/>
+          <p:nvPr/>
+        </p:nvSpPr>
+        <p:spPr>
+          <a:xfrm>
+            <a:off x="1368000" y="19980000"/>
+            <a:ext cx="3960000" cy="1475999"/>
+          </a:xfrm>
+          <a:prstGeom prst="rect">
+            <a:avLst/>
+          </a:prstGeom>
+          <a:noFill/>
+        </p:spPr>
+        <p:txBody>
+          <a:bodyPr wrap="square" anchor="ctr" lIns="0" rIns="0" tIns="0" bIns="0">
+            <a:spAutoFit/>
+          </a:bodyPr>
+          <a:lstStyle/>
+          <a:p>
+            <a:pPr algn="ctr">
+              <a:lnSpc>
+                <a:spcPct val="90000"/>
+              </a:lnSpc>
+            </a:pPr>
+            <a:r>
+              <a:rPr sz="2000" b="1">
+                <a:solidFill>
+                  <a:srgbClr val="1E1E1E"/>
+                </a:solidFill>
+                <a:latin typeface="Arial"/>
+              </a:rPr>
+              <a:t>5 classes clínicas</a:t>
+            </a:r>
+          </a:p>
+          <a:p>
+            <a:pPr algn="ctr">
+              <a:lnSpc>
+                <a:spcPct val="90000"/>
+              </a:lnSpc>
+            </a:pPr>
+            <a:r>
+              <a:rPr sz="1900" b="0">
+                <a:solidFill>
+                  <a:srgbClr val="4E4E4E"/>
+                </a:solidFill>
+                <a:latin typeface="Arial"/>
+              </a:rPr>
+              <a:t>687 · 140 · 91 · 112 · 68</a:t>
+            </a:r>
+          </a:p>
+          <a:p>
+            <a:pPr algn="ctr">
+              <a:lnSpc>
+                <a:spcPct val="90000"/>
+              </a:lnSpc>
+            </a:pPr>
+            <a:r>
+              <a:rPr sz="1700" b="0">
+                <a:solidFill>
+                  <a:srgbClr val="777777"/>
+                </a:solidFill>
+                <a:latin typeface="Arial"/>
+              </a:rPr>
+              <a:t>fortemente desbalanceada</a:t>
+            </a:r>
+          </a:p>
+        </p:txBody>
+      </p:sp>
+      <p:sp>
+        <p:nvSpPr>
+          <p:cNvPr id="109" name="Right Arrow 108"/>
+          <p:cNvSpPr/>
+          <p:nvPr/>
+        </p:nvSpPr>
+        <p:spPr>
+          <a:xfrm>
+            <a:off x="5940000" y="18252000"/>
+            <a:ext cx="432000" cy="576000"/>
+          </a:xfrm>
+          <a:prstGeom prst="rightArrow">
+            <a:avLst>
+              <a:gd name="adj1" fmla="val 50000"/>
+              <a:gd name="adj2" fmla="val 45000"/>
+            </a:avLst>
+          </a:prstGeom>
+          <a:solidFill>
+            <a:srgbClr val="9AA3AE"/>
+          </a:solidFill>
+          <a:ln>
+            <a:noFill/>
+          </a:ln>
+          <a:effectLst/>
+        </p:spPr>
+        <p:style>
+          <a:lnRef idx="1">
+            <a:schemeClr val="accent1"/>
+          </a:lnRef>
+          <a:fillRef idx="3">
+            <a:schemeClr val="accent1"/>
+          </a:fillRef>
+          <a:effectRef idx="2">
+            <a:schemeClr val="accent1"/>
+          </a:effectRef>
+          <a:fontRef idx="minor">
+            <a:schemeClr val="lt1"/>
+          </a:fontRef>
+        </p:style>
+        <p:txBody>
+          <a:bodyPr rtlCol="0" anchor="ctr"/>
+          <a:lstStyle/>
+          <a:p>
+            <a:pPr algn="ctr"/>
+          </a:p>
+        </p:txBody>
+      </p:sp>
+      <p:sp>
+        <p:nvSpPr>
+          <p:cNvPr id="110" name="Rounded Rectangle 109"/>
+          <p:cNvSpPr/>
+          <p:nvPr/>
+        </p:nvSpPr>
+        <p:spPr>
+          <a:xfrm>
+            <a:off x="6552000" y="15300000"/>
+            <a:ext cx="5616000" cy="6480000"/>
+          </a:xfrm>
+          <a:prstGeom prst="roundRect">
+            <a:avLst>
+              <a:gd name="adj" fmla="val 16000"/>
+            </a:avLst>
+          </a:prstGeom>
+          <a:solidFill>
+            <a:srgbClr val="FDF0E9"/>
+          </a:solidFill>
+          <a:ln w="25400">
+            <a:solidFill>
+              <a:srgbClr val="EB6834"/>
+            </a:solidFill>
+          </a:ln>
+          <a:effectLst/>
+        </p:spPr>
+        <p:style>
+          <a:lnRef idx="1">
+            <a:schemeClr val="accent1"/>
+          </a:lnRef>
+          <a:fillRef idx="3">
+            <a:schemeClr val="accent1"/>
+          </a:fillRef>
+          <a:effectRef idx="2">
+            <a:schemeClr val="accent1"/>
+          </a:effectRef>
+          <a:fontRef idx="minor">
+            <a:schemeClr val="lt1"/>
+          </a:fontRef>
+        </p:style>
+        <p:txBody>
+          <a:bodyPr rtlCol="0" anchor="ctr" wrap="square"/>
+          <a:lstStyle/>
+          <a:p>
+            <a:pPr algn="ctr"/>
+          </a:p>
+        </p:txBody>
+      </p:sp>
+      <p:sp>
+        <p:nvSpPr>
+          <p:cNvPr id="111" name="TextBox 110"/>
+          <p:cNvSpPr txBox="1"/>
+          <p:nvPr/>
+        </p:nvSpPr>
+        <p:spPr>
+          <a:xfrm>
+            <a:off x="6552000" y="15516000"/>
+            <a:ext cx="5616000" cy="900000"/>
+          </a:xfrm>
+          <a:prstGeom prst="rect">
+            <a:avLst/>
+          </a:prstGeom>
+          <a:noFill/>
+        </p:spPr>
+        <p:txBody>
+          <a:bodyPr wrap="square" anchor="ctr" lIns="0" rIns="0" tIns="0" bIns="0">
+            <a:spAutoFit/>
+          </a:bodyPr>
+          <a:lstStyle/>
+          <a:p>
+            <a:pPr algn="ctr">
+              <a:lnSpc>
+                <a:spcPct val="92000"/>
+              </a:lnSpc>
+            </a:pPr>
+            <a:r>
+              <a:rPr sz="2900" b="1">
+                <a:solidFill>
+                  <a:srgbClr val="EB6834"/>
+                </a:solidFill>
+                <a:latin typeface="Arial"/>
+              </a:rPr>
+              <a:t>CARACTERÍSTICAS</a:t>
+            </a:r>
+          </a:p>
+          <a:p>
+            <a:pPr algn="ctr">
+              <a:lnSpc>
+                <a:spcPct val="92000"/>
+              </a:lnSpc>
+            </a:pPr>
+            <a:r>
+              <a:rPr sz="1900" b="0">
+                <a:solidFill>
+                  <a:srgbClr val="4E4E4E"/>
+                </a:solidFill>
+                <a:latin typeface="Arial"/>
+              </a:rPr>
+              <a:t>83 por vogal</a:t>
+            </a:r>
+          </a:p>
+        </p:txBody>
+      </p:sp>
+      <p:sp>
+        <p:nvSpPr>
+          <p:cNvPr id="112" name="Rounded Rectangle 111"/>
+          <p:cNvSpPr/>
+          <p:nvPr/>
+        </p:nvSpPr>
+        <p:spPr>
+          <a:xfrm>
+            <a:off x="6804000" y="16560000"/>
+            <a:ext cx="5112000" cy="1404000"/>
+          </a:xfrm>
+          <a:prstGeom prst="roundRect">
+            <a:avLst>
+              <a:gd name="adj" fmla="val 12000"/>
+            </a:avLst>
+          </a:prstGeom>
+          <a:solidFill>
+            <a:srgbClr val="FFFFFF"/>
+          </a:solidFill>
+          <a:ln w="15240">
+            <a:solidFill>
+              <a:srgbClr val="F3D3C3"/>
+            </a:solidFill>
+          </a:ln>
+          <a:effectLst/>
+        </p:spPr>
+        <p:style>
+          <a:lnRef idx="1">
+            <a:schemeClr val="accent1"/>
+          </a:lnRef>
+          <a:fillRef idx="3">
+            <a:schemeClr val="accent1"/>
+          </a:fillRef>
+          <a:effectRef idx="2">
+            <a:schemeClr val="accent1"/>
+          </a:effectRef>
+          <a:fontRef idx="minor">
+            <a:schemeClr val="lt1"/>
+          </a:fontRef>
+        </p:style>
+        <p:txBody>
+          <a:bodyPr rtlCol="0" anchor="ctr" wrap="square" lIns="90000" rIns="90000" tIns="28800" bIns="28800"/>
+          <a:lstStyle/>
+          <a:p>
+            <a:pPr algn="ctr">
+              <a:lnSpc>
+                <a:spcPct val="88000"/>
+              </a:lnSpc>
+            </a:pPr>
+            <a:r>
+              <a:rPr sz="2200" b="1">
+                <a:solidFill>
+                  <a:srgbClr val="1E1E1E"/>
+                </a:solidFill>
+                <a:latin typeface="Arial"/>
+              </a:rPr>
+              <a:t>Temporais   </a:t>
+            </a:r>
+            <a:r>
+              <a:rPr sz="2900" b="1">
+                <a:solidFill>
+                  <a:srgbClr val="EB6834"/>
+                </a:solidFill>
+                <a:latin typeface="Arial"/>
+              </a:rPr>
+              <a:t>10</a:t>
+            </a:r>
+          </a:p>
+          <a:p>
+            <a:pPr algn="ctr">
+              <a:lnSpc>
+                <a:spcPct val="88000"/>
+              </a:lnSpc>
+            </a:pPr>
+            <a:r>
+              <a:rPr sz="1650" b="0">
+                <a:solidFill>
+                  <a:srgbClr val="4E4E4E"/>
+                </a:solidFill>
+                <a:latin typeface="Arial"/>
+              </a:rPr>
+              <a:t>jitter · shimmer · HNR · ZCR</a:t>
+            </a:r>
+          </a:p>
+          <a:p>
+            <a:pPr algn="ctr">
+              <a:lnSpc>
+                <a:spcPct val="88000"/>
+              </a:lnSpc>
+            </a:pPr>
+            <a:r>
+              <a:rPr sz="1600" b="0">
+                <a:solidFill>
+                  <a:srgbClr val="777777"/>
+                </a:solidFill>
+                <a:latin typeface="Arial"/>
+              </a:rPr>
+              <a:t>irregularidade da fonação</a:t>
+            </a:r>
+          </a:p>
+        </p:txBody>
+      </p:sp>
+      <p:sp>
+        <p:nvSpPr>
+          <p:cNvPr id="113" name="Rounded Rectangle 112"/>
+          <p:cNvSpPr/>
+          <p:nvPr/>
+        </p:nvSpPr>
+        <p:spPr>
+          <a:xfrm>
+            <a:off x="6804000" y="18064800"/>
+            <a:ext cx="5112000" cy="1404000"/>
+          </a:xfrm>
+          <a:prstGeom prst="roundRect">
+            <a:avLst>
+              <a:gd name="adj" fmla="val 12000"/>
+            </a:avLst>
+          </a:prstGeom>
+          <a:solidFill>
+            <a:srgbClr val="FFFFFF"/>
+          </a:solidFill>
+          <a:ln w="15240">
+            <a:solidFill>
+              <a:srgbClr val="F3D3C3"/>
+            </a:solidFill>
+          </a:ln>
+          <a:effectLst/>
+        </p:spPr>
+        <p:style>
+          <a:lnRef idx="1">
+            <a:schemeClr val="accent1"/>
+          </a:lnRef>
+          <a:fillRef idx="3">
+            <a:schemeClr val="accent1"/>
+          </a:fillRef>
+          <a:effectRef idx="2">
+            <a:schemeClr val="accent1"/>
+          </a:effectRef>
+          <a:fontRef idx="minor">
+            <a:schemeClr val="lt1"/>
+          </a:fontRef>
+        </p:style>
+        <p:txBody>
+          <a:bodyPr rtlCol="0" anchor="ctr" wrap="square" lIns="90000" rIns="90000" tIns="28800" bIns="28800"/>
+          <a:lstStyle/>
+          <a:p>
+            <a:pPr algn="ctr">
+              <a:lnSpc>
+                <a:spcPct val="88000"/>
+              </a:lnSpc>
+            </a:pPr>
+            <a:r>
+              <a:rPr sz="2200" b="1">
+                <a:solidFill>
+                  <a:srgbClr val="1E1E1E"/>
+                </a:solidFill>
+                <a:latin typeface="Arial"/>
+              </a:rPr>
+              <a:t>Espectrais   </a:t>
+            </a:r>
+            <a:r>
+              <a:rPr sz="2900" b="1">
+                <a:solidFill>
+                  <a:srgbClr val="EB6834"/>
+                </a:solidFill>
+                <a:latin typeface="Arial"/>
+              </a:rPr>
+              <a:t>55</a:t>
+            </a:r>
+          </a:p>
+          <a:p>
+            <a:pPr algn="ctr">
+              <a:lnSpc>
+                <a:spcPct val="88000"/>
+              </a:lnSpc>
+            </a:pPr>
+            <a:r>
+              <a:rPr sz="1650" b="0">
+                <a:solidFill>
+                  <a:srgbClr val="4E4E4E"/>
+                </a:solidFill>
+                <a:latin typeface="Arial"/>
+              </a:rPr>
+              <a:t>F0 · formantes · MFCC+Δ+ΔΔ · CPP · pulso glotal</a:t>
+            </a:r>
+          </a:p>
+          <a:p>
+            <a:pPr algn="ctr">
+              <a:lnSpc>
+                <a:spcPct val="88000"/>
+              </a:lnSpc>
+            </a:pPr>
+            <a:r>
+              <a:rPr sz="1600" b="0">
+                <a:solidFill>
+                  <a:srgbClr val="777777"/>
+                </a:solidFill>
+                <a:latin typeface="Arial"/>
+              </a:rPr>
+              <a:t>timbre e qualidade vocal</a:t>
+            </a:r>
+          </a:p>
+        </p:txBody>
+      </p:sp>
+      <p:sp>
+        <p:nvSpPr>
+          <p:cNvPr id="114" name="Rounded Rectangle 113"/>
+          <p:cNvSpPr/>
+          <p:nvPr/>
+        </p:nvSpPr>
+        <p:spPr>
+          <a:xfrm>
+            <a:off x="6804000" y="19569600"/>
+            <a:ext cx="5112000" cy="1404000"/>
+          </a:xfrm>
+          <a:prstGeom prst="roundRect">
+            <a:avLst>
+              <a:gd name="adj" fmla="val 12000"/>
+            </a:avLst>
+          </a:prstGeom>
+          <a:solidFill>
+            <a:srgbClr val="FFFFFF"/>
+          </a:solidFill>
+          <a:ln w="15240">
+            <a:solidFill>
+              <a:srgbClr val="F3D3C3"/>
+            </a:solidFill>
+          </a:ln>
+          <a:effectLst/>
+        </p:spPr>
+        <p:style>
+          <a:lnRef idx="1">
+            <a:schemeClr val="accent1"/>
+          </a:lnRef>
+          <a:fillRef idx="3">
+            <a:schemeClr val="accent1"/>
+          </a:fillRef>
+          <a:effectRef idx="2">
+            <a:schemeClr val="accent1"/>
+          </a:effectRef>
+          <a:fontRef idx="minor">
+            <a:schemeClr val="lt1"/>
+          </a:fontRef>
+        </p:style>
+        <p:txBody>
+          <a:bodyPr rtlCol="0" anchor="ctr" wrap="square" lIns="90000" rIns="90000" tIns="28800" bIns="28800"/>
+          <a:lstStyle/>
+          <a:p>
+            <a:pPr algn="ctr">
+              <a:lnSpc>
+                <a:spcPct val="88000"/>
+              </a:lnSpc>
+            </a:pPr>
+            <a:r>
+              <a:rPr sz="2200" b="1">
+                <a:solidFill>
+                  <a:srgbClr val="1E1E1E"/>
+                </a:solidFill>
+                <a:latin typeface="Arial"/>
+              </a:rPr>
+              <a:t>Wavelet   </a:t>
+            </a:r>
+            <a:r>
+              <a:rPr sz="2900" b="1">
+                <a:solidFill>
+                  <a:srgbClr val="EB6834"/>
+                </a:solidFill>
+                <a:latin typeface="Arial"/>
+              </a:rPr>
+              <a:t>18</a:t>
+            </a:r>
+          </a:p>
+          <a:p>
+            <a:pPr algn="ctr">
+              <a:lnSpc>
+                <a:spcPct val="88000"/>
+              </a:lnSpc>
+            </a:pPr>
+            <a:r>
+              <a:rPr sz="1650" b="0">
+                <a:solidFill>
+                  <a:srgbClr val="4E4E4E"/>
+                </a:solidFill>
+                <a:latin typeface="Arial"/>
+              </a:rPr>
+              <a:t>Daubechies-4 · 6 níveis</a:t>
+            </a:r>
+          </a:p>
+          <a:p>
+            <a:pPr algn="ctr">
+              <a:lnSpc>
+                <a:spcPct val="88000"/>
+              </a:lnSpc>
+            </a:pPr>
+            <a:r>
+              <a:rPr sz="1600" b="0">
+                <a:solidFill>
+                  <a:srgbClr val="777777"/>
+                </a:solidFill>
+                <a:latin typeface="Arial"/>
+              </a:rPr>
+              <a:t>padrões multiescala</a:t>
+            </a:r>
+          </a:p>
+        </p:txBody>
+      </p:sp>
+      <p:sp>
+        <p:nvSpPr>
+          <p:cNvPr id="115" name="TextBox 114"/>
+          <p:cNvSpPr txBox="1"/>
+          <p:nvPr/>
+        </p:nvSpPr>
+        <p:spPr>
+          <a:xfrm>
+            <a:off x="6552000" y="21092400"/>
+            <a:ext cx="5616000" cy="666000"/>
+          </a:xfrm>
+          <a:prstGeom prst="rect">
+            <a:avLst/>
+          </a:prstGeom>
+          <a:noFill/>
+        </p:spPr>
+        <p:txBody>
+          <a:bodyPr wrap="square" anchor="ctr" lIns="0" rIns="0" tIns="0" bIns="0">
+            <a:spAutoFit/>
+          </a:bodyPr>
+          <a:lstStyle/>
+          <a:p>
+            <a:pPr algn="ctr">
+              <a:lnSpc>
+                <a:spcPct val="95000"/>
+              </a:lnSpc>
+            </a:pPr>
+            <a:r>
+              <a:rPr sz="1800" b="0">
+                <a:solidFill>
+                  <a:srgbClr val="777777"/>
+                </a:solidFill>
+                <a:latin typeface="Arial"/>
+              </a:rPr>
+              <a:t>+ idade e sexo do paciente</a:t>
+            </a:r>
+          </a:p>
+          <a:p>
+            <a:pPr algn="ctr">
+              <a:lnSpc>
+                <a:spcPct val="95000"/>
+              </a:lnSpc>
+            </a:pPr>
+            <a:r>
+              <a:rPr sz="3000" b="1">
+                <a:solidFill>
+                  <a:srgbClr val="1E1E1E"/>
+                </a:solidFill>
+                <a:latin typeface="Arial"/>
+              </a:rPr>
+              <a:t>251 variáveis</a:t>
+            </a:r>
+          </a:p>
+        </p:txBody>
+      </p:sp>
+      <p:sp>
+        <p:nvSpPr>
+          <p:cNvPr id="116" name="Right Arrow 115"/>
+          <p:cNvSpPr/>
+          <p:nvPr/>
+        </p:nvSpPr>
+        <p:spPr>
+          <a:xfrm>
+            <a:off x="12348000" y="18252000"/>
+            <a:ext cx="432000" cy="576000"/>
+          </a:xfrm>
+          <a:prstGeom prst="rightArrow">
+            <a:avLst>
+              <a:gd name="adj1" fmla="val 50000"/>
+              <a:gd name="adj2" fmla="val 45000"/>
+            </a:avLst>
+          </a:prstGeom>
+          <a:solidFill>
+            <a:srgbClr val="9AA3AE"/>
+          </a:solidFill>
+          <a:ln>
+            <a:noFill/>
+          </a:ln>
+          <a:effectLst/>
+        </p:spPr>
+        <p:style>
+          <a:lnRef idx="1">
+            <a:schemeClr val="accent1"/>
+          </a:lnRef>
+          <a:fillRef idx="3">
+            <a:schemeClr val="accent1"/>
+          </a:fillRef>
+          <a:effectRef idx="2">
+            <a:schemeClr val="accent1"/>
+          </a:effectRef>
+          <a:fontRef idx="minor">
+            <a:schemeClr val="lt1"/>
+          </a:fontRef>
+        </p:style>
+        <p:txBody>
+          <a:bodyPr rtlCol="0" anchor="ctr"/>
+          <a:lstStyle/>
+          <a:p>
+            <a:pPr algn="ctr"/>
+          </a:p>
+        </p:txBody>
+      </p:sp>
+      <p:sp>
+        <p:nvSpPr>
+          <p:cNvPr id="117" name="Rounded Rectangle 116"/>
+          <p:cNvSpPr/>
+          <p:nvPr/>
+        </p:nvSpPr>
+        <p:spPr>
+          <a:xfrm>
+            <a:off x="12960000" y="15300000"/>
+            <a:ext cx="8856000" cy="6480000"/>
+          </a:xfrm>
+          <a:prstGeom prst="roundRect">
+            <a:avLst>
+              <a:gd name="adj" fmla="val 16000"/>
+            </a:avLst>
+          </a:prstGeom>
+          <a:solidFill>
+            <a:srgbClr val="E9F9F2"/>
+          </a:solidFill>
+          <a:ln w="25400">
+            <a:solidFill>
+              <a:srgbClr val="1BAF7A"/>
+            </a:solidFill>
+          </a:ln>
+          <a:effectLst/>
+        </p:spPr>
+        <p:style>
+          <a:lnRef idx="1">
+            <a:schemeClr val="accent1"/>
+          </a:lnRef>
+          <a:fillRef idx="3">
+            <a:schemeClr val="accent1"/>
+          </a:fillRef>
+          <a:effectRef idx="2">
+            <a:schemeClr val="accent1"/>
+          </a:effectRef>
+          <a:fontRef idx="minor">
+            <a:schemeClr val="lt1"/>
+          </a:fontRef>
+        </p:style>
+        <p:txBody>
+          <a:bodyPr rtlCol="0" anchor="ctr" wrap="square"/>
+          <a:lstStyle/>
+          <a:p>
+            <a:pPr algn="ctr"/>
+          </a:p>
+        </p:txBody>
+      </p:sp>
+      <p:sp>
+        <p:nvSpPr>
+          <p:cNvPr id="118" name="TextBox 117"/>
+          <p:cNvSpPr txBox="1"/>
+          <p:nvPr/>
+        </p:nvSpPr>
+        <p:spPr>
+          <a:xfrm>
+            <a:off x="12960000" y="15516000"/>
+            <a:ext cx="8856000" cy="900000"/>
+          </a:xfrm>
+          <a:prstGeom prst="rect">
+            <a:avLst/>
+          </a:prstGeom>
+          <a:noFill/>
+        </p:spPr>
+        <p:txBody>
+          <a:bodyPr wrap="square" anchor="ctr" lIns="0" rIns="0" tIns="0" bIns="0">
+            <a:spAutoFit/>
+          </a:bodyPr>
+          <a:lstStyle/>
+          <a:p>
+            <a:pPr algn="ctr">
+              <a:lnSpc>
+                <a:spcPct val="92000"/>
+              </a:lnSpc>
+            </a:pPr>
+            <a:r>
+              <a:rPr sz="2900" b="1">
+                <a:solidFill>
+                  <a:srgbClr val="179669"/>
+                </a:solidFill>
+                <a:latin typeface="Arial"/>
+              </a:rPr>
+              <a:t>DUAS REDES POR VOGAL</a:t>
+            </a:r>
+          </a:p>
+          <a:p>
+            <a:pPr algn="ctr">
+              <a:lnSpc>
+                <a:spcPct val="92000"/>
+              </a:lnSpc>
+            </a:pPr>
+            <a:r>
+              <a:rPr sz="1900" b="0">
+                <a:solidFill>
+                  <a:srgbClr val="4E4E4E"/>
+                </a:solidFill>
+                <a:latin typeface="Arial"/>
+              </a:rPr>
+              <a:t>×3 vogais · pesos independentes</a:t>
+            </a:r>
+          </a:p>
+        </p:txBody>
+      </p:sp>
+      <p:sp>
+        <p:nvSpPr>
+          <p:cNvPr id="119" name="Rounded Rectangle 118"/>
+          <p:cNvSpPr/>
+          <p:nvPr/>
+        </p:nvSpPr>
+        <p:spPr>
+          <a:xfrm>
+            <a:off x="13284000" y="16487999"/>
+            <a:ext cx="3960000" cy="4284000"/>
+          </a:xfrm>
+          <a:prstGeom prst="roundRect">
+            <a:avLst>
+              <a:gd name="adj" fmla="val 10000"/>
+            </a:avLst>
+          </a:prstGeom>
+          <a:solidFill>
+            <a:srgbClr val="FFFFFF"/>
+          </a:solidFill>
+          <a:ln w="15240">
+            <a:solidFill>
+              <a:srgbClr val="C6E8DA"/>
+            </a:solidFill>
+          </a:ln>
+          <a:effectLst/>
+        </p:spPr>
+        <p:style>
+          <a:lnRef idx="1">
+            <a:schemeClr val="accent1"/>
+          </a:lnRef>
+          <a:fillRef idx="3">
+            <a:schemeClr val="accent1"/>
+          </a:fillRef>
+          <a:effectRef idx="2">
+            <a:schemeClr val="accent1"/>
+          </a:effectRef>
+          <a:fontRef idx="minor">
+            <a:schemeClr val="lt1"/>
+          </a:fontRef>
+        </p:style>
+        <p:txBody>
+          <a:bodyPr rtlCol="0" anchor="ctr" wrap="square"/>
+          <a:lstStyle/>
+          <a:p>
+            <a:pPr algn="ctr"/>
+          </a:p>
+        </p:txBody>
+      </p:sp>
+      <p:sp>
+        <p:nvSpPr>
+          <p:cNvPr id="120" name="TextBox 119"/>
+          <p:cNvSpPr txBox="1"/>
+          <p:nvPr/>
+        </p:nvSpPr>
+        <p:spPr>
+          <a:xfrm>
+            <a:off x="13284000" y="16560000"/>
+            <a:ext cx="3960000" cy="827999"/>
+          </a:xfrm>
+          <a:prstGeom prst="rect">
+            <a:avLst/>
+          </a:prstGeom>
+          <a:noFill/>
+        </p:spPr>
+        <p:txBody>
+          <a:bodyPr wrap="square" anchor="ctr" lIns="0" rIns="0" tIns="0" bIns="0">
+            <a:spAutoFit/>
+          </a:bodyPr>
+          <a:lstStyle/>
+          <a:p>
+            <a:pPr algn="ctr">
+              <a:lnSpc>
+                <a:spcPct val="90000"/>
+              </a:lnSpc>
+            </a:pPr>
+            <a:r>
+              <a:rPr sz="2400" b="1">
+                <a:solidFill>
+                  <a:srgbClr val="179669"/>
+                </a:solidFill>
+                <a:latin typeface="Arial"/>
+              </a:rPr>
+              <a:t>MESTRA</a:t>
+            </a:r>
+          </a:p>
+          <a:p>
+            <a:pPr algn="ctr">
+              <a:lnSpc>
+                <a:spcPct val="90000"/>
+              </a:lnSpc>
+            </a:pPr>
+            <a:r>
+              <a:rPr sz="1700" b="0">
+                <a:solidFill>
+                  <a:srgbClr val="4E4E4E"/>
+                </a:solidFill>
+                <a:latin typeface="Arial"/>
+              </a:rPr>
+              <a:t>patológico × saudável</a:t>
+            </a:r>
+          </a:p>
+        </p:txBody>
+      </p:sp>
+      <p:sp>
+        <p:nvSpPr>
+          <p:cNvPr id="121" name="Rounded Rectangle 120"/>
+          <p:cNvSpPr/>
+          <p:nvPr/>
+        </p:nvSpPr>
+        <p:spPr>
+          <a:xfrm>
+            <a:off x="13644000" y="17460000"/>
+            <a:ext cx="3240000" cy="540000"/>
+          </a:xfrm>
+          <a:prstGeom prst="roundRect">
+            <a:avLst>
+              <a:gd name="adj" fmla="val 24000"/>
+            </a:avLst>
+          </a:prstGeom>
+          <a:solidFill>
+            <a:srgbClr val="FFFFFF"/>
+          </a:solidFill>
+          <a:ln w="15240">
+            <a:solidFill>
+              <a:srgbClr val="C6E8DA"/>
+            </a:solidFill>
+          </a:ln>
+          <a:effectLst/>
+        </p:spPr>
+        <p:style>
+          <a:lnRef idx="1">
+            <a:schemeClr val="accent1"/>
+          </a:lnRef>
+          <a:fillRef idx="3">
+            <a:schemeClr val="accent1"/>
+          </a:fillRef>
+          <a:effectRef idx="2">
+            <a:schemeClr val="accent1"/>
+          </a:effectRef>
+          <a:fontRef idx="minor">
+            <a:schemeClr val="lt1"/>
+          </a:fontRef>
+        </p:style>
+        <p:txBody>
+          <a:bodyPr rtlCol="0" anchor="ctr" wrap="square" lIns="36000" rIns="36000" tIns="7200" bIns="7200"/>
+          <a:lstStyle/>
+          <a:p>
+            <a:pPr algn="ctr">
+              <a:lnSpc>
+                <a:spcPct val="92000"/>
+              </a:lnSpc>
+            </a:pPr>
+            <a:r>
+              <a:rPr sz="1700" b="1">
+                <a:solidFill>
+                  <a:srgbClr val="4E4E4E"/>
+                </a:solidFill>
+                <a:latin typeface="Arial"/>
+              </a:rPr>
+              <a:t>85 características</a:t>
+            </a:r>
+          </a:p>
+        </p:txBody>
+      </p:sp>
+      <p:sp>
+        <p:nvSpPr>
+          <p:cNvPr id="122" name="TextBox 121"/>
+          <p:cNvSpPr txBox="1"/>
+          <p:nvPr/>
+        </p:nvSpPr>
+        <p:spPr>
+          <a:xfrm>
+            <a:off x="13644000" y="17899200"/>
+            <a:ext cx="3240000" cy="306000"/>
+          </a:xfrm>
+          <a:prstGeom prst="rect">
+            <a:avLst/>
+          </a:prstGeom>
+          <a:noFill/>
+        </p:spPr>
+        <p:txBody>
+          <a:bodyPr wrap="square" anchor="ctr" lIns="0" rIns="0" tIns="0" bIns="0">
+            <a:spAutoFit/>
+          </a:bodyPr>
+          <a:lstStyle/>
+          <a:p>
+            <a:pPr algn="ctr">
+              <a:lnSpc>
+                <a:spcPct val="92000"/>
+              </a:lnSpc>
+            </a:pPr>
+            <a:r>
+              <a:rPr sz="1600" b="1">
+                <a:solidFill>
+                  <a:srgbClr val="777777"/>
+                </a:solidFill>
+                <a:latin typeface="Arial"/>
+              </a:rPr>
+              <a:t>↓</a:t>
+            </a:r>
+          </a:p>
+        </p:txBody>
+      </p:sp>
+      <p:sp>
+        <p:nvSpPr>
+          <p:cNvPr id="123" name="Rounded Rectangle 122"/>
+          <p:cNvSpPr/>
+          <p:nvPr/>
+        </p:nvSpPr>
+        <p:spPr>
+          <a:xfrm>
+            <a:off x="13644000" y="18205200"/>
+            <a:ext cx="3240000" cy="540000"/>
+          </a:xfrm>
+          <a:prstGeom prst="roundRect">
+            <a:avLst>
+              <a:gd name="adj" fmla="val 24000"/>
+            </a:avLst>
+          </a:prstGeom>
+          <a:solidFill>
+            <a:srgbClr val="1BAF7A"/>
+          </a:solidFill>
+          <a:ln w="15240">
+            <a:solidFill>
+              <a:srgbClr val="1BAF7A"/>
+            </a:solidFill>
+          </a:ln>
+          <a:effectLst/>
+        </p:spPr>
+        <p:style>
+          <a:lnRef idx="1">
+            <a:schemeClr val="accent1"/>
+          </a:lnRef>
+          <a:fillRef idx="3">
+            <a:schemeClr val="accent1"/>
+          </a:fillRef>
+          <a:effectRef idx="2">
+            <a:schemeClr val="accent1"/>
+          </a:effectRef>
+          <a:fontRef idx="minor">
+            <a:schemeClr val="lt1"/>
+          </a:fontRef>
+        </p:style>
+        <p:txBody>
+          <a:bodyPr rtlCol="0" anchor="ctr" wrap="square" lIns="36000" rIns="36000" tIns="7200" bIns="7200"/>
+          <a:lstStyle/>
+          <a:p>
+            <a:pPr algn="ctr">
+              <a:lnSpc>
+                <a:spcPct val="92000"/>
+              </a:lnSpc>
+            </a:pPr>
+            <a:r>
+              <a:rPr sz="1700" b="1">
+                <a:solidFill>
+                  <a:srgbClr val="FFFFFF"/>
+                </a:solidFill>
+                <a:latin typeface="Arial"/>
+              </a:rPr>
+              <a:t>Dense 128 + LeakyReLU</a:t>
+            </a:r>
+          </a:p>
+        </p:txBody>
+      </p:sp>
+      <p:sp>
+        <p:nvSpPr>
+          <p:cNvPr id="124" name="TextBox 123"/>
+          <p:cNvSpPr txBox="1"/>
+          <p:nvPr/>
+        </p:nvSpPr>
+        <p:spPr>
+          <a:xfrm>
+            <a:off x="13644000" y="18644400"/>
+            <a:ext cx="3240000" cy="306000"/>
+          </a:xfrm>
+          <a:prstGeom prst="rect">
+            <a:avLst/>
+          </a:prstGeom>
+          <a:noFill/>
+        </p:spPr>
+        <p:txBody>
+          <a:bodyPr wrap="square" anchor="ctr" lIns="0" rIns="0" tIns="0" bIns="0">
+            <a:spAutoFit/>
+          </a:bodyPr>
+          <a:lstStyle/>
+          <a:p>
+            <a:pPr algn="ctr">
+              <a:lnSpc>
+                <a:spcPct val="92000"/>
+              </a:lnSpc>
+            </a:pPr>
+            <a:r>
+              <a:rPr sz="1600" b="1">
+                <a:solidFill>
+                  <a:srgbClr val="777777"/>
+                </a:solidFill>
+                <a:latin typeface="Arial"/>
+              </a:rPr>
+              <a:t>↓</a:t>
+            </a:r>
+          </a:p>
+        </p:txBody>
+      </p:sp>
+      <p:sp>
+        <p:nvSpPr>
+          <p:cNvPr id="125" name="Rounded Rectangle 124"/>
+          <p:cNvSpPr/>
+          <p:nvPr/>
+        </p:nvSpPr>
+        <p:spPr>
+          <a:xfrm>
+            <a:off x="13644000" y="18950400"/>
+            <a:ext cx="3240000" cy="540000"/>
+          </a:xfrm>
+          <a:prstGeom prst="roundRect">
+            <a:avLst>
+              <a:gd name="adj" fmla="val 24000"/>
+            </a:avLst>
+          </a:prstGeom>
+          <a:solidFill>
+            <a:srgbClr val="1BAF7A"/>
+          </a:solidFill>
+          <a:ln w="15240">
+            <a:solidFill>
+              <a:srgbClr val="1BAF7A"/>
+            </a:solidFill>
+          </a:ln>
+          <a:effectLst/>
+        </p:spPr>
+        <p:style>
+          <a:lnRef idx="1">
+            <a:schemeClr val="accent1"/>
+          </a:lnRef>
+          <a:fillRef idx="3">
+            <a:schemeClr val="accent1"/>
+          </a:fillRef>
+          <a:effectRef idx="2">
+            <a:schemeClr val="accent1"/>
+          </a:effectRef>
+          <a:fontRef idx="minor">
+            <a:schemeClr val="lt1"/>
+          </a:fontRef>
+        </p:style>
+        <p:txBody>
+          <a:bodyPr rtlCol="0" anchor="ctr" wrap="square" lIns="36000" rIns="36000" tIns="7200" bIns="7200"/>
+          <a:lstStyle/>
+          <a:p>
+            <a:pPr algn="ctr">
+              <a:lnSpc>
+                <a:spcPct val="92000"/>
+              </a:lnSpc>
+            </a:pPr>
+            <a:r>
+              <a:rPr sz="1700" b="1">
+                <a:solidFill>
+                  <a:srgbClr val="FFFFFF"/>
+                </a:solidFill>
+                <a:latin typeface="Arial"/>
+              </a:rPr>
+              <a:t>Dense 64 + LeakyReLU</a:t>
+            </a:r>
+          </a:p>
+        </p:txBody>
+      </p:sp>
+      <p:sp>
+        <p:nvSpPr>
+          <p:cNvPr id="126" name="TextBox 125"/>
+          <p:cNvSpPr txBox="1"/>
+          <p:nvPr/>
+        </p:nvSpPr>
+        <p:spPr>
+          <a:xfrm>
+            <a:off x="13644000" y="19389600"/>
+            <a:ext cx="3240000" cy="306000"/>
+          </a:xfrm>
+          <a:prstGeom prst="rect">
+            <a:avLst/>
+          </a:prstGeom>
+          <a:noFill/>
+        </p:spPr>
+        <p:txBody>
+          <a:bodyPr wrap="square" anchor="ctr" lIns="0" rIns="0" tIns="0" bIns="0">
+            <a:spAutoFit/>
+          </a:bodyPr>
+          <a:lstStyle/>
+          <a:p>
+            <a:pPr algn="ctr">
+              <a:lnSpc>
+                <a:spcPct val="92000"/>
+              </a:lnSpc>
+            </a:pPr>
+            <a:r>
+              <a:rPr sz="1600" b="1">
+                <a:solidFill>
+                  <a:srgbClr val="777777"/>
+                </a:solidFill>
+                <a:latin typeface="Arial"/>
+              </a:rPr>
+              <a:t>↓</a:t>
+            </a:r>
+          </a:p>
+        </p:txBody>
+      </p:sp>
+      <p:sp>
+        <p:nvSpPr>
+          <p:cNvPr id="127" name="Rounded Rectangle 126"/>
+          <p:cNvSpPr/>
+          <p:nvPr/>
+        </p:nvSpPr>
+        <p:spPr>
+          <a:xfrm>
+            <a:off x="13644000" y="19695600"/>
+            <a:ext cx="3240000" cy="540000"/>
+          </a:xfrm>
+          <a:prstGeom prst="roundRect">
+            <a:avLst>
+              <a:gd name="adj" fmla="val 24000"/>
+            </a:avLst>
+          </a:prstGeom>
+          <a:solidFill>
+            <a:srgbClr val="E8F1FC"/>
+          </a:solidFill>
+          <a:ln w="15240">
+            <a:solidFill>
+              <a:srgbClr val="2A78D6"/>
+            </a:solidFill>
+          </a:ln>
+          <a:effectLst/>
+        </p:spPr>
+        <p:style>
+          <a:lnRef idx="1">
+            <a:schemeClr val="accent1"/>
+          </a:lnRef>
+          <a:fillRef idx="3">
+            <a:schemeClr val="accent1"/>
+          </a:fillRef>
+          <a:effectRef idx="2">
+            <a:schemeClr val="accent1"/>
+          </a:effectRef>
+          <a:fontRef idx="minor">
+            <a:schemeClr val="lt1"/>
+          </a:fontRef>
+        </p:style>
+        <p:txBody>
+          <a:bodyPr rtlCol="0" anchor="ctr" wrap="square" lIns="36000" rIns="36000" tIns="7200" bIns="7200"/>
+          <a:lstStyle/>
+          <a:p>
+            <a:pPr algn="ctr">
+              <a:lnSpc>
+                <a:spcPct val="92000"/>
+              </a:lnSpc>
+            </a:pPr>
+            <a:r>
+              <a:rPr sz="1700" b="1">
+                <a:solidFill>
+                  <a:srgbClr val="2A78D6"/>
+                </a:solidFill>
+                <a:latin typeface="Arial"/>
+              </a:rPr>
+              <a:t>normal | patológico</a:t>
+            </a:r>
+          </a:p>
+        </p:txBody>
+      </p:sp>
+      <p:sp>
+        <p:nvSpPr>
+          <p:cNvPr id="128" name="TextBox 127"/>
+          <p:cNvSpPr txBox="1"/>
+          <p:nvPr/>
+        </p:nvSpPr>
+        <p:spPr>
+          <a:xfrm>
+            <a:off x="13284000" y="20304000"/>
+            <a:ext cx="3960000" cy="432000"/>
+          </a:xfrm>
+          <a:prstGeom prst="rect">
+            <a:avLst/>
+          </a:prstGeom>
+          <a:noFill/>
+        </p:spPr>
+        <p:txBody>
+          <a:bodyPr wrap="square" anchor="ctr" lIns="0" rIns="0" tIns="0" bIns="0">
+            <a:spAutoFit/>
+          </a:bodyPr>
+          <a:lstStyle/>
+          <a:p>
+            <a:pPr algn="ctr">
+              <a:lnSpc>
+                <a:spcPct val="92000"/>
+              </a:lnSpc>
+            </a:pPr>
+            <a:r>
+              <a:rPr sz="1650" b="0">
+                <a:solidFill>
+                  <a:srgbClr val="777777"/>
+                </a:solidFill>
+                <a:latin typeface="Arial"/>
+              </a:rPr>
+              <a:t>dropout 0,5 / 0,4</a:t>
+            </a:r>
+          </a:p>
+        </p:txBody>
+      </p:sp>
+      <p:sp>
+        <p:nvSpPr>
+          <p:cNvPr id="129" name="Rounded Rectangle 128"/>
+          <p:cNvSpPr/>
+          <p:nvPr/>
+        </p:nvSpPr>
+        <p:spPr>
+          <a:xfrm>
+            <a:off x="17532000" y="16487999"/>
+            <a:ext cx="3960000" cy="4284000"/>
+          </a:xfrm>
+          <a:prstGeom prst="roundRect">
+            <a:avLst>
+              <a:gd name="adj" fmla="val 10000"/>
+            </a:avLst>
+          </a:prstGeom>
+          <a:solidFill>
+            <a:srgbClr val="FFFFFF"/>
+          </a:solidFill>
+          <a:ln w="15240">
+            <a:solidFill>
+              <a:srgbClr val="C6E8DA"/>
+            </a:solidFill>
+          </a:ln>
+          <a:effectLst/>
+        </p:spPr>
+        <p:style>
+          <a:lnRef idx="1">
+            <a:schemeClr val="accent1"/>
+          </a:lnRef>
+          <a:fillRef idx="3">
+            <a:schemeClr val="accent1"/>
+          </a:fillRef>
+          <a:effectRef idx="2">
+            <a:schemeClr val="accent1"/>
+          </a:effectRef>
+          <a:fontRef idx="minor">
+            <a:schemeClr val="lt1"/>
+          </a:fontRef>
+        </p:style>
+        <p:txBody>
+          <a:bodyPr rtlCol="0" anchor="ctr" wrap="square"/>
+          <a:lstStyle/>
+          <a:p>
+            <a:pPr algn="ctr"/>
+          </a:p>
+        </p:txBody>
+      </p:sp>
+      <p:sp>
+        <p:nvSpPr>
+          <p:cNvPr id="130" name="TextBox 129"/>
+          <p:cNvSpPr txBox="1"/>
+          <p:nvPr/>
+        </p:nvSpPr>
+        <p:spPr>
+          <a:xfrm>
+            <a:off x="17532000" y="16560000"/>
+            <a:ext cx="3960000" cy="827999"/>
+          </a:xfrm>
+          <a:prstGeom prst="rect">
+            <a:avLst/>
+          </a:prstGeom>
+          <a:noFill/>
+        </p:spPr>
+        <p:txBody>
+          <a:bodyPr wrap="square" anchor="ctr" lIns="0" rIns="0" tIns="0" bIns="0">
+            <a:spAutoFit/>
+          </a:bodyPr>
+          <a:lstStyle/>
+          <a:p>
+            <a:pPr algn="ctr">
+              <a:lnSpc>
+                <a:spcPct val="90000"/>
+              </a:lnSpc>
+            </a:pPr>
+            <a:r>
+              <a:rPr sz="2400" b="1">
+                <a:solidFill>
+                  <a:srgbClr val="179669"/>
+                </a:solidFill>
+                <a:latin typeface="Arial"/>
+              </a:rPr>
+              <a:t>ESPECIALISTA</a:t>
+            </a:r>
+          </a:p>
+          <a:p>
+            <a:pPr algn="ctr">
+              <a:lnSpc>
+                <a:spcPct val="90000"/>
+              </a:lnSpc>
+            </a:pPr>
+            <a:r>
+              <a:rPr sz="1700" b="0">
+                <a:solidFill>
+                  <a:srgbClr val="4E4E4E"/>
+                </a:solidFill>
+                <a:latin typeface="Arial"/>
+              </a:rPr>
+              <a:t>qual patologia?</a:t>
+            </a:r>
+          </a:p>
+        </p:txBody>
+      </p:sp>
+      <p:sp>
+        <p:nvSpPr>
+          <p:cNvPr id="131" name="Rounded Rectangle 130"/>
+          <p:cNvSpPr/>
+          <p:nvPr/>
+        </p:nvSpPr>
+        <p:spPr>
+          <a:xfrm>
+            <a:off x="17892000" y="17460000"/>
+            <a:ext cx="3240000" cy="540000"/>
+          </a:xfrm>
+          <a:prstGeom prst="roundRect">
+            <a:avLst>
+              <a:gd name="adj" fmla="val 24000"/>
+            </a:avLst>
+          </a:prstGeom>
+          <a:solidFill>
+            <a:srgbClr val="FFFFFF"/>
+          </a:solidFill>
+          <a:ln w="15240">
+            <a:solidFill>
+              <a:srgbClr val="C6E8DA"/>
+            </a:solidFill>
+          </a:ln>
+          <a:effectLst/>
+        </p:spPr>
+        <p:style>
+          <a:lnRef idx="1">
+            <a:schemeClr val="accent1"/>
+          </a:lnRef>
+          <a:fillRef idx="3">
+            <a:schemeClr val="accent1"/>
+          </a:fillRef>
+          <a:effectRef idx="2">
+            <a:schemeClr val="accent1"/>
+          </a:effectRef>
+          <a:fontRef idx="minor">
+            <a:schemeClr val="lt1"/>
+          </a:fontRef>
+        </p:style>
+        <p:txBody>
+          <a:bodyPr rtlCol="0" anchor="ctr" wrap="square" lIns="36000" rIns="36000" tIns="7200" bIns="7200"/>
+          <a:lstStyle/>
+          <a:p>
+            <a:pPr algn="ctr">
+              <a:lnSpc>
+                <a:spcPct val="92000"/>
+              </a:lnSpc>
+            </a:pPr>
+            <a:r>
+              <a:rPr sz="1700" b="1">
+                <a:solidFill>
+                  <a:srgbClr val="4E4E4E"/>
+                </a:solidFill>
+                <a:latin typeface="Arial"/>
+              </a:rPr>
+              <a:t>85 características</a:t>
+            </a:r>
+          </a:p>
+        </p:txBody>
+      </p:sp>
+      <p:sp>
+        <p:nvSpPr>
+          <p:cNvPr id="132" name="TextBox 131"/>
+          <p:cNvSpPr txBox="1"/>
+          <p:nvPr/>
+        </p:nvSpPr>
+        <p:spPr>
+          <a:xfrm>
+            <a:off x="17892000" y="17899200"/>
+            <a:ext cx="3240000" cy="306000"/>
+          </a:xfrm>
+          <a:prstGeom prst="rect">
+            <a:avLst/>
+          </a:prstGeom>
+          <a:noFill/>
+        </p:spPr>
+        <p:txBody>
+          <a:bodyPr wrap="square" anchor="ctr" lIns="0" rIns="0" tIns="0" bIns="0">
+            <a:spAutoFit/>
+          </a:bodyPr>
+          <a:lstStyle/>
+          <a:p>
+            <a:pPr algn="ctr">
+              <a:lnSpc>
+                <a:spcPct val="92000"/>
+              </a:lnSpc>
+            </a:pPr>
+            <a:r>
+              <a:rPr sz="1600" b="1">
+                <a:solidFill>
+                  <a:srgbClr val="777777"/>
+                </a:solidFill>
+                <a:latin typeface="Arial"/>
+              </a:rPr>
+              <a:t>↓</a:t>
+            </a:r>
+          </a:p>
+        </p:txBody>
+      </p:sp>
+      <p:sp>
+        <p:nvSpPr>
+          <p:cNvPr id="133" name="Rounded Rectangle 132"/>
+          <p:cNvSpPr/>
+          <p:nvPr/>
+        </p:nvSpPr>
+        <p:spPr>
+          <a:xfrm>
+            <a:off x="17892000" y="18205200"/>
+            <a:ext cx="3240000" cy="540000"/>
+          </a:xfrm>
+          <a:prstGeom prst="roundRect">
+            <a:avLst>
+              <a:gd name="adj" fmla="val 24000"/>
+            </a:avLst>
+          </a:prstGeom>
+          <a:solidFill>
+            <a:srgbClr val="1BAF7A"/>
+          </a:solidFill>
+          <a:ln w="15240">
+            <a:solidFill>
+              <a:srgbClr val="1BAF7A"/>
+            </a:solidFill>
+          </a:ln>
+          <a:effectLst/>
+        </p:spPr>
+        <p:style>
+          <a:lnRef idx="1">
+            <a:schemeClr val="accent1"/>
+          </a:lnRef>
+          <a:fillRef idx="3">
+            <a:schemeClr val="accent1"/>
+          </a:fillRef>
+          <a:effectRef idx="2">
+            <a:schemeClr val="accent1"/>
+          </a:effectRef>
+          <a:fontRef idx="minor">
+            <a:schemeClr val="lt1"/>
+          </a:fontRef>
+        </p:style>
+        <p:txBody>
+          <a:bodyPr rtlCol="0" anchor="ctr" wrap="square" lIns="36000" rIns="36000" tIns="7200" bIns="7200"/>
+          <a:lstStyle/>
+          <a:p>
+            <a:pPr algn="ctr">
+              <a:lnSpc>
+                <a:spcPct val="92000"/>
+              </a:lnSpc>
+            </a:pPr>
+            <a:r>
+              <a:rPr sz="1700" b="1">
+                <a:solidFill>
+                  <a:srgbClr val="FFFFFF"/>
+                </a:solidFill>
+                <a:latin typeface="Arial"/>
+              </a:rPr>
+              <a:t>Dense 128 + LeakyReLU</a:t>
+            </a:r>
+          </a:p>
+        </p:txBody>
+      </p:sp>
+      <p:sp>
+        <p:nvSpPr>
+          <p:cNvPr id="134" name="TextBox 133"/>
+          <p:cNvSpPr txBox="1"/>
+          <p:nvPr/>
+        </p:nvSpPr>
+        <p:spPr>
+          <a:xfrm>
+            <a:off x="17892000" y="18644400"/>
+            <a:ext cx="3240000" cy="306000"/>
+          </a:xfrm>
+          <a:prstGeom prst="rect">
+            <a:avLst/>
+          </a:prstGeom>
+          <a:noFill/>
+        </p:spPr>
+        <p:txBody>
+          <a:bodyPr wrap="square" anchor="ctr" lIns="0" rIns="0" tIns="0" bIns="0">
+            <a:spAutoFit/>
+          </a:bodyPr>
+          <a:lstStyle/>
+          <a:p>
+            <a:pPr algn="ctr">
+              <a:lnSpc>
+                <a:spcPct val="92000"/>
+              </a:lnSpc>
+            </a:pPr>
+            <a:r>
+              <a:rPr sz="1600" b="1">
+                <a:solidFill>
+                  <a:srgbClr val="777777"/>
+                </a:solidFill>
+                <a:latin typeface="Arial"/>
+              </a:rPr>
+              <a:t>↓</a:t>
+            </a:r>
+          </a:p>
+        </p:txBody>
+      </p:sp>
+      <p:sp>
+        <p:nvSpPr>
+          <p:cNvPr id="135" name="Rounded Rectangle 134"/>
+          <p:cNvSpPr/>
+          <p:nvPr/>
+        </p:nvSpPr>
+        <p:spPr>
+          <a:xfrm>
+            <a:off x="17892000" y="18950400"/>
+            <a:ext cx="3240000" cy="540000"/>
+          </a:xfrm>
+          <a:prstGeom prst="roundRect">
+            <a:avLst>
+              <a:gd name="adj" fmla="val 24000"/>
+            </a:avLst>
+          </a:prstGeom>
+          <a:solidFill>
+            <a:srgbClr val="1BAF7A"/>
+          </a:solidFill>
+          <a:ln w="15240">
+            <a:solidFill>
+              <a:srgbClr val="1BAF7A"/>
+            </a:solidFill>
+          </a:ln>
+          <a:effectLst/>
+        </p:spPr>
+        <p:style>
+          <a:lnRef idx="1">
+            <a:schemeClr val="accent1"/>
+          </a:lnRef>
+          <a:fillRef idx="3">
+            <a:schemeClr val="accent1"/>
+          </a:fillRef>
+          <a:effectRef idx="2">
+            <a:schemeClr val="accent1"/>
+          </a:effectRef>
+          <a:fontRef idx="minor">
+            <a:schemeClr val="lt1"/>
+          </a:fontRef>
+        </p:style>
+        <p:txBody>
+          <a:bodyPr rtlCol="0" anchor="ctr" wrap="square" lIns="36000" rIns="36000" tIns="7200" bIns="7200"/>
+          <a:lstStyle/>
+          <a:p>
+            <a:pPr algn="ctr">
+              <a:lnSpc>
+                <a:spcPct val="92000"/>
+              </a:lnSpc>
+            </a:pPr>
+            <a:r>
+              <a:rPr sz="1700" b="1">
+                <a:solidFill>
+                  <a:srgbClr val="FFFFFF"/>
+                </a:solidFill>
+                <a:latin typeface="Arial"/>
+              </a:rPr>
+              <a:t>Dense 64 + LeakyReLU</a:t>
+            </a:r>
+          </a:p>
+        </p:txBody>
+      </p:sp>
+      <p:sp>
+        <p:nvSpPr>
+          <p:cNvPr id="136" name="TextBox 135"/>
+          <p:cNvSpPr txBox="1"/>
+          <p:nvPr/>
+        </p:nvSpPr>
+        <p:spPr>
+          <a:xfrm>
+            <a:off x="17892000" y="19389600"/>
+            <a:ext cx="3240000" cy="306000"/>
+          </a:xfrm>
+          <a:prstGeom prst="rect">
+            <a:avLst/>
+          </a:prstGeom>
+          <a:noFill/>
+        </p:spPr>
+        <p:txBody>
+          <a:bodyPr wrap="square" anchor="ctr" lIns="0" rIns="0" tIns="0" bIns="0">
+            <a:spAutoFit/>
+          </a:bodyPr>
+          <a:lstStyle/>
+          <a:p>
+            <a:pPr algn="ctr">
+              <a:lnSpc>
+                <a:spcPct val="92000"/>
+              </a:lnSpc>
+            </a:pPr>
+            <a:r>
+              <a:rPr sz="1600" b="1">
+                <a:solidFill>
+                  <a:srgbClr val="777777"/>
+                </a:solidFill>
+                <a:latin typeface="Arial"/>
+              </a:rPr>
+              <a:t>↓</a:t>
+            </a:r>
+          </a:p>
+        </p:txBody>
+      </p:sp>
+      <p:sp>
+        <p:nvSpPr>
+          <p:cNvPr id="137" name="Rounded Rectangle 136"/>
+          <p:cNvSpPr/>
+          <p:nvPr/>
+        </p:nvSpPr>
+        <p:spPr>
+          <a:xfrm>
+            <a:off x="17892000" y="19695600"/>
+            <a:ext cx="3240000" cy="540000"/>
+          </a:xfrm>
+          <a:prstGeom prst="roundRect">
+            <a:avLst>
+              <a:gd name="adj" fmla="val 24000"/>
+            </a:avLst>
+          </a:prstGeom>
+          <a:solidFill>
+            <a:srgbClr val="FDEEF4"/>
+          </a:solidFill>
+          <a:ln w="15240">
+            <a:solidFill>
+              <a:srgbClr val="B8446E"/>
+            </a:solidFill>
+          </a:ln>
+          <a:effectLst/>
+        </p:spPr>
+        <p:style>
+          <a:lnRef idx="1">
+            <a:schemeClr val="accent1"/>
+          </a:lnRef>
+          <a:fillRef idx="3">
+            <a:schemeClr val="accent1"/>
+          </a:fillRef>
+          <a:effectRef idx="2">
+            <a:schemeClr val="accent1"/>
+          </a:effectRef>
+          <a:fontRef idx="minor">
+            <a:schemeClr val="lt1"/>
+          </a:fontRef>
+        </p:style>
+        <p:txBody>
+          <a:bodyPr rtlCol="0" anchor="ctr" wrap="square" lIns="36000" rIns="36000" tIns="7200" bIns="7200"/>
+          <a:lstStyle/>
+          <a:p>
+            <a:pPr algn="ctr">
+              <a:lnSpc>
+                <a:spcPct val="92000"/>
+              </a:lnSpc>
+            </a:pPr>
+            <a:r>
+              <a:rPr sz="1700" b="1">
+                <a:solidFill>
+                  <a:srgbClr val="B8446E"/>
+                </a:solidFill>
+                <a:latin typeface="Arial"/>
+              </a:rPr>
+              <a:t>4 patologias</a:t>
+            </a:r>
+          </a:p>
+        </p:txBody>
+      </p:sp>
+      <p:sp>
+        <p:nvSpPr>
+          <p:cNvPr id="138" name="TextBox 137"/>
+          <p:cNvSpPr txBox="1"/>
+          <p:nvPr/>
+        </p:nvSpPr>
+        <p:spPr>
+          <a:xfrm>
+            <a:off x="17532000" y="20304000"/>
+            <a:ext cx="3960000" cy="432000"/>
+          </a:xfrm>
+          <a:prstGeom prst="rect">
+            <a:avLst/>
+          </a:prstGeom>
+          <a:noFill/>
+        </p:spPr>
+        <p:txBody>
+          <a:bodyPr wrap="square" anchor="ctr" lIns="0" rIns="0" tIns="0" bIns="0">
+            <a:spAutoFit/>
+          </a:bodyPr>
+          <a:lstStyle/>
+          <a:p>
+            <a:pPr algn="ctr">
+              <a:lnSpc>
+                <a:spcPct val="92000"/>
+              </a:lnSpc>
+            </a:pPr>
+            <a:r>
+              <a:rPr sz="1650" b="0">
+                <a:solidFill>
+                  <a:srgbClr val="777777"/>
+                </a:solidFill>
+                <a:latin typeface="Arial"/>
+              </a:rPr>
+              <a:t>dropout 0,5 / 0,4</a:t>
+            </a:r>
+          </a:p>
+        </p:txBody>
+      </p:sp>
+      <p:sp>
+        <p:nvSpPr>
+          <p:cNvPr id="139" name="Rounded Rectangle 138"/>
+          <p:cNvSpPr/>
+          <p:nvPr/>
+        </p:nvSpPr>
+        <p:spPr>
+          <a:xfrm>
+            <a:off x="13284000" y="20916000"/>
+            <a:ext cx="8208000" cy="683999"/>
+          </a:xfrm>
+          <a:prstGeom prst="roundRect">
+            <a:avLst>
+              <a:gd name="adj" fmla="val 10000"/>
+            </a:avLst>
+          </a:prstGeom>
+          <a:solidFill>
+            <a:srgbClr val="FFFFFF"/>
+          </a:solidFill>
+          <a:ln w="15240">
+            <a:solidFill>
+              <a:srgbClr val="C6E8DA"/>
+            </a:solidFill>
+          </a:ln>
+          <a:effectLst/>
+        </p:spPr>
+        <p:style>
+          <a:lnRef idx="1">
+            <a:schemeClr val="accent1"/>
+          </a:lnRef>
+          <a:fillRef idx="3">
+            <a:schemeClr val="accent1"/>
+          </a:fillRef>
+          <a:effectRef idx="2">
+            <a:schemeClr val="accent1"/>
+          </a:effectRef>
+          <a:fontRef idx="minor">
+            <a:schemeClr val="lt1"/>
+          </a:fontRef>
+        </p:style>
+        <p:txBody>
+          <a:bodyPr rtlCol="0" anchor="ctr" wrap="square" lIns="108000" rIns="108000" tIns="36000" bIns="36000"/>
+          <a:lstStyle/>
+          <a:p>
+            <a:pPr algn="ctr">
+              <a:lnSpc>
+                <a:spcPct val="90000"/>
+              </a:lnSpc>
+            </a:pPr>
+            <a:r>
+              <a:rPr sz="1900" b="1">
+                <a:solidFill>
+                  <a:srgbClr val="1E1E1E"/>
+                </a:solidFill>
+                <a:latin typeface="Arial"/>
+              </a:rPr>
+              <a:t>Adam</a:t>
+            </a:r>
+            <a:r>
+              <a:rPr sz="1700" b="0">
+                <a:solidFill>
+                  <a:srgbClr val="4E4E4E"/>
+                </a:solidFill>
+                <a:latin typeface="Arial"/>
+              </a:rPr>
+              <a:t> · decaimento cosseno · </a:t>
+            </a:r>
+            <a:r>
+              <a:rPr sz="1900" b="1">
+                <a:solidFill>
+                  <a:srgbClr val="1E1E1E"/>
+                </a:solidFill>
+                <a:latin typeface="Arial"/>
+              </a:rPr>
+              <a:t>parada por Macro-F1</a:t>
+            </a:r>
+          </a:p>
+          <a:p>
+            <a:pPr algn="ctr">
+              <a:lnSpc>
+                <a:spcPct val="90000"/>
+              </a:lnSpc>
+            </a:pPr>
+            <a:r>
+              <a:rPr sz="1700" b="0">
+                <a:solidFill>
+                  <a:srgbClr val="4E4E4E"/>
+                </a:solidFill>
+                <a:latin typeface="Arial"/>
+              </a:rPr>
+              <a:t>treino balanceado com augmentação de áudio + Borderline-SMOTE1</a:t>
+            </a:r>
+          </a:p>
+          <a:p>
+            <a:pPr algn="ctr">
+              <a:lnSpc>
+                <a:spcPct val="90000"/>
+              </a:lnSpc>
+            </a:pPr>
+            <a:r>
+              <a:rPr sz="1600" b="0">
+                <a:solidFill>
+                  <a:srgbClr val="777777"/>
+                </a:solidFill>
+                <a:latin typeface="Arial"/>
+              </a:rPr>
+              <a:t>z-score ajustado só nas amostras originais de treino</a:t>
+            </a:r>
+          </a:p>
+        </p:txBody>
+      </p:sp>
+      <p:sp>
+        <p:nvSpPr>
+          <p:cNvPr id="140" name="Right Arrow 139"/>
+          <p:cNvSpPr/>
+          <p:nvPr/>
+        </p:nvSpPr>
+        <p:spPr>
+          <a:xfrm>
+            <a:off x="21996000" y="18252000"/>
+            <a:ext cx="432000" cy="576000"/>
+          </a:xfrm>
+          <a:prstGeom prst="rightArrow">
+            <a:avLst>
+              <a:gd name="adj1" fmla="val 50000"/>
+              <a:gd name="adj2" fmla="val 45000"/>
+            </a:avLst>
+          </a:prstGeom>
+          <a:solidFill>
+            <a:srgbClr val="9AA3AE"/>
+          </a:solidFill>
+          <a:ln>
+            <a:noFill/>
+          </a:ln>
+          <a:effectLst/>
+        </p:spPr>
+        <p:style>
+          <a:lnRef idx="1">
+            <a:schemeClr val="accent1"/>
+          </a:lnRef>
+          <a:fillRef idx="3">
+            <a:schemeClr val="accent1"/>
+          </a:fillRef>
+          <a:effectRef idx="2">
+            <a:schemeClr val="accent1"/>
+          </a:effectRef>
+          <a:fontRef idx="minor">
+            <a:schemeClr val="lt1"/>
+          </a:fontRef>
+        </p:style>
+        <p:txBody>
+          <a:bodyPr rtlCol="0" anchor="ctr"/>
+          <a:lstStyle/>
+          <a:p>
+            <a:pPr algn="ctr"/>
+          </a:p>
+        </p:txBody>
+      </p:sp>
+      <p:sp>
+        <p:nvSpPr>
+          <p:cNvPr id="141" name="Rounded Rectangle 140"/>
+          <p:cNvSpPr/>
+          <p:nvPr/>
+        </p:nvSpPr>
+        <p:spPr>
+          <a:xfrm>
+            <a:off x="22608000" y="15300000"/>
+            <a:ext cx="4104000" cy="6480000"/>
+          </a:xfrm>
+          <a:prstGeom prst="roundRect">
+            <a:avLst>
+              <a:gd name="adj" fmla="val 16000"/>
+            </a:avLst>
+          </a:prstGeom>
+          <a:solidFill>
+            <a:srgbClr val="FDF6E6"/>
+          </a:solidFill>
+          <a:ln w="25400">
+            <a:solidFill>
+              <a:srgbClr val="EDA100"/>
+            </a:solidFill>
+          </a:ln>
+          <a:effectLst/>
+        </p:spPr>
+        <p:style>
+          <a:lnRef idx="1">
+            <a:schemeClr val="accent1"/>
+          </a:lnRef>
+          <a:fillRef idx="3">
+            <a:schemeClr val="accent1"/>
+          </a:fillRef>
+          <a:effectRef idx="2">
+            <a:schemeClr val="accent1"/>
+          </a:effectRef>
+          <a:fontRef idx="minor">
+            <a:schemeClr val="lt1"/>
+          </a:fontRef>
+        </p:style>
+        <p:txBody>
+          <a:bodyPr rtlCol="0" anchor="ctr" wrap="square"/>
+          <a:lstStyle/>
+          <a:p>
+            <a:pPr algn="ctr"/>
+          </a:p>
+        </p:txBody>
+      </p:sp>
+      <p:sp>
+        <p:nvSpPr>
+          <p:cNvPr id="142" name="TextBox 141"/>
+          <p:cNvSpPr txBox="1"/>
+          <p:nvPr/>
+        </p:nvSpPr>
+        <p:spPr>
+          <a:xfrm>
+            <a:off x="22608000" y="15516000"/>
+            <a:ext cx="4104000" cy="900000"/>
+          </a:xfrm>
+          <a:prstGeom prst="rect">
+            <a:avLst/>
+          </a:prstGeom>
+          <a:noFill/>
+        </p:spPr>
+        <p:txBody>
+          <a:bodyPr wrap="square" anchor="ctr" lIns="0" rIns="0" tIns="0" bIns="0">
+            <a:spAutoFit/>
+          </a:bodyPr>
+          <a:lstStyle/>
+          <a:p>
+            <a:pPr algn="ctr">
+              <a:lnSpc>
+                <a:spcPct val="92000"/>
+              </a:lnSpc>
+            </a:pPr>
+            <a:r>
+              <a:rPr sz="2700" b="1">
+                <a:solidFill>
+                  <a:srgbClr val="C98B00"/>
+                </a:solidFill>
+                <a:latin typeface="Arial"/>
+              </a:rPr>
+              <a:t>FUSÃO TARDIA</a:t>
+            </a:r>
+          </a:p>
+          <a:p>
+            <a:pPr algn="ctr">
+              <a:lnSpc>
+                <a:spcPct val="92000"/>
+              </a:lnSpc>
+            </a:pPr>
+            <a:r>
+              <a:rPr sz="1800" b="0">
+                <a:solidFill>
+                  <a:srgbClr val="4E4E4E"/>
+                </a:solidFill>
+                <a:latin typeface="Arial"/>
+              </a:rPr>
+              <a:t>as 3 vogais votam</a:t>
+            </a:r>
+          </a:p>
+        </p:txBody>
+      </p:sp>
+      <p:sp>
+        <p:nvSpPr>
+          <p:cNvPr id="143" name="Rounded Rectangle 142"/>
+          <p:cNvSpPr/>
+          <p:nvPr/>
+        </p:nvSpPr>
+        <p:spPr>
+          <a:xfrm>
+            <a:off x="22968000" y="16596000"/>
+            <a:ext cx="3384000" cy="684000"/>
+          </a:xfrm>
+          <a:prstGeom prst="roundRect">
+            <a:avLst>
+              <a:gd name="adj" fmla="val 20000"/>
+            </a:avLst>
+          </a:prstGeom>
+          <a:solidFill>
+            <a:srgbClr val="FFFFFF"/>
+          </a:solidFill>
+          <a:ln w="15240">
+            <a:solidFill>
+              <a:srgbClr val="EEDAA8"/>
+            </a:solidFill>
+          </a:ln>
+          <a:effectLst/>
+        </p:spPr>
+        <p:style>
+          <a:lnRef idx="1">
+            <a:schemeClr val="accent1"/>
+          </a:lnRef>
+          <a:fillRef idx="3">
+            <a:schemeClr val="accent1"/>
+          </a:fillRef>
+          <a:effectRef idx="2">
+            <a:schemeClr val="accent1"/>
+          </a:effectRef>
+          <a:fontRef idx="minor">
+            <a:schemeClr val="lt1"/>
+          </a:fontRef>
+        </p:style>
+        <p:txBody>
+          <a:bodyPr rtlCol="0" anchor="ctr" wrap="square" lIns="54000" rIns="54000" tIns="7200" bIns="7200"/>
+          <a:lstStyle/>
+          <a:p>
+            <a:pPr algn="ctr">
+              <a:lnSpc>
+                <a:spcPct val="92000"/>
+              </a:lnSpc>
+            </a:pPr>
+            <a:r>
+              <a:rPr sz="2200" b="1">
+                <a:solidFill>
+                  <a:srgbClr val="1E1E1E"/>
+                </a:solidFill>
+                <a:latin typeface="Arial"/>
+              </a:rPr>
+              <a:t>/a/</a:t>
+            </a:r>
+            <a:r>
+              <a:rPr sz="1700" b="0">
+                <a:solidFill>
+                  <a:srgbClr val="4E4E4E"/>
+                </a:solidFill>
+                <a:latin typeface="Arial"/>
+              </a:rPr>
+              <a:t>  P(classe)</a:t>
+            </a:r>
+          </a:p>
+        </p:txBody>
+      </p:sp>
+      <p:sp>
+        <p:nvSpPr>
+          <p:cNvPr id="144" name="Rounded Rectangle 143"/>
+          <p:cNvSpPr/>
+          <p:nvPr/>
+        </p:nvSpPr>
+        <p:spPr>
+          <a:xfrm>
+            <a:off x="22968000" y="17406000"/>
+            <a:ext cx="3384000" cy="684000"/>
+          </a:xfrm>
+          <a:prstGeom prst="roundRect">
+            <a:avLst>
+              <a:gd name="adj" fmla="val 20000"/>
+            </a:avLst>
+          </a:prstGeom>
+          <a:solidFill>
+            <a:srgbClr val="FFFFFF"/>
+          </a:solidFill>
+          <a:ln w="15240">
+            <a:solidFill>
+              <a:srgbClr val="EEDAA8"/>
+            </a:solidFill>
+          </a:ln>
+          <a:effectLst/>
+        </p:spPr>
+        <p:style>
+          <a:lnRef idx="1">
+            <a:schemeClr val="accent1"/>
+          </a:lnRef>
+          <a:fillRef idx="3">
+            <a:schemeClr val="accent1"/>
+          </a:fillRef>
+          <a:effectRef idx="2">
+            <a:schemeClr val="accent1"/>
+          </a:effectRef>
+          <a:fontRef idx="minor">
+            <a:schemeClr val="lt1"/>
+          </a:fontRef>
+        </p:style>
+        <p:txBody>
+          <a:bodyPr rtlCol="0" anchor="ctr" wrap="square" lIns="54000" rIns="54000" tIns="7200" bIns="7200"/>
+          <a:lstStyle/>
+          <a:p>
+            <a:pPr algn="ctr">
+              <a:lnSpc>
+                <a:spcPct val="92000"/>
+              </a:lnSpc>
+            </a:pPr>
+            <a:r>
+              <a:rPr sz="2200" b="1">
+                <a:solidFill>
+                  <a:srgbClr val="1E1E1E"/>
+                </a:solidFill>
+                <a:latin typeface="Arial"/>
+              </a:rPr>
+              <a:t>/i/</a:t>
+            </a:r>
+            <a:r>
+              <a:rPr sz="1700" b="0">
+                <a:solidFill>
+                  <a:srgbClr val="4E4E4E"/>
+                </a:solidFill>
+                <a:latin typeface="Arial"/>
+              </a:rPr>
+              <a:t>  P(classe)</a:t>
+            </a:r>
+          </a:p>
+        </p:txBody>
+      </p:sp>
+      <p:sp>
+        <p:nvSpPr>
+          <p:cNvPr id="145" name="Rounded Rectangle 144"/>
+          <p:cNvSpPr/>
+          <p:nvPr/>
+        </p:nvSpPr>
+        <p:spPr>
+          <a:xfrm>
+            <a:off x="22968000" y="18216000"/>
+            <a:ext cx="3384000" cy="684000"/>
+          </a:xfrm>
+          <a:prstGeom prst="roundRect">
+            <a:avLst>
+              <a:gd name="adj" fmla="val 20000"/>
+            </a:avLst>
+          </a:prstGeom>
+          <a:solidFill>
+            <a:srgbClr val="FFFFFF"/>
+          </a:solidFill>
+          <a:ln w="15240">
+            <a:solidFill>
+              <a:srgbClr val="EEDAA8"/>
+            </a:solidFill>
+          </a:ln>
+          <a:effectLst/>
+        </p:spPr>
+        <p:style>
+          <a:lnRef idx="1">
+            <a:schemeClr val="accent1"/>
+          </a:lnRef>
+          <a:fillRef idx="3">
+            <a:schemeClr val="accent1"/>
+          </a:fillRef>
+          <a:effectRef idx="2">
+            <a:schemeClr val="accent1"/>
+          </a:effectRef>
+          <a:fontRef idx="minor">
+            <a:schemeClr val="lt1"/>
+          </a:fontRef>
+        </p:style>
+        <p:txBody>
+          <a:bodyPr rtlCol="0" anchor="ctr" wrap="square" lIns="54000" rIns="54000" tIns="7200" bIns="7200"/>
+          <a:lstStyle/>
+          <a:p>
+            <a:pPr algn="ctr">
+              <a:lnSpc>
+                <a:spcPct val="92000"/>
+              </a:lnSpc>
+            </a:pPr>
+            <a:r>
+              <a:rPr sz="2200" b="1">
+                <a:solidFill>
+                  <a:srgbClr val="1E1E1E"/>
+                </a:solidFill>
+                <a:latin typeface="Arial"/>
+              </a:rPr>
+              <a:t>/u/</a:t>
+            </a:r>
+            <a:r>
+              <a:rPr sz="1700" b="0">
+                <a:solidFill>
+                  <a:srgbClr val="4E4E4E"/>
+                </a:solidFill>
+                <a:latin typeface="Arial"/>
+              </a:rPr>
+              <a:t>  P(classe)</a:t>
+            </a:r>
+          </a:p>
+        </p:txBody>
+      </p:sp>
+      <p:sp>
+        <p:nvSpPr>
+          <p:cNvPr id="146" name="TextBox 145"/>
+          <p:cNvSpPr txBox="1"/>
+          <p:nvPr/>
+        </p:nvSpPr>
+        <p:spPr>
+          <a:xfrm>
+            <a:off x="22608000" y="18990000"/>
+            <a:ext cx="4104000" cy="396000"/>
+          </a:xfrm>
+          <a:prstGeom prst="rect">
+            <a:avLst/>
+          </a:prstGeom>
+          <a:noFill/>
+        </p:spPr>
+        <p:txBody>
+          <a:bodyPr wrap="square" anchor="ctr" lIns="0" rIns="0" tIns="0" bIns="0">
+            <a:spAutoFit/>
+          </a:bodyPr>
+          <a:lstStyle/>
+          <a:p>
+            <a:pPr algn="ctr">
+              <a:lnSpc>
+                <a:spcPct val="92000"/>
+              </a:lnSpc>
+            </a:pPr>
+            <a:r>
+              <a:rPr sz="2200" b="1">
+                <a:solidFill>
+                  <a:srgbClr val="C98B00"/>
+                </a:solidFill>
+                <a:latin typeface="Arial"/>
+              </a:rPr>
+              <a:t>↓</a:t>
+            </a:r>
+          </a:p>
+        </p:txBody>
+      </p:sp>
+      <p:sp>
+        <p:nvSpPr>
+          <p:cNvPr id="147" name="Rounded Rectangle 146"/>
+          <p:cNvSpPr/>
+          <p:nvPr/>
+        </p:nvSpPr>
+        <p:spPr>
+          <a:xfrm>
+            <a:off x="22968000" y="19386000"/>
+            <a:ext cx="3384000" cy="1152000"/>
+          </a:xfrm>
+          <a:prstGeom prst="roundRect">
+            <a:avLst>
+              <a:gd name="adj" fmla="val 16000"/>
+            </a:avLst>
+          </a:prstGeom>
+          <a:solidFill>
+            <a:srgbClr val="EDA100"/>
+          </a:solidFill>
+          <a:ln>
+            <a:noFill/>
+          </a:ln>
+          <a:effectLst/>
+        </p:spPr>
+        <p:style>
+          <a:lnRef idx="1">
+            <a:schemeClr val="accent1"/>
+          </a:lnRef>
+          <a:fillRef idx="3">
+            <a:schemeClr val="accent1"/>
+          </a:fillRef>
+          <a:effectRef idx="2">
+            <a:schemeClr val="accent1"/>
+          </a:effectRef>
+          <a:fontRef idx="minor">
+            <a:schemeClr val="lt1"/>
+          </a:fontRef>
+        </p:style>
+        <p:txBody>
+          <a:bodyPr rtlCol="0" anchor="ctr" wrap="square" lIns="108000" rIns="108000" tIns="36000" bIns="36000"/>
+          <a:lstStyle/>
+          <a:p>
+            <a:pPr algn="ctr">
+              <a:lnSpc>
+                <a:spcPct val="92000"/>
+              </a:lnSpc>
+            </a:pPr>
+            <a:r>
+              <a:rPr sz="2000" b="1">
+                <a:solidFill>
+                  <a:srgbClr val="FFFFFF"/>
+                </a:solidFill>
+                <a:latin typeface="Arial"/>
+              </a:rPr>
+              <a:t>média das</a:t>
+            </a:r>
+          </a:p>
+          <a:p>
+            <a:pPr algn="ctr">
+              <a:lnSpc>
+                <a:spcPct val="92000"/>
+              </a:lnSpc>
+            </a:pPr>
+            <a:r>
+              <a:rPr sz="2000" b="1">
+                <a:solidFill>
+                  <a:srgbClr val="FFFFFF"/>
+                </a:solidFill>
+                <a:latin typeface="Arial"/>
+              </a:rPr>
+              <a:t>probabilidades</a:t>
+            </a:r>
+          </a:p>
+        </p:txBody>
+      </p:sp>
+      <p:sp>
+        <p:nvSpPr>
+          <p:cNvPr id="148" name="TextBox 147"/>
+          <p:cNvSpPr txBox="1"/>
+          <p:nvPr/>
+        </p:nvSpPr>
+        <p:spPr>
+          <a:xfrm>
+            <a:off x="22824000" y="20664000"/>
+            <a:ext cx="3672000" cy="936000"/>
+          </a:xfrm>
+          <a:prstGeom prst="rect">
+            <a:avLst/>
+          </a:prstGeom>
+          <a:noFill/>
+        </p:spPr>
+        <p:txBody>
+          <a:bodyPr wrap="square" anchor="ctr" lIns="0" rIns="0" tIns="0" bIns="0">
+            <a:spAutoFit/>
+          </a:bodyPr>
+          <a:lstStyle/>
+          <a:p>
+            <a:pPr algn="ctr">
+              <a:lnSpc>
+                <a:spcPct val="90000"/>
+              </a:lnSpc>
+            </a:pPr>
+            <a:r>
+              <a:rPr sz="1700" b="0">
+                <a:solidFill>
+                  <a:srgbClr val="777777"/>
+                </a:solidFill>
+                <a:latin typeface="Arial"/>
+              </a:rPr>
+              <a:t>nenhuma vogal</a:t>
+            </a:r>
+          </a:p>
+          <a:p>
+            <a:pPr algn="ctr">
+              <a:lnSpc>
+                <a:spcPct val="90000"/>
+              </a:lnSpc>
+            </a:pPr>
+            <a:r>
+              <a:rPr sz="1700" b="0">
+                <a:solidFill>
+                  <a:srgbClr val="777777"/>
+                </a:solidFill>
+                <a:latin typeface="Arial"/>
+              </a:rPr>
+              <a:t>decide sozinha</a:t>
+            </a:r>
+          </a:p>
+        </p:txBody>
+      </p:sp>
+      <p:sp>
+        <p:nvSpPr>
+          <p:cNvPr id="149" name="Right Arrow 148"/>
+          <p:cNvSpPr/>
+          <p:nvPr/>
+        </p:nvSpPr>
+        <p:spPr>
+          <a:xfrm>
+            <a:off x="26892000" y="18252000"/>
+            <a:ext cx="432000" cy="576000"/>
+          </a:xfrm>
+          <a:prstGeom prst="rightArrow">
+            <a:avLst>
+              <a:gd name="adj1" fmla="val 50000"/>
+              <a:gd name="adj2" fmla="val 45000"/>
+            </a:avLst>
+          </a:prstGeom>
+          <a:solidFill>
+            <a:srgbClr val="9AA3AE"/>
+          </a:solidFill>
+          <a:ln>
+            <a:noFill/>
+          </a:ln>
+          <a:effectLst/>
+        </p:spPr>
+        <p:style>
+          <a:lnRef idx="1">
+            <a:schemeClr val="accent1"/>
+          </a:lnRef>
+          <a:fillRef idx="3">
+            <a:schemeClr val="accent1"/>
+          </a:fillRef>
+          <a:effectRef idx="2">
+            <a:schemeClr val="accent1"/>
+          </a:effectRef>
+          <a:fontRef idx="minor">
+            <a:schemeClr val="lt1"/>
+          </a:fontRef>
+        </p:style>
+        <p:txBody>
+          <a:bodyPr rtlCol="0" anchor="ctr"/>
+          <a:lstStyle/>
+          <a:p>
+            <a:pPr algn="ctr"/>
+          </a:p>
+        </p:txBody>
+      </p:sp>
+      <p:sp>
+        <p:nvSpPr>
+          <p:cNvPr id="150" name="TextBox 149"/>
+          <p:cNvSpPr txBox="1"/>
+          <p:nvPr/>
+        </p:nvSpPr>
+        <p:spPr>
+          <a:xfrm>
+            <a:off x="27504000" y="15516000"/>
+            <a:ext cx="3960000" cy="576000"/>
+          </a:xfrm>
+          <a:prstGeom prst="rect">
+            <a:avLst/>
+          </a:prstGeom>
+          <a:noFill/>
+        </p:spPr>
+        <p:txBody>
+          <a:bodyPr wrap="square" anchor="ctr" lIns="0" rIns="0" tIns="0" bIns="0">
+            <a:spAutoFit/>
+          </a:bodyPr>
+          <a:lstStyle/>
+          <a:p>
+            <a:pPr algn="ctr">
+              <a:lnSpc>
+                <a:spcPct val="92000"/>
+              </a:lnSpc>
+            </a:pPr>
+            <a:r>
+              <a:rPr sz="2900" b="1">
+                <a:solidFill>
+                  <a:srgbClr val="1F3B57"/>
+                </a:solidFill>
+                <a:latin typeface="Arial"/>
+              </a:rPr>
+              <a:t>DECISÃO</a:t>
+            </a:r>
+          </a:p>
+        </p:txBody>
+      </p:sp>
+      <p:sp>
+        <p:nvSpPr>
+          <p:cNvPr id="151" name="Rounded Rectangle 150"/>
+          <p:cNvSpPr/>
+          <p:nvPr/>
+        </p:nvSpPr>
+        <p:spPr>
+          <a:xfrm>
+            <a:off x="27504000" y="16092000"/>
+            <a:ext cx="3960000" cy="1080000"/>
+          </a:xfrm>
+          <a:prstGeom prst="roundRect">
+            <a:avLst>
+              <a:gd name="adj" fmla="val 18000"/>
+            </a:avLst>
+          </a:prstGeom>
+          <a:solidFill>
+            <a:srgbClr val="FFFFFF"/>
+          </a:solidFill>
+          <a:ln w="22860">
+            <a:solidFill>
+              <a:srgbClr val="1F3B57"/>
+            </a:solidFill>
+          </a:ln>
+          <a:effectLst/>
+        </p:spPr>
+        <p:style>
+          <a:lnRef idx="1">
+            <a:schemeClr val="accent1"/>
+          </a:lnRef>
+          <a:fillRef idx="3">
+            <a:schemeClr val="accent1"/>
+          </a:fillRef>
+          <a:effectRef idx="2">
+            <a:schemeClr val="accent1"/>
+          </a:effectRef>
+          <a:fontRef idx="minor">
+            <a:schemeClr val="lt1"/>
+          </a:fontRef>
+        </p:style>
+        <p:txBody>
+          <a:bodyPr rtlCol="0" anchor="ctr" wrap="square" lIns="108000" rIns="108000" tIns="36000" bIns="36000"/>
+          <a:lstStyle/>
+          <a:p>
+            <a:pPr algn="ctr">
+              <a:lnSpc>
+                <a:spcPct val="92000"/>
+              </a:lnSpc>
+            </a:pPr>
+            <a:r>
+              <a:rPr sz="2000" b="1">
+                <a:solidFill>
+                  <a:srgbClr val="1E1E1E"/>
+                </a:solidFill>
+                <a:latin typeface="Arial"/>
+              </a:rPr>
+              <a:t>P(patológico)</a:t>
+            </a:r>
+          </a:p>
+          <a:p>
+            <a:pPr algn="ctr">
+              <a:lnSpc>
+                <a:spcPct val="92000"/>
+              </a:lnSpc>
+            </a:pPr>
+            <a:r>
+              <a:rPr sz="2300" b="1">
+                <a:solidFill>
+                  <a:srgbClr val="1F3B57"/>
+                </a:solidFill>
+                <a:latin typeface="Arial"/>
+              </a:rPr>
+              <a:t>≥ 0,5 ?</a:t>
+            </a:r>
+          </a:p>
+        </p:txBody>
+      </p:sp>
+      <p:sp>
+        <p:nvSpPr>
+          <p:cNvPr id="152" name="Rounded Rectangle 151"/>
+          <p:cNvSpPr/>
+          <p:nvPr/>
+        </p:nvSpPr>
+        <p:spPr>
+          <a:xfrm>
+            <a:off x="27504000" y="17388000"/>
+            <a:ext cx="3960000" cy="827999"/>
+          </a:xfrm>
+          <a:prstGeom prst="roundRect">
+            <a:avLst>
+              <a:gd name="adj" fmla="val 20000"/>
+            </a:avLst>
+          </a:prstGeom>
+          <a:solidFill>
+            <a:srgbClr val="ECF6EC"/>
+          </a:solidFill>
+          <a:ln w="22860">
+            <a:solidFill>
+              <a:srgbClr val="008300"/>
+            </a:solidFill>
+          </a:ln>
+          <a:effectLst/>
+        </p:spPr>
+        <p:style>
+          <a:lnRef idx="1">
+            <a:schemeClr val="accent1"/>
+          </a:lnRef>
+          <a:fillRef idx="3">
+            <a:schemeClr val="accent1"/>
+          </a:fillRef>
+          <a:effectRef idx="2">
+            <a:schemeClr val="accent1"/>
+          </a:effectRef>
+          <a:fontRef idx="minor">
+            <a:schemeClr val="lt1"/>
+          </a:fontRef>
+        </p:style>
+        <p:txBody>
+          <a:bodyPr rtlCol="0" anchor="ctr" wrap="square" lIns="36000" rIns="36000" tIns="7200" bIns="7200"/>
+          <a:lstStyle/>
+          <a:p>
+            <a:pPr algn="ctr">
+              <a:lnSpc>
+                <a:spcPct val="92000"/>
+              </a:lnSpc>
+            </a:pPr>
+            <a:r>
+              <a:rPr sz="1700" b="0">
+                <a:solidFill>
+                  <a:srgbClr val="4E4E4E"/>
+                </a:solidFill>
+                <a:latin typeface="Arial"/>
+              </a:rPr>
+              <a:t>não → </a:t>
+            </a:r>
+            <a:r>
+              <a:rPr sz="2400" b="1">
+                <a:solidFill>
+                  <a:srgbClr val="008300"/>
+                </a:solidFill>
+                <a:latin typeface="Arial"/>
+              </a:rPr>
+              <a:t>NORMAL</a:t>
+            </a:r>
+          </a:p>
+        </p:txBody>
+      </p:sp>
+      <p:sp>
+        <p:nvSpPr>
+          <p:cNvPr id="153" name="TextBox 152"/>
+          <p:cNvSpPr txBox="1"/>
+          <p:nvPr/>
+        </p:nvSpPr>
+        <p:spPr>
+          <a:xfrm>
+            <a:off x="27504000" y="18288000"/>
+            <a:ext cx="3960000" cy="360000"/>
+          </a:xfrm>
+          <a:prstGeom prst="rect">
+            <a:avLst/>
+          </a:prstGeom>
+          <a:noFill/>
+        </p:spPr>
+        <p:txBody>
+          <a:bodyPr wrap="square" anchor="ctr" lIns="0" rIns="0" tIns="0" bIns="0">
+            <a:spAutoFit/>
+          </a:bodyPr>
+          <a:lstStyle/>
+          <a:p>
+            <a:pPr algn="ctr">
+              <a:lnSpc>
+                <a:spcPct val="92000"/>
+              </a:lnSpc>
+            </a:pPr>
+            <a:r>
+              <a:rPr sz="1800" b="1">
+                <a:solidFill>
+                  <a:srgbClr val="777777"/>
+                </a:solidFill>
+                <a:latin typeface="Arial"/>
+              </a:rPr>
+              <a:t>sim ↓</a:t>
+            </a:r>
+          </a:p>
+        </p:txBody>
+      </p:sp>
+      <p:sp>
+        <p:nvSpPr>
+          <p:cNvPr id="154" name="Rounded Rectangle 153"/>
+          <p:cNvSpPr/>
+          <p:nvPr/>
+        </p:nvSpPr>
+        <p:spPr>
+          <a:xfrm>
+            <a:off x="27504000" y="18756000"/>
+            <a:ext cx="3960000" cy="684000"/>
+          </a:xfrm>
+          <a:prstGeom prst="roundRect">
+            <a:avLst>
+              <a:gd name="adj" fmla="val 22000"/>
+            </a:avLst>
+          </a:prstGeom>
+          <a:solidFill>
+            <a:srgbClr val="FDEEF4"/>
+          </a:solidFill>
+          <a:ln w="17780">
+            <a:solidFill>
+              <a:srgbClr val="E87BA4"/>
+            </a:solidFill>
+          </a:ln>
+          <a:effectLst/>
+        </p:spPr>
+        <p:style>
+          <a:lnRef idx="1">
+            <a:schemeClr val="accent1"/>
+          </a:lnRef>
+          <a:fillRef idx="3">
+            <a:schemeClr val="accent1"/>
+          </a:fillRef>
+          <a:effectRef idx="2">
+            <a:schemeClr val="accent1"/>
+          </a:effectRef>
+          <a:fontRef idx="minor">
+            <a:schemeClr val="lt1"/>
+          </a:fontRef>
+        </p:style>
+        <p:txBody>
+          <a:bodyPr rtlCol="0" anchor="ctr" wrap="square" lIns="43200" rIns="43200" tIns="7200" bIns="7200"/>
+          <a:lstStyle/>
+          <a:p>
+            <a:pPr algn="ctr">
+              <a:lnSpc>
+                <a:spcPct val="92000"/>
+              </a:lnSpc>
+            </a:pPr>
+            <a:r>
+              <a:rPr sz="1800" b="1">
+                <a:solidFill>
+                  <a:srgbClr val="B8446E"/>
+                </a:solidFill>
+                <a:latin typeface="Arial"/>
+              </a:rPr>
+              <a:t>Laringite</a:t>
+            </a:r>
+          </a:p>
+        </p:txBody>
+      </p:sp>
+      <p:sp>
+        <p:nvSpPr>
+          <p:cNvPr id="155" name="Rounded Rectangle 154"/>
+          <p:cNvSpPr/>
+          <p:nvPr/>
+        </p:nvSpPr>
+        <p:spPr>
+          <a:xfrm>
+            <a:off x="27504000" y="19512000"/>
+            <a:ext cx="3960000" cy="684000"/>
+          </a:xfrm>
+          <a:prstGeom prst="roundRect">
+            <a:avLst>
+              <a:gd name="adj" fmla="val 22000"/>
+            </a:avLst>
+          </a:prstGeom>
+          <a:solidFill>
+            <a:srgbClr val="FDEEF4"/>
+          </a:solidFill>
+          <a:ln w="17780">
+            <a:solidFill>
+              <a:srgbClr val="E87BA4"/>
+            </a:solidFill>
+          </a:ln>
+          <a:effectLst/>
+        </p:spPr>
+        <p:style>
+          <a:lnRef idx="1">
+            <a:schemeClr val="accent1"/>
+          </a:lnRef>
+          <a:fillRef idx="3">
+            <a:schemeClr val="accent1"/>
+          </a:fillRef>
+          <a:effectRef idx="2">
+            <a:schemeClr val="accent1"/>
+          </a:effectRef>
+          <a:fontRef idx="minor">
+            <a:schemeClr val="lt1"/>
+          </a:fontRef>
+        </p:style>
+        <p:txBody>
+          <a:bodyPr rtlCol="0" anchor="ctr" wrap="square" lIns="43200" rIns="43200" tIns="7200" bIns="7200"/>
+          <a:lstStyle/>
+          <a:p>
+            <a:pPr algn="ctr">
+              <a:lnSpc>
+                <a:spcPct val="92000"/>
+              </a:lnSpc>
+            </a:pPr>
+            <a:r>
+              <a:rPr sz="1800" b="1">
+                <a:solidFill>
+                  <a:srgbClr val="B8446E"/>
+                </a:solidFill>
+                <a:latin typeface="Arial"/>
+              </a:rPr>
+              <a:t>Disfonia Psicogênica</a:t>
+            </a:r>
+          </a:p>
+        </p:txBody>
+      </p:sp>
+      <p:sp>
+        <p:nvSpPr>
+          <p:cNvPr id="156" name="Rounded Rectangle 155"/>
+          <p:cNvSpPr/>
+          <p:nvPr/>
+        </p:nvSpPr>
+        <p:spPr>
+          <a:xfrm>
+            <a:off x="27504000" y="20268000"/>
+            <a:ext cx="3960000" cy="684000"/>
+          </a:xfrm>
+          <a:prstGeom prst="roundRect">
+            <a:avLst>
+              <a:gd name="adj" fmla="val 22000"/>
+            </a:avLst>
+          </a:prstGeom>
+          <a:solidFill>
+            <a:srgbClr val="FDEEF4"/>
+          </a:solidFill>
+          <a:ln w="17780">
+            <a:solidFill>
+              <a:srgbClr val="E87BA4"/>
+            </a:solidFill>
+          </a:ln>
+          <a:effectLst/>
+        </p:spPr>
+        <p:style>
+          <a:lnRef idx="1">
+            <a:schemeClr val="accent1"/>
+          </a:lnRef>
+          <a:fillRef idx="3">
+            <a:schemeClr val="accent1"/>
+          </a:fillRef>
+          <a:effectRef idx="2">
+            <a:schemeClr val="accent1"/>
+          </a:effectRef>
+          <a:fontRef idx="minor">
+            <a:schemeClr val="lt1"/>
+          </a:fontRef>
+        </p:style>
+        <p:txBody>
+          <a:bodyPr rtlCol="0" anchor="ctr" wrap="square" lIns="43200" rIns="43200" tIns="7200" bIns="7200"/>
+          <a:lstStyle/>
+          <a:p>
+            <a:pPr algn="ctr">
+              <a:lnSpc>
+                <a:spcPct val="92000"/>
+              </a:lnSpc>
+            </a:pPr>
+            <a:r>
+              <a:rPr sz="1800" b="1">
+                <a:solidFill>
+                  <a:srgbClr val="B8446E"/>
+                </a:solidFill>
+                <a:latin typeface="Arial"/>
+              </a:rPr>
+              <a:t>Disfonia Funcional</a:t>
+            </a:r>
+          </a:p>
+        </p:txBody>
+      </p:sp>
+      <p:sp>
+        <p:nvSpPr>
+          <p:cNvPr id="157" name="Rounded Rectangle 156"/>
+          <p:cNvSpPr/>
+          <p:nvPr/>
+        </p:nvSpPr>
+        <p:spPr>
+          <a:xfrm>
+            <a:off x="27504000" y="21024000"/>
+            <a:ext cx="3960000" cy="684000"/>
+          </a:xfrm>
+          <a:prstGeom prst="roundRect">
+            <a:avLst>
+              <a:gd name="adj" fmla="val 22000"/>
+            </a:avLst>
+          </a:prstGeom>
+          <a:solidFill>
+            <a:srgbClr val="FDEEF4"/>
+          </a:solidFill>
+          <a:ln w="17780">
+            <a:solidFill>
+              <a:srgbClr val="E87BA4"/>
+            </a:solidFill>
+          </a:ln>
+          <a:effectLst/>
+        </p:spPr>
+        <p:style>
+          <a:lnRef idx="1">
+            <a:schemeClr val="accent1"/>
+          </a:lnRef>
+          <a:fillRef idx="3">
+            <a:schemeClr val="accent1"/>
+          </a:fillRef>
+          <a:effectRef idx="2">
+            <a:schemeClr val="accent1"/>
+          </a:effectRef>
+          <a:fontRef idx="minor">
+            <a:schemeClr val="lt1"/>
+          </a:fontRef>
+        </p:style>
+        <p:txBody>
+          <a:bodyPr rtlCol="0" anchor="ctr" wrap="square" lIns="43200" rIns="43200" tIns="7200" bIns="7200"/>
+          <a:lstStyle/>
+          <a:p>
+            <a:pPr algn="ctr">
+              <a:lnSpc>
+                <a:spcPct val="92000"/>
+              </a:lnSpc>
+            </a:pPr>
+            <a:r>
+              <a:rPr sz="1800" b="1">
+                <a:solidFill>
+                  <a:srgbClr val="B8446E"/>
+                </a:solidFill>
+                <a:latin typeface="Arial"/>
+              </a:rPr>
+              <a:t>Edema de Reinke</a:t>
+            </a:r>
+          </a:p>
+        </p:txBody>
+      </p:sp>
+      <p:sp>
+        <p:nvSpPr>
+          <p:cNvPr id="158" name="Rounded Rectangle 157"/>
+          <p:cNvSpPr/>
+          <p:nvPr/>
+        </p:nvSpPr>
+        <p:spPr>
+          <a:xfrm>
+            <a:off x="936000" y="22122000"/>
+            <a:ext cx="180000" cy="648000"/>
+          </a:xfrm>
+          <a:prstGeom prst="roundRect">
+            <a:avLst>
+              <a:gd name="adj" fmla="val 50000"/>
+            </a:avLst>
+          </a:prstGeom>
+          <a:solidFill>
+            <a:srgbClr val="2A78D6"/>
+          </a:solidFill>
+          <a:ln>
+            <a:noFill/>
+          </a:ln>
+          <a:effectLst/>
+        </p:spPr>
+        <p:style>
+          <a:lnRef idx="1">
+            <a:schemeClr val="accent1"/>
+          </a:lnRef>
+          <a:fillRef idx="3">
+            <a:schemeClr val="accent1"/>
+          </a:fillRef>
+          <a:effectRef idx="2">
+            <a:schemeClr val="accent1"/>
+          </a:effectRef>
+          <a:fontRef idx="minor">
+            <a:schemeClr val="lt1"/>
+          </a:fontRef>
+        </p:style>
+        <p:txBody>
+          <a:bodyPr rtlCol="0" anchor="ctr" wrap="square"/>
+          <a:lstStyle/>
+          <a:p>
+            <a:pPr algn="ctr"/>
+          </a:p>
+        </p:txBody>
+      </p:sp>
+      <p:sp>
+        <p:nvSpPr>
+          <p:cNvPr id="159" name="TextBox 158"/>
+          <p:cNvSpPr txBox="1"/>
+          <p:nvPr/>
+        </p:nvSpPr>
+        <p:spPr>
+          <a:xfrm>
+            <a:off x="1314000" y="22068000"/>
+            <a:ext cx="30150000" cy="792000"/>
+          </a:xfrm>
+          <a:prstGeom prst="rect">
+            <a:avLst/>
+          </a:prstGeom>
+          <a:noFill/>
+        </p:spPr>
+        <p:txBody>
+          <a:bodyPr wrap="square" anchor="ctr" lIns="0" rIns="0" tIns="0" bIns="0">
+            <a:spAutoFit/>
+          </a:bodyPr>
+          <a:lstStyle/>
+          <a:p>
+            <a:pPr algn="l">
+              <a:lnSpc>
+                <a:spcPct val="92000"/>
+              </a:lnSpc>
+            </a:pPr>
+            <a:r>
+              <a:rPr sz="5000" b="1">
+                <a:solidFill>
+                  <a:srgbClr val="1F3B57"/>
+                </a:solidFill>
+                <a:latin typeface="Arial"/>
+              </a:rPr>
+              <a:t>RESULTADOS</a:t>
+            </a:r>
+          </a:p>
+        </p:txBody>
+      </p:sp>
+      <p:sp>
+        <p:nvSpPr>
+          <p:cNvPr id="160" name="TextBox 159"/>
+          <p:cNvSpPr txBox="1"/>
+          <p:nvPr/>
+        </p:nvSpPr>
+        <p:spPr>
+          <a:xfrm>
+            <a:off x="1314000" y="22805999"/>
+            <a:ext cx="30150000" cy="432000"/>
+          </a:xfrm>
+          <a:prstGeom prst="rect">
+            <a:avLst/>
+          </a:prstGeom>
+          <a:noFill/>
+        </p:spPr>
+        <p:txBody>
+          <a:bodyPr wrap="square" anchor="t" lIns="0" rIns="0" tIns="0" bIns="0">
+            <a:spAutoFit/>
+          </a:bodyPr>
+          <a:lstStyle/>
+          <a:p>
+            <a:pPr algn="l">
+              <a:lnSpc>
+                <a:spcPct val="92000"/>
+              </a:lnSpc>
+            </a:pPr>
+            <a:r>
+              <a:rPr sz="2300" b="0">
+                <a:solidFill>
+                  <a:srgbClr val="777777"/>
+                </a:solidFill>
+                <a:latin typeface="Arial"/>
+              </a:rPr>
+              <a:t>1.098 pacientes · predições agregadas fora da dobra de treino (out-of-fold)</a:t>
+            </a:r>
+          </a:p>
+        </p:txBody>
+      </p:sp>
+      <p:sp>
+        <p:nvSpPr>
+          <p:cNvPr id="161" name="Rounded Rectangle 160"/>
+          <p:cNvSpPr/>
+          <p:nvPr/>
+        </p:nvSpPr>
+        <p:spPr>
+          <a:xfrm>
+            <a:off x="936000" y="23363999"/>
+            <a:ext cx="7308000" cy="2015999"/>
+          </a:xfrm>
+          <a:prstGeom prst="roundRect">
+            <a:avLst>
+              <a:gd name="adj" fmla="val 16000"/>
+            </a:avLst>
+          </a:prstGeom>
+          <a:solidFill>
+            <a:srgbClr val="E8F1FC"/>
+          </a:solidFill>
+          <a:ln w="22860">
+            <a:solidFill>
+              <a:srgbClr val="2A78D6"/>
+            </a:solidFill>
+          </a:ln>
+          <a:effectLst/>
+        </p:spPr>
+        <p:style>
+          <a:lnRef idx="1">
+            <a:schemeClr val="accent1"/>
+          </a:lnRef>
+          <a:fillRef idx="3">
+            <a:schemeClr val="accent1"/>
+          </a:fillRef>
+          <a:effectRef idx="2">
+            <a:schemeClr val="accent1"/>
+          </a:effectRef>
+          <a:fontRef idx="minor">
+            <a:schemeClr val="lt1"/>
+          </a:fontRef>
+        </p:style>
+        <p:txBody>
+          <a:bodyPr rtlCol="0" anchor="ctr" wrap="square" lIns="108000" rIns="108000" tIns="36000" bIns="36000"/>
+          <a:lstStyle/>
+          <a:p>
+            <a:pPr algn="ctr">
+              <a:lnSpc>
+                <a:spcPct val="92000"/>
+              </a:lnSpc>
+            </a:pPr>
+            <a:r>
+              <a:rPr sz="5200" b="1">
+                <a:solidFill>
+                  <a:srgbClr val="2A78D6"/>
+                </a:solidFill>
+                <a:latin typeface="Arial"/>
+              </a:rPr>
+              <a:t>69,7%</a:t>
+            </a:r>
+          </a:p>
+          <a:p>
+            <a:pPr algn="ctr">
+              <a:lnSpc>
+                <a:spcPct val="92000"/>
+              </a:lnSpc>
+            </a:pPr>
+            <a:r>
+              <a:rPr sz="2100" b="1">
+                <a:solidFill>
+                  <a:srgbClr val="1E1E1E"/>
+                </a:solidFill>
+                <a:latin typeface="Arial"/>
+              </a:rPr>
+              <a:t>Acurácia global</a:t>
+            </a:r>
+          </a:p>
+          <a:p>
+            <a:pPr algn="ctr">
+              <a:lnSpc>
+                <a:spcPct val="92000"/>
+              </a:lnSpc>
+            </a:pPr>
+            <a:r>
+              <a:rPr sz="1750" b="0">
+                <a:solidFill>
+                  <a:srgbClr val="4E4E4E"/>
+                </a:solidFill>
+                <a:latin typeface="Arial"/>
+              </a:rPr>
+              <a:t>IC 95%: 66,9 – 72,3%</a:t>
+            </a:r>
+          </a:p>
+        </p:txBody>
+      </p:sp>
+      <p:sp>
+        <p:nvSpPr>
+          <p:cNvPr id="162" name="Rounded Rectangle 161"/>
+          <p:cNvSpPr/>
+          <p:nvPr/>
+        </p:nvSpPr>
+        <p:spPr>
+          <a:xfrm>
+            <a:off x="8676000" y="23363999"/>
+            <a:ext cx="7308000" cy="2015999"/>
+          </a:xfrm>
+          <a:prstGeom prst="roundRect">
+            <a:avLst>
+              <a:gd name="adj" fmla="val 16000"/>
+            </a:avLst>
+          </a:prstGeom>
+          <a:solidFill>
+            <a:srgbClr val="FDF0E9"/>
+          </a:solidFill>
+          <a:ln w="22860">
+            <a:solidFill>
+              <a:srgbClr val="EB6834"/>
+            </a:solidFill>
+          </a:ln>
+          <a:effectLst/>
+        </p:spPr>
+        <p:style>
+          <a:lnRef idx="1">
+            <a:schemeClr val="accent1"/>
+          </a:lnRef>
+          <a:fillRef idx="3">
+            <a:schemeClr val="accent1"/>
+          </a:fillRef>
+          <a:effectRef idx="2">
+            <a:schemeClr val="accent1"/>
+          </a:effectRef>
+          <a:fontRef idx="minor">
+            <a:schemeClr val="lt1"/>
+          </a:fontRef>
+        </p:style>
+        <p:txBody>
+          <a:bodyPr rtlCol="0" anchor="ctr" wrap="square" lIns="108000" rIns="108000" tIns="36000" bIns="36000"/>
+          <a:lstStyle/>
+          <a:p>
+            <a:pPr algn="ctr">
+              <a:lnSpc>
+                <a:spcPct val="92000"/>
+              </a:lnSpc>
+            </a:pPr>
+            <a:r>
+              <a:rPr sz="5200" b="1">
+                <a:solidFill>
+                  <a:srgbClr val="EB6834"/>
+                </a:solidFill>
+                <a:latin typeface="Arial"/>
+              </a:rPr>
+              <a:t>0,4587</a:t>
+            </a:r>
+          </a:p>
+          <a:p>
+            <a:pPr algn="ctr">
+              <a:lnSpc>
+                <a:spcPct val="92000"/>
+              </a:lnSpc>
+            </a:pPr>
+            <a:r>
+              <a:rPr sz="2100" b="1">
+                <a:solidFill>
+                  <a:srgbClr val="1E1E1E"/>
+                </a:solidFill>
+                <a:latin typeface="Arial"/>
+              </a:rPr>
+              <a:t>Macro F1 (5 classes)</a:t>
+            </a:r>
+          </a:p>
+          <a:p>
+            <a:pPr algn="ctr">
+              <a:lnSpc>
+                <a:spcPct val="92000"/>
+              </a:lnSpc>
+            </a:pPr>
+            <a:r>
+              <a:rPr sz="1750" b="0">
+                <a:solidFill>
+                  <a:srgbClr val="4E4E4E"/>
+                </a:solidFill>
+                <a:latin typeface="Arial"/>
+              </a:rPr>
+              <a:t>IC 95%: 0,419 – 0,495</a:t>
+            </a:r>
+          </a:p>
+        </p:txBody>
+      </p:sp>
+      <p:sp>
+        <p:nvSpPr>
+          <p:cNvPr id="163" name="Rounded Rectangle 162"/>
+          <p:cNvSpPr/>
+          <p:nvPr/>
+        </p:nvSpPr>
+        <p:spPr>
+          <a:xfrm>
+            <a:off x="16416000" y="23363999"/>
+            <a:ext cx="7308000" cy="2015999"/>
+          </a:xfrm>
+          <a:prstGeom prst="roundRect">
+            <a:avLst>
+              <a:gd name="adj" fmla="val 16000"/>
+            </a:avLst>
+          </a:prstGeom>
+          <a:solidFill>
+            <a:srgbClr val="ECF6EC"/>
+          </a:solidFill>
+          <a:ln w="22860">
+            <a:solidFill>
+              <a:srgbClr val="008300"/>
+            </a:solidFill>
+          </a:ln>
+          <a:effectLst/>
+        </p:spPr>
+        <p:style>
+          <a:lnRef idx="1">
+            <a:schemeClr val="accent1"/>
+          </a:lnRef>
+          <a:fillRef idx="3">
+            <a:schemeClr val="accent1"/>
+          </a:fillRef>
+          <a:effectRef idx="2">
+            <a:schemeClr val="accent1"/>
+          </a:effectRef>
+          <a:fontRef idx="minor">
+            <a:schemeClr val="lt1"/>
+          </a:fontRef>
+        </p:style>
+        <p:txBody>
+          <a:bodyPr rtlCol="0" anchor="ctr" wrap="square" lIns="108000" rIns="108000" tIns="36000" bIns="36000"/>
+          <a:lstStyle/>
+          <a:p>
+            <a:pPr algn="ctr">
+              <a:lnSpc>
+                <a:spcPct val="92000"/>
+              </a:lnSpc>
+            </a:pPr>
+            <a:r>
+              <a:rPr sz="5200" b="1">
+                <a:solidFill>
+                  <a:srgbClr val="008300"/>
+                </a:solidFill>
+                <a:latin typeface="Arial"/>
+              </a:rPr>
+              <a:t>p &lt; 0,001</a:t>
+            </a:r>
+          </a:p>
+          <a:p>
+            <a:pPr algn="ctr">
+              <a:lnSpc>
+                <a:spcPct val="92000"/>
+              </a:lnSpc>
+            </a:pPr>
+            <a:r>
+              <a:rPr sz="2100" b="1">
+                <a:solidFill>
+                  <a:srgbClr val="1E1E1E"/>
+                </a:solidFill>
+                <a:latin typeface="Arial"/>
+              </a:rPr>
+              <a:t>vs. os 3 baselines</a:t>
+            </a:r>
+          </a:p>
+          <a:p>
+            <a:pPr algn="ctr">
+              <a:lnSpc>
+                <a:spcPct val="92000"/>
+              </a:lnSpc>
+            </a:pPr>
+            <a:r>
+              <a:rPr sz="1750" b="0">
+                <a:solidFill>
+                  <a:srgbClr val="4E4E4E"/>
+                </a:solidFill>
+                <a:latin typeface="Arial"/>
+              </a:rPr>
+              <a:t>McNemar · MLP superior</a:t>
+            </a:r>
+          </a:p>
+        </p:txBody>
+      </p:sp>
+      <p:sp>
+        <p:nvSpPr>
+          <p:cNvPr id="164" name="Rounded Rectangle 163"/>
+          <p:cNvSpPr/>
+          <p:nvPr/>
+        </p:nvSpPr>
+        <p:spPr>
+          <a:xfrm>
+            <a:off x="24156000" y="23363999"/>
+            <a:ext cx="7308000" cy="2015999"/>
+          </a:xfrm>
+          <a:prstGeom prst="roundRect">
+            <a:avLst>
+              <a:gd name="adj" fmla="val 16000"/>
+            </a:avLst>
+          </a:prstGeom>
+          <a:solidFill>
+            <a:srgbClr val="E9F9F2"/>
+          </a:solidFill>
+          <a:ln w="22860">
+            <a:solidFill>
+              <a:srgbClr val="179669"/>
+            </a:solidFill>
+          </a:ln>
+          <a:effectLst/>
+        </p:spPr>
+        <p:style>
+          <a:lnRef idx="1">
+            <a:schemeClr val="accent1"/>
+          </a:lnRef>
+          <a:fillRef idx="3">
+            <a:schemeClr val="accent1"/>
+          </a:fillRef>
+          <a:effectRef idx="2">
+            <a:schemeClr val="accent1"/>
+          </a:effectRef>
+          <a:fontRef idx="minor">
+            <a:schemeClr val="lt1"/>
+          </a:fontRef>
+        </p:style>
+        <p:txBody>
+          <a:bodyPr rtlCol="0" anchor="ctr" wrap="square" lIns="108000" rIns="108000" tIns="36000" bIns="36000"/>
+          <a:lstStyle/>
+          <a:p>
+            <a:pPr algn="ctr">
+              <a:lnSpc>
+                <a:spcPct val="92000"/>
+              </a:lnSpc>
+            </a:pPr>
+            <a:r>
+              <a:rPr sz="5200" b="1">
+                <a:solidFill>
+                  <a:srgbClr val="179669"/>
+                </a:solidFill>
+                <a:latin typeface="Arial"/>
+              </a:rPr>
+              <a:t>0,867</a:t>
+            </a:r>
+          </a:p>
+          <a:p>
+            <a:pPr algn="ctr">
+              <a:lnSpc>
+                <a:spcPct val="92000"/>
+              </a:lnSpc>
+            </a:pPr>
+            <a:r>
+              <a:rPr sz="2100" b="1">
+                <a:solidFill>
+                  <a:srgbClr val="1E1E1E"/>
+                </a:solidFill>
+                <a:latin typeface="Arial"/>
+              </a:rPr>
+              <a:t>F1 da classe Normal</a:t>
+            </a:r>
+          </a:p>
+          <a:p>
+            <a:pPr algn="ctr">
+              <a:lnSpc>
+                <a:spcPct val="92000"/>
+              </a:lnSpc>
+            </a:pPr>
+            <a:r>
+              <a:rPr sz="1750" b="0">
+                <a:solidFill>
+                  <a:srgbClr val="4E4E4E"/>
+                </a:solidFill>
+                <a:latin typeface="Arial"/>
+              </a:rPr>
+              <a:t>recall de 92% nos saudáveis</a:t>
+            </a:r>
+          </a:p>
+        </p:txBody>
+      </p:sp>
+      <p:pic>
+        <p:nvPicPr>
+          <p:cNvPr id="165" name="Picture 164" descr="poster_confusao.png"/>
+          <p:cNvPicPr>
+            <a:picLocks noChangeAspect="1"/>
+          </p:cNvPicPr>
+          <p:nvPr/>
+        </p:nvPicPr>
+        <p:blipFill>
+          <a:blip r:embed="rId12"/>
+          <a:stretch>
+            <a:fillRect/>
+          </a:stretch>
+        </p:blipFill>
+        <p:spPr>
+          <a:xfrm>
+            <a:off x="936000" y="25955999"/>
+            <a:ext cx="8568000" cy="5027928"/>
+          </a:xfrm>
+          <a:prstGeom prst="rect">
+            <a:avLst/>
+          </a:prstGeom>
+        </p:spPr>
+      </p:pic>
+      <p:sp>
+        <p:nvSpPr>
+          <p:cNvPr id="166" name="TextBox 165"/>
+          <p:cNvSpPr txBox="1"/>
+          <p:nvPr/>
+        </p:nvSpPr>
+        <p:spPr>
+          <a:xfrm>
+            <a:off x="936000" y="31019927"/>
+            <a:ext cx="8568000" cy="684000"/>
+          </a:xfrm>
+          <a:prstGeom prst="rect">
+            <a:avLst/>
+          </a:prstGeom>
+          <a:noFill/>
+        </p:spPr>
+        <p:txBody>
+          <a:bodyPr wrap="square" anchor="t" lIns="0" rIns="0" tIns="0" bIns="0">
+            <a:spAutoFit/>
+          </a:bodyPr>
+          <a:lstStyle/>
+          <a:p>
+            <a:pPr algn="l">
+              <a:lnSpc>
+                <a:spcPct val="90000"/>
+              </a:lnSpc>
+            </a:pPr>
+            <a:r>
+              <a:rPr sz="2100" b="1">
+                <a:solidFill>
+                  <a:srgbClr val="2A78D6"/>
+                </a:solidFill>
+                <a:latin typeface="Arial"/>
+              </a:rPr>
+              <a:t>Onde o modelo erra. </a:t>
+            </a:r>
+            <a:r>
+              <a:rPr sz="2100" b="0">
+                <a:solidFill>
+                  <a:srgbClr val="4E4E4E"/>
+                </a:solidFill>
+                <a:latin typeface="Arial"/>
+              </a:rPr>
+              <a:t>As duas disfonias funcionais se trocam entre si (27 e 10 casos) e vazam para Normal.</a:t>
+            </a:r>
+          </a:p>
+        </p:txBody>
+      </p:sp>
+      <p:pic>
+        <p:nvPicPr>
+          <p:cNvPr id="167" name="Picture 166" descr="poster_f1_classes.png"/>
+          <p:cNvPicPr>
+            <a:picLocks noChangeAspect="1"/>
+          </p:cNvPicPr>
+          <p:nvPr/>
+        </p:nvPicPr>
+        <p:blipFill>
+          <a:blip r:embed="rId13"/>
+          <a:stretch>
+            <a:fillRect/>
+          </a:stretch>
+        </p:blipFill>
+        <p:spPr>
+          <a:xfrm>
+            <a:off x="10080000" y="25955999"/>
+            <a:ext cx="7912800" cy="5035418"/>
+          </a:xfrm>
+          <a:prstGeom prst="rect">
+            <a:avLst/>
+          </a:prstGeom>
+        </p:spPr>
+      </p:pic>
+      <p:sp>
+        <p:nvSpPr>
+          <p:cNvPr id="168" name="TextBox 167"/>
+          <p:cNvSpPr txBox="1"/>
+          <p:nvPr/>
+        </p:nvSpPr>
+        <p:spPr>
+          <a:xfrm>
+            <a:off x="10080000" y="31027417"/>
+            <a:ext cx="7912800" cy="684000"/>
+          </a:xfrm>
+          <a:prstGeom prst="rect">
+            <a:avLst/>
+          </a:prstGeom>
+          <a:noFill/>
+        </p:spPr>
+        <p:txBody>
+          <a:bodyPr wrap="square" anchor="t" lIns="0" rIns="0" tIns="0" bIns="0">
+            <a:spAutoFit/>
+          </a:bodyPr>
+          <a:lstStyle/>
+          <a:p>
+            <a:pPr algn="l">
+              <a:lnSpc>
+                <a:spcPct val="90000"/>
+              </a:lnSpc>
+            </a:pPr>
+            <a:r>
+              <a:rPr sz="2100" b="1">
+                <a:solidFill>
+                  <a:srgbClr val="EB6834"/>
+                </a:solidFill>
+                <a:latin typeface="Arial"/>
+              </a:rPr>
+              <a:t>Desempenho por classe. </a:t>
+            </a:r>
+            <a:r>
+              <a:rPr sz="2100" b="0">
+                <a:solidFill>
+                  <a:srgbClr val="4E4E4E"/>
+                </a:solidFill>
+                <a:latin typeface="Arial"/>
+              </a:rPr>
+              <a:t>Normal e Reinke acima da média; as funcionais, abaixo.</a:t>
+            </a:r>
+          </a:p>
+        </p:txBody>
+      </p:sp>
+      <p:sp>
+        <p:nvSpPr>
+          <p:cNvPr id="169" name="Rounded Rectangle 168"/>
+          <p:cNvSpPr/>
+          <p:nvPr/>
+        </p:nvSpPr>
+        <p:spPr>
+          <a:xfrm>
+            <a:off x="18568800" y="25955999"/>
+            <a:ext cx="12895200" cy="5035418"/>
+          </a:xfrm>
+          <a:prstGeom prst="roundRect">
+            <a:avLst>
+              <a:gd name="adj" fmla="val 16000"/>
+            </a:avLst>
+          </a:prstGeom>
+          <a:solidFill>
+            <a:srgbClr val="FFFFFF"/>
+          </a:solidFill>
+          <a:ln w="20320">
+            <a:solidFill>
+              <a:srgbClr val="D8DDE4"/>
+            </a:solidFill>
+          </a:ln>
+          <a:effectLst/>
+        </p:spPr>
+        <p:style>
+          <a:lnRef idx="1">
+            <a:schemeClr val="accent1"/>
+          </a:lnRef>
+          <a:fillRef idx="3">
+            <a:schemeClr val="accent1"/>
+          </a:fillRef>
+          <a:effectRef idx="2">
+            <a:schemeClr val="accent1"/>
+          </a:effectRef>
+          <a:fontRef idx="minor">
+            <a:schemeClr val="lt1"/>
+          </a:fontRef>
+        </p:style>
+        <p:txBody>
+          <a:bodyPr rtlCol="0" anchor="ctr" wrap="square" lIns="251999" rIns="251999" tIns="144000" bIns="144000"/>
+          <a:lstStyle/>
+          <a:p>
+            <a:pPr algn="ctr">
+              <a:lnSpc>
+                <a:spcPct val="95000"/>
+              </a:lnSpc>
+            </a:pPr>
+            <a:r>
+              <a:rPr sz="2600" b="1">
+                <a:solidFill>
+                  <a:srgbClr val="1F3B57"/>
+                </a:solidFill>
+                <a:latin typeface="Arial"/>
+              </a:rPr>
+              <a:t>O TETO ACÚSTICO</a:t>
+            </a:r>
+          </a:p>
+          <a:p>
+            <a:pPr algn="ctr">
+              <a:lnSpc>
+                <a:spcPct val="95000"/>
+              </a:lnSpc>
+            </a:pPr>
+            <a:r>
+              <a:rPr sz="1000" b="0">
+                <a:solidFill>
+                  <a:srgbClr val="1E1E1E"/>
+                </a:solidFill>
+                <a:latin typeface="Arial"/>
+              </a:rPr>
+              <a:t/>
+            </a:r>
+          </a:p>
+          <a:p>
+            <a:pPr algn="ctr">
+              <a:lnSpc>
+                <a:spcPct val="95000"/>
+              </a:lnSpc>
+            </a:pPr>
+            <a:r>
+              <a:rPr sz="2000" b="0">
+                <a:solidFill>
+                  <a:srgbClr val="1E1E1E"/>
+                </a:solidFill>
+                <a:latin typeface="Arial"/>
+              </a:rPr>
+              <a:t>Disfonia psicogênica e funcional</a:t>
+            </a:r>
+          </a:p>
+          <a:p>
+            <a:pPr algn="ctr">
+              <a:lnSpc>
+                <a:spcPct val="95000"/>
+              </a:lnSpc>
+            </a:pPr>
+            <a:r>
+              <a:rPr sz="2100" b="1">
+                <a:solidFill>
+                  <a:srgbClr val="1F3B57"/>
+                </a:solidFill>
+                <a:latin typeface="Arial"/>
+              </a:rPr>
+              <a:t>não têm lesão estrutural</a:t>
+            </a:r>
+          </a:p>
+          <a:p>
+            <a:pPr algn="ctr">
+              <a:lnSpc>
+                <a:spcPct val="95000"/>
+              </a:lnSpc>
+            </a:pPr>
+            <a:r>
+              <a:rPr sz="2000" b="0">
+                <a:solidFill>
+                  <a:srgbClr val="1E1E1E"/>
+                </a:solidFill>
+                <a:latin typeface="Arial"/>
+              </a:rPr>
+              <a:t>— a voz sozinha não as separa.</a:t>
+            </a:r>
+          </a:p>
+          <a:p>
+            <a:pPr algn="ctr">
+              <a:lnSpc>
+                <a:spcPct val="95000"/>
+              </a:lnSpc>
+            </a:pPr>
+            <a:r>
+              <a:rPr sz="1000" b="0">
+                <a:solidFill>
+                  <a:srgbClr val="1E1E1E"/>
+                </a:solidFill>
+                <a:latin typeface="Arial"/>
+              </a:rPr>
+              <a:t/>
+            </a:r>
+          </a:p>
+          <a:p>
+            <a:pPr algn="ctr">
+              <a:lnSpc>
+                <a:spcPct val="95000"/>
+              </a:lnSpc>
+            </a:pPr>
+            <a:r>
+              <a:rPr sz="2100" b="1">
+                <a:solidFill>
+                  <a:srgbClr val="C02E2B"/>
+                </a:solidFill>
+                <a:latin typeface="Arial"/>
+              </a:rPr>
+              <a:t>37 dos 203 pacientes</a:t>
+            </a:r>
+            <a:r>
+              <a:rPr sz="2000" b="0">
+                <a:solidFill>
+                  <a:srgbClr val="1E1E1E"/>
+                </a:solidFill>
+                <a:latin typeface="Arial"/>
+              </a:rPr>
+              <a:t> dessas</a:t>
+            </a:r>
+          </a:p>
+          <a:p>
+            <a:pPr algn="ctr">
+              <a:lnSpc>
+                <a:spcPct val="95000"/>
+              </a:lnSpc>
+            </a:pPr>
+            <a:r>
+              <a:rPr sz="2000" b="0">
+                <a:solidFill>
+                  <a:srgbClr val="1E1E1E"/>
+                </a:solidFill>
+                <a:latin typeface="Arial"/>
+              </a:rPr>
+              <a:t>duas classes foram trocados entre si.</a:t>
+            </a:r>
+          </a:p>
+          <a:p>
+            <a:pPr algn="ctr">
+              <a:lnSpc>
+                <a:spcPct val="95000"/>
+              </a:lnSpc>
+            </a:pPr>
+            <a:r>
+              <a:rPr sz="1000" b="0">
+                <a:solidFill>
+                  <a:srgbClr val="1E1E1E"/>
+                </a:solidFill>
+                <a:latin typeface="Arial"/>
+              </a:rPr>
+              <a:t/>
+            </a:r>
+          </a:p>
+          <a:p>
+            <a:pPr algn="ctr">
+              <a:lnSpc>
+                <a:spcPct val="95000"/>
+              </a:lnSpc>
+            </a:pPr>
+            <a:r>
+              <a:rPr sz="1900" b="0">
+                <a:solidFill>
+                  <a:srgbClr val="4E4E4E"/>
+                </a:solidFill>
+                <a:latin typeface="Arial"/>
+              </a:rPr>
+              <a:t>Nos 12 braços de arquitetura</a:t>
+            </a:r>
+          </a:p>
+          <a:p>
+            <a:pPr algn="ctr">
+              <a:lnSpc>
+                <a:spcPct val="95000"/>
+              </a:lnSpc>
+            </a:pPr>
+            <a:r>
+              <a:rPr sz="1900" b="0">
+                <a:solidFill>
+                  <a:srgbClr val="4E4E4E"/>
+                </a:solidFill>
+                <a:latin typeface="Arial"/>
+              </a:rPr>
+              <a:t>testados, o melhor F1 nessas classes</a:t>
+            </a:r>
+          </a:p>
+          <a:p>
+            <a:pPr algn="ctr">
+              <a:lnSpc>
+                <a:spcPct val="95000"/>
+              </a:lnSpc>
+            </a:pPr>
+            <a:r>
+              <a:rPr sz="1900" b="0">
+                <a:solidFill>
+                  <a:srgbClr val="4E4E4E"/>
+                </a:solidFill>
+                <a:latin typeface="Arial"/>
+              </a:rPr>
+              <a:t>foi 0,36 e 0,27.</a:t>
+            </a:r>
+          </a:p>
+        </p:txBody>
+      </p:sp>
+      <p:sp>
+        <p:nvSpPr>
+          <p:cNvPr id="170" name="TextBox 169"/>
+          <p:cNvSpPr txBox="1"/>
+          <p:nvPr/>
+        </p:nvSpPr>
+        <p:spPr>
+          <a:xfrm>
+            <a:off x="936000" y="31927417"/>
+            <a:ext cx="18927360" cy="503999"/>
+          </a:xfrm>
+          <a:prstGeom prst="rect">
+            <a:avLst/>
+          </a:prstGeom>
+          <a:noFill/>
+        </p:spPr>
+        <p:txBody>
+          <a:bodyPr wrap="square" anchor="ctr" lIns="0" rIns="0" tIns="0" bIns="0">
+            <a:spAutoFit/>
+          </a:bodyPr>
+          <a:lstStyle/>
+          <a:p>
+            <a:pPr algn="l">
+              <a:lnSpc>
+                <a:spcPct val="92000"/>
+              </a:lnSpc>
+            </a:pPr>
+            <a:r>
+              <a:rPr sz="2900" b="1">
+                <a:solidFill>
+                  <a:srgbClr val="1F3B57"/>
+                </a:solidFill>
+                <a:latin typeface="Arial"/>
+              </a:rPr>
+              <a:t>EVIDÊNCIA A/B — </a:t>
+            </a:r>
+            <a:r>
+              <a:rPr sz="2300" b="0">
+                <a:solidFill>
+                  <a:srgbClr val="4E4E4E"/>
+                </a:solidFill>
+                <a:latin typeface="Arial"/>
+              </a:rPr>
+              <a:t>mesma seed, mesmas 5 dobras, decisão por regra fixa</a:t>
+            </a:r>
+          </a:p>
+        </p:txBody>
+      </p:sp>
+      <p:sp>
+        <p:nvSpPr>
+          <p:cNvPr id="171" name="TextBox 170"/>
+          <p:cNvSpPr txBox="1"/>
+          <p:nvPr/>
+        </p:nvSpPr>
+        <p:spPr>
+          <a:xfrm>
+            <a:off x="16155167" y="31927417"/>
+            <a:ext cx="15308832" cy="503999"/>
+          </a:xfrm>
+          <a:prstGeom prst="rect">
+            <a:avLst/>
+          </a:prstGeom>
+          <a:noFill/>
+        </p:spPr>
+        <p:txBody>
+          <a:bodyPr wrap="square" anchor="ctr" lIns="0" rIns="0" tIns="0" bIns="0">
+            <a:spAutoFit/>
+          </a:bodyPr>
+          <a:lstStyle/>
+          <a:p>
+            <a:pPr algn="l">
+              <a:lnSpc>
+                <a:spcPct val="92000"/>
+              </a:lnSpc>
+            </a:pPr>
+            <a:r>
+              <a:rPr sz="2300" b="1">
+                <a:solidFill>
+                  <a:srgbClr val="179669"/>
+                </a:solidFill>
+                <a:latin typeface="Arial"/>
+              </a:rPr>
+              <a:t>GAP 3 — </a:t>
+            </a:r>
+            <a:r>
+              <a:rPr sz="2200" b="0">
+                <a:solidFill>
+                  <a:srgbClr val="4E4E4E"/>
+                </a:solidFill>
+                <a:latin typeface="Arial"/>
+              </a:rPr>
+              <a:t>profundidade da rede: 12 braços (4 arquiteturas × 3 regularizações)</a:t>
+            </a:r>
+          </a:p>
+        </p:txBody>
+      </p:sp>
+      <p:pic>
+        <p:nvPicPr>
+          <p:cNvPr id="172" name="Picture 171" descr="poster_gaps_ab.png"/>
+          <p:cNvPicPr>
+            <a:picLocks noChangeAspect="1"/>
+          </p:cNvPicPr>
+          <p:nvPr/>
+        </p:nvPicPr>
+        <p:blipFill>
+          <a:blip r:embed="rId14"/>
+          <a:stretch>
+            <a:fillRect/>
+          </a:stretch>
+        </p:blipFill>
+        <p:spPr>
+          <a:xfrm>
+            <a:off x="936000" y="32539417"/>
+            <a:ext cx="14355167" cy="5019794"/>
+          </a:xfrm>
+          <a:prstGeom prst="rect">
+            <a:avLst/>
+          </a:prstGeom>
+        </p:spPr>
+      </p:pic>
+      <p:pic>
+        <p:nvPicPr>
+          <p:cNvPr id="173" name="Picture 172" descr="poster_arquiteturas.png"/>
+          <p:cNvPicPr>
+            <a:picLocks noChangeAspect="1"/>
+          </p:cNvPicPr>
+          <p:nvPr/>
+        </p:nvPicPr>
+        <p:blipFill>
+          <a:blip r:embed="rId15"/>
+          <a:stretch>
+            <a:fillRect/>
+          </a:stretch>
+        </p:blipFill>
+        <p:spPr>
+          <a:xfrm>
+            <a:off x="16155167" y="32539417"/>
+            <a:ext cx="15308832" cy="4685232"/>
+          </a:xfrm>
+          <a:prstGeom prst="rect">
+            <a:avLst/>
+          </a:prstGeom>
+        </p:spPr>
+      </p:pic>
+      <p:sp>
+        <p:nvSpPr>
+          <p:cNvPr id="174" name="Rounded Rectangle 173"/>
+          <p:cNvSpPr/>
+          <p:nvPr/>
+        </p:nvSpPr>
+        <p:spPr>
+          <a:xfrm>
+            <a:off x="936000" y="37494000"/>
+            <a:ext cx="180000" cy="648000"/>
+          </a:xfrm>
+          <a:prstGeom prst="roundRect">
+            <a:avLst>
+              <a:gd name="adj" fmla="val 50000"/>
+            </a:avLst>
+          </a:prstGeom>
+          <a:solidFill>
+            <a:srgbClr val="008300"/>
+          </a:solidFill>
+          <a:ln>
+            <a:noFill/>
+          </a:ln>
+          <a:effectLst/>
+        </p:spPr>
+        <p:style>
+          <a:lnRef idx="1">
+            <a:schemeClr val="accent1"/>
+          </a:lnRef>
+          <a:fillRef idx="3">
+            <a:schemeClr val="accent1"/>
+          </a:fillRef>
+          <a:effectRef idx="2">
+            <a:schemeClr val="accent1"/>
+          </a:effectRef>
+          <a:fontRef idx="minor">
+            <a:schemeClr val="lt1"/>
+          </a:fontRef>
+        </p:style>
+        <p:txBody>
+          <a:bodyPr rtlCol="0" anchor="ctr" wrap="square"/>
+          <a:lstStyle/>
+          <a:p>
+            <a:pPr algn="ctr"/>
+          </a:p>
+        </p:txBody>
+      </p:sp>
+      <p:sp>
+        <p:nvSpPr>
+          <p:cNvPr id="175" name="TextBox 174"/>
+          <p:cNvSpPr txBox="1"/>
+          <p:nvPr/>
+        </p:nvSpPr>
+        <p:spPr>
+          <a:xfrm>
+            <a:off x="1314000" y="37440000"/>
+            <a:ext cx="15462000" cy="792000"/>
+          </a:xfrm>
+          <a:prstGeom prst="rect">
+            <a:avLst/>
+          </a:prstGeom>
+          <a:noFill/>
+        </p:spPr>
+        <p:txBody>
+          <a:bodyPr wrap="square" anchor="ctr" lIns="0" rIns="0" tIns="0" bIns="0">
+            <a:spAutoFit/>
+          </a:bodyPr>
+          <a:lstStyle/>
+          <a:p>
+            <a:pPr algn="l">
+              <a:lnSpc>
+                <a:spcPct val="92000"/>
+              </a:lnSpc>
+            </a:pPr>
+            <a:r>
+              <a:rPr sz="5000" b="1">
+                <a:solidFill>
+                  <a:srgbClr val="1F3B57"/>
+                </a:solidFill>
+                <a:latin typeface="Arial"/>
+              </a:rPr>
+              <a:t>CONCLUSÃO</a:t>
+            </a:r>
+          </a:p>
+        </p:txBody>
+      </p:sp>
+      <p:sp>
+        <p:nvSpPr>
+          <p:cNvPr id="176" name="Rounded Rectangle 175"/>
+          <p:cNvSpPr/>
+          <p:nvPr/>
+        </p:nvSpPr>
+        <p:spPr>
+          <a:xfrm>
+            <a:off x="17496000" y="37494000"/>
+            <a:ext cx="180000" cy="648000"/>
+          </a:xfrm>
+          <a:prstGeom prst="roundRect">
+            <a:avLst>
+              <a:gd name="adj" fmla="val 50000"/>
+            </a:avLst>
+          </a:prstGeom>
+          <a:solidFill>
+            <a:srgbClr val="1F3B57"/>
+          </a:solidFill>
+          <a:ln>
+            <a:noFill/>
+          </a:ln>
+          <a:effectLst/>
+        </p:spPr>
+        <p:style>
+          <a:lnRef idx="1">
+            <a:schemeClr val="accent1"/>
+          </a:lnRef>
+          <a:fillRef idx="3">
+            <a:schemeClr val="accent1"/>
+          </a:fillRef>
+          <a:effectRef idx="2">
+            <a:schemeClr val="accent1"/>
+          </a:effectRef>
+          <a:fontRef idx="minor">
+            <a:schemeClr val="lt1"/>
+          </a:fontRef>
+        </p:style>
+        <p:txBody>
+          <a:bodyPr rtlCol="0" anchor="ctr" wrap="square"/>
+          <a:lstStyle/>
+          <a:p>
+            <a:pPr algn="ctr"/>
+          </a:p>
+        </p:txBody>
+      </p:sp>
+      <p:sp>
+        <p:nvSpPr>
+          <p:cNvPr id="177" name="TextBox 176"/>
+          <p:cNvSpPr txBox="1"/>
+          <p:nvPr/>
+        </p:nvSpPr>
+        <p:spPr>
+          <a:xfrm>
+            <a:off x="17874000" y="37440000"/>
+            <a:ext cx="13590000" cy="792000"/>
+          </a:xfrm>
+          <a:prstGeom prst="rect">
+            <a:avLst/>
+          </a:prstGeom>
+          <a:noFill/>
+        </p:spPr>
+        <p:txBody>
+          <a:bodyPr wrap="square" anchor="ctr" lIns="0" rIns="0" tIns="0" bIns="0">
+            <a:spAutoFit/>
+          </a:bodyPr>
+          <a:lstStyle/>
+          <a:p>
+            <a:pPr algn="l">
+              <a:lnSpc>
+                <a:spcPct val="92000"/>
+              </a:lnSpc>
+            </a:pPr>
+            <a:r>
+              <a:rPr sz="5000" b="1">
+                <a:solidFill>
+                  <a:srgbClr val="1F3B57"/>
+                </a:solidFill>
+                <a:latin typeface="Arial"/>
+              </a:rPr>
+              <a:t>REFERÊNCIAS</a:t>
+            </a:r>
+          </a:p>
+        </p:txBody>
+      </p:sp>
+      <p:sp>
+        <p:nvSpPr>
+          <p:cNvPr id="178" name="Rounded Rectangle 177"/>
+          <p:cNvSpPr/>
+          <p:nvPr/>
+        </p:nvSpPr>
+        <p:spPr>
+          <a:xfrm>
+            <a:off x="936000" y="38376000"/>
+            <a:ext cx="3690000" cy="2015999"/>
+          </a:xfrm>
+          <a:prstGeom prst="roundRect">
+            <a:avLst>
+              <a:gd name="adj" fmla="val 16000"/>
+            </a:avLst>
+          </a:prstGeom>
+          <a:solidFill>
+            <a:srgbClr val="ECF6EC"/>
+          </a:solidFill>
+          <a:ln w="22860">
+            <a:solidFill>
+              <a:srgbClr val="008300"/>
+            </a:solidFill>
+          </a:ln>
+          <a:effectLst/>
+        </p:spPr>
+        <p:style>
+          <a:lnRef idx="1">
+            <a:schemeClr val="accent1"/>
+          </a:lnRef>
+          <a:fillRef idx="3">
+            <a:schemeClr val="accent1"/>
+          </a:fillRef>
+          <a:effectRef idx="2">
+            <a:schemeClr val="accent1"/>
+          </a:effectRef>
+          <a:fontRef idx="minor">
+            <a:schemeClr val="lt1"/>
+          </a:fontRef>
+        </p:style>
+        <p:txBody>
+          <a:bodyPr rtlCol="0" anchor="ctr" wrap="square" lIns="125999" rIns="125999" tIns="72000" bIns="72000"/>
+          <a:lstStyle/>
+          <a:p>
+            <a:pPr algn="ctr">
+              <a:lnSpc>
+                <a:spcPct val="94000"/>
+              </a:lnSpc>
+            </a:pPr>
+            <a:r>
+              <a:rPr sz="2100" b="1">
+                <a:solidFill>
+                  <a:srgbClr val="008300"/>
+                </a:solidFill>
+                <a:latin typeface="Arial"/>
+              </a:rPr>
+              <a:t>Triagem funciona.</a:t>
+            </a:r>
+          </a:p>
+          <a:p>
+            <a:pPr algn="ctr">
+              <a:lnSpc>
+                <a:spcPct val="94000"/>
+              </a:lnSpc>
+            </a:pPr>
+            <a:r>
+              <a:rPr sz="600" b="0">
+                <a:solidFill>
+                  <a:srgbClr val="1E1E1E"/>
+                </a:solidFill>
+                <a:latin typeface="Arial"/>
+              </a:rPr>
+              <a:t/>
+            </a:r>
+          </a:p>
+          <a:p>
+            <a:pPr algn="ctr">
+              <a:lnSpc>
+                <a:spcPct val="94000"/>
+              </a:lnSpc>
+            </a:pPr>
+            <a:r>
+              <a:rPr sz="1800" b="0">
+                <a:solidFill>
+                  <a:srgbClr val="1E1E1E"/>
+                </a:solidFill>
+                <a:latin typeface="Arial"/>
+              </a:rPr>
+              <a:t>Saudável × patológico se separa: F1 0,867, recall 92%.</a:t>
+            </a:r>
+          </a:p>
+        </p:txBody>
+      </p:sp>
+      <p:sp>
+        <p:nvSpPr>
+          <p:cNvPr id="179" name="Rounded Rectangle 178"/>
+          <p:cNvSpPr/>
+          <p:nvPr/>
+        </p:nvSpPr>
+        <p:spPr>
+          <a:xfrm>
+            <a:off x="4986000" y="38376000"/>
+            <a:ext cx="3690000" cy="2015999"/>
+          </a:xfrm>
+          <a:prstGeom prst="roundRect">
+            <a:avLst>
+              <a:gd name="adj" fmla="val 16000"/>
+            </a:avLst>
+          </a:prstGeom>
+          <a:solidFill>
+            <a:srgbClr val="E8F1FC"/>
+          </a:solidFill>
+          <a:ln w="22860">
+            <a:solidFill>
+              <a:srgbClr val="2A78D6"/>
+            </a:solidFill>
+          </a:ln>
+          <a:effectLst/>
+        </p:spPr>
+        <p:style>
+          <a:lnRef idx="1">
+            <a:schemeClr val="accent1"/>
+          </a:lnRef>
+          <a:fillRef idx="3">
+            <a:schemeClr val="accent1"/>
+          </a:fillRef>
+          <a:effectRef idx="2">
+            <a:schemeClr val="accent1"/>
+          </a:effectRef>
+          <a:fontRef idx="minor">
+            <a:schemeClr val="lt1"/>
+          </a:fontRef>
+        </p:style>
+        <p:txBody>
+          <a:bodyPr rtlCol="0" anchor="ctr" wrap="square" lIns="125999" rIns="125999" tIns="72000" bIns="72000"/>
+          <a:lstStyle/>
+          <a:p>
+            <a:pPr algn="ctr">
+              <a:lnSpc>
+                <a:spcPct val="94000"/>
+              </a:lnSpc>
+            </a:pPr>
+            <a:r>
+              <a:rPr sz="2100" b="1">
+                <a:solidFill>
+                  <a:srgbClr val="2A78D6"/>
+                </a:solidFill>
+                <a:latin typeface="Arial"/>
+              </a:rPr>
+              <a:t>Reinke é separável.</a:t>
+            </a:r>
+          </a:p>
+          <a:p>
+            <a:pPr algn="ctr">
+              <a:lnSpc>
+                <a:spcPct val="94000"/>
+              </a:lnSpc>
+            </a:pPr>
+            <a:r>
+              <a:rPr sz="600" b="0">
+                <a:solidFill>
+                  <a:srgbClr val="1E1E1E"/>
+                </a:solidFill>
+                <a:latin typeface="Arial"/>
+              </a:rPr>
+              <a:t/>
+            </a:r>
+          </a:p>
+          <a:p>
+            <a:pPr algn="ctr">
+              <a:lnSpc>
+                <a:spcPct val="94000"/>
+              </a:lnSpc>
+            </a:pPr>
+            <a:r>
+              <a:rPr sz="1800" b="0">
+                <a:solidFill>
+                  <a:srgbClr val="1E1E1E"/>
+                </a:solidFill>
+                <a:latin typeface="Arial"/>
+              </a:rPr>
+              <a:t>A lesão estrutural deixa marca acústica (F1 0,456).</a:t>
+            </a:r>
+          </a:p>
+        </p:txBody>
+      </p:sp>
+      <p:sp>
+        <p:nvSpPr>
+          <p:cNvPr id="180" name="Rounded Rectangle 179"/>
+          <p:cNvSpPr/>
+          <p:nvPr/>
+        </p:nvSpPr>
+        <p:spPr>
+          <a:xfrm>
+            <a:off x="9036000" y="38376000"/>
+            <a:ext cx="3690000" cy="2015999"/>
+          </a:xfrm>
+          <a:prstGeom prst="roundRect">
+            <a:avLst>
+              <a:gd name="adj" fmla="val 16000"/>
+            </a:avLst>
+          </a:prstGeom>
+          <a:solidFill>
+            <a:srgbClr val="FDECEB"/>
+          </a:solidFill>
+          <a:ln w="22860">
+            <a:solidFill>
+              <a:srgbClr val="C02E2B"/>
+            </a:solidFill>
+          </a:ln>
+          <a:effectLst/>
+        </p:spPr>
+        <p:style>
+          <a:lnRef idx="1">
+            <a:schemeClr val="accent1"/>
+          </a:lnRef>
+          <a:fillRef idx="3">
+            <a:schemeClr val="accent1"/>
+          </a:fillRef>
+          <a:effectRef idx="2">
+            <a:schemeClr val="accent1"/>
+          </a:effectRef>
+          <a:fontRef idx="minor">
+            <a:schemeClr val="lt1"/>
+          </a:fontRef>
+        </p:style>
+        <p:txBody>
+          <a:bodyPr rtlCol="0" anchor="ctr" wrap="square" lIns="125999" rIns="125999" tIns="72000" bIns="72000"/>
+          <a:lstStyle/>
+          <a:p>
+            <a:pPr algn="ctr">
+              <a:lnSpc>
+                <a:spcPct val="94000"/>
+              </a:lnSpc>
+            </a:pPr>
+            <a:r>
+              <a:rPr sz="2100" b="1">
+                <a:solidFill>
+                  <a:srgbClr val="C02E2B"/>
+                </a:solidFill>
+                <a:latin typeface="Arial"/>
+              </a:rPr>
+              <a:t>Teto nas funcionais.</a:t>
+            </a:r>
+          </a:p>
+          <a:p>
+            <a:pPr algn="ctr">
+              <a:lnSpc>
+                <a:spcPct val="94000"/>
+              </a:lnSpc>
+            </a:pPr>
+            <a:r>
+              <a:rPr sz="600" b="0">
+                <a:solidFill>
+                  <a:srgbClr val="1E1E1E"/>
+                </a:solidFill>
+                <a:latin typeface="Arial"/>
+              </a:rPr>
+              <a:t/>
+            </a:r>
+          </a:p>
+          <a:p>
+            <a:pPr algn="ctr">
+              <a:lnSpc>
+                <a:spcPct val="94000"/>
+              </a:lnSpc>
+            </a:pPr>
+            <a:r>
+              <a:rPr sz="1800" b="0">
+                <a:solidFill>
+                  <a:srgbClr val="1E1E1E"/>
+                </a:solidFill>
+                <a:latin typeface="Arial"/>
+              </a:rPr>
+              <a:t>Psicogênica (0,330) × funcional (0,242) exigem sinal além da voz.</a:t>
+            </a:r>
+          </a:p>
+        </p:txBody>
+      </p:sp>
+      <p:sp>
+        <p:nvSpPr>
+          <p:cNvPr id="181" name="Rounded Rectangle 180"/>
+          <p:cNvSpPr/>
+          <p:nvPr/>
+        </p:nvSpPr>
+        <p:spPr>
+          <a:xfrm>
+            <a:off x="13086000" y="38376000"/>
+            <a:ext cx="3690000" cy="2015999"/>
+          </a:xfrm>
+          <a:prstGeom prst="roundRect">
+            <a:avLst>
+              <a:gd name="adj" fmla="val 16000"/>
+            </a:avLst>
+          </a:prstGeom>
+          <a:solidFill>
+            <a:srgbClr val="F2F4F7"/>
+          </a:solidFill>
+          <a:ln w="22860">
+            <a:solidFill>
+              <a:srgbClr val="1F3B57"/>
+            </a:solidFill>
+          </a:ln>
+          <a:effectLst/>
+        </p:spPr>
+        <p:style>
+          <a:lnRef idx="1">
+            <a:schemeClr val="accent1"/>
+          </a:lnRef>
+          <a:fillRef idx="3">
+            <a:schemeClr val="accent1"/>
+          </a:fillRef>
+          <a:effectRef idx="2">
+            <a:schemeClr val="accent1"/>
+          </a:effectRef>
+          <a:fontRef idx="minor">
+            <a:schemeClr val="lt1"/>
+          </a:fontRef>
+        </p:style>
+        <p:txBody>
+          <a:bodyPr rtlCol="0" anchor="ctr" wrap="square" lIns="125999" rIns="125999" tIns="72000" bIns="72000"/>
+          <a:lstStyle/>
+          <a:p>
+            <a:pPr algn="ctr">
+              <a:lnSpc>
+                <a:spcPct val="94000"/>
+              </a:lnSpc>
+            </a:pPr>
+            <a:r>
+              <a:rPr sz="2100" b="1">
+                <a:solidFill>
+                  <a:srgbClr val="1F3B57"/>
+                </a:solidFill>
+                <a:latin typeface="Arial"/>
+              </a:rPr>
+              <a:t>Rigor acima do ganho.</a:t>
+            </a:r>
+          </a:p>
+          <a:p>
+            <a:pPr algn="ctr">
+              <a:lnSpc>
+                <a:spcPct val="94000"/>
+              </a:lnSpc>
+            </a:pPr>
+            <a:r>
+              <a:rPr sz="600" b="0">
+                <a:solidFill>
+                  <a:srgbClr val="1E1E1E"/>
+                </a:solidFill>
+                <a:latin typeface="Arial"/>
+              </a:rPr>
+              <a:t/>
+            </a:r>
+          </a:p>
+          <a:p>
+            <a:pPr algn="ctr">
+              <a:lnSpc>
+                <a:spcPct val="94000"/>
+              </a:lnSpc>
+            </a:pPr>
+            <a:r>
+              <a:rPr sz="1800" b="0">
+                <a:solidFill>
+                  <a:srgbClr val="1E1E1E"/>
+                </a:solidFill>
+                <a:latin typeface="Arial"/>
+              </a:rPr>
+              <a:t>Das 3 técnicas propostas, 1 foi rejeitada pela própria evidência A/B.</a:t>
+            </a:r>
+          </a:p>
+        </p:txBody>
+      </p:sp>
+      <p:sp>
+        <p:nvSpPr>
+          <p:cNvPr id="182" name="TextBox 181"/>
+          <p:cNvSpPr txBox="1"/>
+          <p:nvPr/>
+        </p:nvSpPr>
+        <p:spPr>
+          <a:xfrm>
+            <a:off x="17496000" y="38376000"/>
+            <a:ext cx="11736000" cy="486000"/>
+          </a:xfrm>
+          <a:prstGeom prst="rect">
+            <a:avLst/>
+          </a:prstGeom>
+          <a:noFill/>
+        </p:spPr>
+        <p:txBody>
+          <a:bodyPr wrap="square" anchor="t" lIns="0" rIns="0" tIns="0" bIns="0">
+            <a:spAutoFit/>
+          </a:bodyPr>
+          <a:lstStyle/>
+          <a:p>
+            <a:pPr algn="l">
+              <a:lnSpc>
+                <a:spcPct val="90000"/>
+              </a:lnSpc>
+            </a:pPr>
+            <a:r>
+              <a:rPr sz="1700" b="1">
+                <a:solidFill>
+                  <a:srgbClr val="1E1E1E"/>
+                </a:solidFill>
+                <a:latin typeface="Arial"/>
+              </a:rPr>
+              <a:t>BARRY, W. J.; PÜTZER, M. </a:t>
+            </a:r>
+            <a:r>
+              <a:rPr sz="1700" b="0">
+                <a:solidFill>
+                  <a:srgbClr val="4E4E4E"/>
+                </a:solidFill>
+                <a:latin typeface="Arial"/>
+              </a:rPr>
+              <a:t>Saarbrücken Voice Database. Univ. des Saarlandes, 2007.</a:t>
+            </a:r>
+          </a:p>
+        </p:txBody>
+      </p:sp>
+      <p:sp>
+        <p:nvSpPr>
+          <p:cNvPr id="183" name="TextBox 182"/>
+          <p:cNvSpPr txBox="1"/>
+          <p:nvPr/>
+        </p:nvSpPr>
+        <p:spPr>
+          <a:xfrm>
+            <a:off x="17496000" y="38800800"/>
+            <a:ext cx="11736000" cy="486000"/>
+          </a:xfrm>
+          <a:prstGeom prst="rect">
+            <a:avLst/>
+          </a:prstGeom>
+          <a:noFill/>
+        </p:spPr>
+        <p:txBody>
+          <a:bodyPr wrap="square" anchor="t" lIns="0" rIns="0" tIns="0" bIns="0">
+            <a:spAutoFit/>
+          </a:bodyPr>
+          <a:lstStyle/>
+          <a:p>
+            <a:pPr algn="l">
+              <a:lnSpc>
+                <a:spcPct val="90000"/>
+              </a:lnSpc>
+            </a:pPr>
+            <a:r>
+              <a:rPr sz="1700" b="1">
+                <a:solidFill>
+                  <a:srgbClr val="1E1E1E"/>
+                </a:solidFill>
+                <a:latin typeface="Arial"/>
+              </a:rPr>
+              <a:t>HAN, H.; WANG, W.-Y.; MAO, B.-H. </a:t>
+            </a:r>
+            <a:r>
+              <a:rPr sz="1700" b="0">
+                <a:solidFill>
+                  <a:srgbClr val="4E4E4E"/>
+                </a:solidFill>
+                <a:latin typeface="Arial"/>
+              </a:rPr>
+              <a:t>Borderline-SMOTE. LNCS, v. 3644, p. 878-887, 2005.</a:t>
+            </a:r>
+          </a:p>
+        </p:txBody>
+      </p:sp>
+      <p:sp>
+        <p:nvSpPr>
+          <p:cNvPr id="184" name="TextBox 183"/>
+          <p:cNvSpPr txBox="1"/>
+          <p:nvPr/>
+        </p:nvSpPr>
+        <p:spPr>
+          <a:xfrm>
+            <a:off x="17496000" y="39225600"/>
+            <a:ext cx="11736000" cy="486000"/>
+          </a:xfrm>
+          <a:prstGeom prst="rect">
+            <a:avLst/>
+          </a:prstGeom>
+          <a:noFill/>
+        </p:spPr>
+        <p:txBody>
+          <a:bodyPr wrap="square" anchor="t" lIns="0" rIns="0" tIns="0" bIns="0">
+            <a:spAutoFit/>
+          </a:bodyPr>
+          <a:lstStyle/>
+          <a:p>
+            <a:pPr algn="l">
+              <a:lnSpc>
+                <a:spcPct val="90000"/>
+              </a:lnSpc>
+            </a:pPr>
+            <a:r>
+              <a:rPr sz="1700" b="1">
+                <a:solidFill>
+                  <a:srgbClr val="1E1E1E"/>
+                </a:solidFill>
+                <a:latin typeface="Arial"/>
+              </a:rPr>
+              <a:t>VRBA, J. et al. </a:t>
+            </a:r>
+            <a:r>
+              <a:rPr sz="1700" b="0">
+                <a:solidFill>
+                  <a:srgbClr val="4E4E4E"/>
+                </a:solidFill>
+                <a:latin typeface="Arial"/>
+              </a:rPr>
+              <a:t>Reproducible ML-based voice pathology detection. J. Voice, 2025.</a:t>
+            </a:r>
+          </a:p>
+        </p:txBody>
+      </p:sp>
+      <p:sp>
+        <p:nvSpPr>
+          <p:cNvPr id="185" name="TextBox 184"/>
+          <p:cNvSpPr txBox="1"/>
+          <p:nvPr/>
+        </p:nvSpPr>
+        <p:spPr>
+          <a:xfrm>
+            <a:off x="17496000" y="39650400"/>
+            <a:ext cx="11736000" cy="486000"/>
+          </a:xfrm>
+          <a:prstGeom prst="rect">
+            <a:avLst/>
+          </a:prstGeom>
+          <a:noFill/>
+        </p:spPr>
+        <p:txBody>
+          <a:bodyPr wrap="square" anchor="t" lIns="0" rIns="0" tIns="0" bIns="0">
+            <a:spAutoFit/>
+          </a:bodyPr>
+          <a:lstStyle/>
+          <a:p>
+            <a:pPr algn="l">
+              <a:lnSpc>
+                <a:spcPct val="90000"/>
+              </a:lnSpc>
+            </a:pPr>
+            <a:r>
+              <a:rPr sz="1700" b="1">
+                <a:solidFill>
+                  <a:srgbClr val="1E1E1E"/>
+                </a:solidFill>
+                <a:latin typeface="Arial"/>
+              </a:rPr>
+              <a:t>LEE, J.-Y. </a:t>
+            </a:r>
+            <a:r>
+              <a:rPr sz="1700" b="0">
+                <a:solidFill>
+                  <a:srgbClr val="4E4E4E"/>
+                </a:solidFill>
+                <a:latin typeface="Arial"/>
+              </a:rPr>
+              <a:t>Deep learning for pathological voice detection. Appl. Sci., v. 11, 2021.</a:t>
+            </a:r>
+          </a:p>
+        </p:txBody>
+      </p:sp>
+      <p:sp>
+        <p:nvSpPr>
+          <p:cNvPr id="186" name="TextBox 185"/>
+          <p:cNvSpPr txBox="1"/>
+          <p:nvPr/>
+        </p:nvSpPr>
+        <p:spPr>
+          <a:xfrm>
+            <a:off x="17496000" y="40075200"/>
+            <a:ext cx="11736000" cy="486000"/>
+          </a:xfrm>
+          <a:prstGeom prst="rect">
+            <a:avLst/>
+          </a:prstGeom>
+          <a:noFill/>
+        </p:spPr>
+        <p:txBody>
+          <a:bodyPr wrap="square" anchor="t" lIns="0" rIns="0" tIns="0" bIns="0">
+            <a:spAutoFit/>
+          </a:bodyPr>
+          <a:lstStyle/>
+          <a:p>
+            <a:pPr algn="l">
+              <a:lnSpc>
+                <a:spcPct val="90000"/>
+              </a:lnSpc>
+            </a:pPr>
+            <a:r>
+              <a:rPr sz="1700" b="1">
+                <a:solidFill>
+                  <a:srgbClr val="1E1E1E"/>
+                </a:solidFill>
+                <a:latin typeface="Arial"/>
+              </a:rPr>
+              <a:t>GUIDO, R. C. </a:t>
+            </a:r>
+            <a:r>
+              <a:rPr sz="1700" b="0">
+                <a:solidFill>
+                  <a:srgbClr val="4E4E4E"/>
+                </a:solidFill>
+                <a:latin typeface="Arial"/>
+              </a:rPr>
+              <a:t>Wavelets behind the scenes. Physics Reports, v. 985, 2022.</a:t>
+            </a:r>
+          </a:p>
+        </p:txBody>
+      </p:sp>
+      <p:sp>
+        <p:nvSpPr>
+          <p:cNvPr id="187" name="TextBox 186"/>
+          <p:cNvSpPr txBox="1"/>
+          <p:nvPr/>
+        </p:nvSpPr>
+        <p:spPr>
+          <a:xfrm>
+            <a:off x="17496000" y="40500000"/>
+            <a:ext cx="11736000" cy="486000"/>
+          </a:xfrm>
+          <a:prstGeom prst="rect">
+            <a:avLst/>
+          </a:prstGeom>
+          <a:noFill/>
+        </p:spPr>
+        <p:txBody>
+          <a:bodyPr wrap="square" anchor="t" lIns="0" rIns="0" tIns="0" bIns="0">
+            <a:spAutoFit/>
+          </a:bodyPr>
+          <a:lstStyle/>
+          <a:p>
+            <a:pPr algn="l">
+              <a:lnSpc>
+                <a:spcPct val="90000"/>
+              </a:lnSpc>
+            </a:pPr>
+            <a:r>
+              <a:rPr sz="1700" b="1">
+                <a:solidFill>
+                  <a:srgbClr val="1E1E1E"/>
+                </a:solidFill>
+                <a:latin typeface="Arial"/>
+              </a:rPr>
+              <a:t>KINGMA, D. P.; BA, J. </a:t>
+            </a:r>
+            <a:r>
+              <a:rPr sz="1700" b="0">
+                <a:solidFill>
+                  <a:srgbClr val="4E4E4E"/>
+                </a:solidFill>
+                <a:latin typeface="Arial"/>
+              </a:rPr>
+              <a:t>Adam: stochastic optimization. ICLR, 2015.</a:t>
+            </a:r>
+          </a:p>
+        </p:txBody>
+      </p:sp>
+      <p:sp>
+        <p:nvSpPr>
+          <p:cNvPr id="188" name="TextBox 187"/>
+          <p:cNvSpPr txBox="1"/>
+          <p:nvPr/>
+        </p:nvSpPr>
+        <p:spPr>
+          <a:xfrm>
+            <a:off x="28944000" y="40320000"/>
+            <a:ext cx="2880000" cy="540000"/>
+          </a:xfrm>
+          <a:prstGeom prst="rect">
+            <a:avLst/>
+          </a:prstGeom>
+          <a:noFill/>
+        </p:spPr>
+        <p:txBody>
+          <a:bodyPr wrap="square" anchor="ctr" lIns="0" rIns="0" tIns="0" bIns="0">
+            <a:spAutoFit/>
+          </a:bodyPr>
+          <a:lstStyle/>
+          <a:p>
+            <a:pPr algn="ctr">
+              <a:lnSpc>
+                <a:spcPct val="90000"/>
+              </a:lnSpc>
+            </a:pPr>
+            <a:r>
+              <a:rPr sz="1600" b="1">
+                <a:solidFill>
+                  <a:srgbClr val="1E1E1E"/>
+                </a:solidFill>
+                <a:latin typeface="Arial"/>
+              </a:rPr>
+              <a:t>código-fonte</a:t>
+            </a:r>
+          </a:p>
+          <a:p>
+            <a:pPr algn="ctr">
+              <a:lnSpc>
+                <a:spcPct val="90000"/>
+              </a:lnSpc>
+            </a:pPr>
+            <a:r>
+              <a:rPr sz="1600" b="0">
+                <a:solidFill>
+                  <a:srgbClr val="4E4E4E"/>
+                </a:solidFill>
+                <a:latin typeface="Arial"/>
+              </a:rPr>
+              <a:t>e dados completos</a:t>
+            </a:r>
           </a:p>
         </p:txBody>
       </p:sp>
